--- a/docs/apresentacao-2-slides.pptx
+++ b/docs/apresentacao-2-slides.pptx
@@ -6,7 +6,7 @@
   </p:sldMasterIdLst>
   <p:sldIdLst>
     <p:sldId id="256" r:id="rId7"/>
-    <p:sldId id="257" r:id="rId8"/>
+    <p:sldId id="257" r:id="rId9"/>
   </p:sldIdLst>
   <p:sldSz cx="12191695" cy="6858000" type="screen4x3"/>
   <p:notesSz cx="6858000" cy="9144000"/>
@@ -106,6 +106,882 @@
     </a:lvl9pPr>
   </p:defaultTextStyle>
 </p:presentation>
+</file>
+
+<file path=ppt/charts/chart1.xml><?xml version="1.0" encoding="utf-8"?>
+<c:chartSpace xmlns:c="http://schemas.openxmlformats.org/drawingml/2006/chart" xmlns:a="http://schemas.openxmlformats.org/drawingml/2006/main" xmlns:r="http://schemas.openxmlformats.org/officeDocument/2006/relationships">
+  <c:date1904 val="0"/>
+  <c:chart>
+    <c:autoTitleDeleted val="0"/>
+    <c:plotArea>
+      <c:barChart>
+        <c:barDir val="col"/>
+        <c:grouping val="clustered"/>
+        <c:ser>
+          <c:idx val="0"/>
+          <c:order val="0"/>
+          <c:tx>
+            <c:strRef>
+              <c:f>Sheet1!$B$1</c:f>
+              <c:strCache>
+                <c:ptCount val="1"/>
+                <c:pt idx="0">
+                  <c:v>Comandos</c:v>
+                </c:pt>
+              </c:strCache>
+            </c:strRef>
+          </c:tx>
+          <c:spPr>
+            <a:solidFill>
+              <a:srgbClr val="1F5FA8"/>
+            </a:solidFill>
+          </c:spPr>
+          <c:dLbls>
+            <c:numFmt formatCode="0%" sourceLinked="0"/>
+            <c:txPr>
+              <a:bodyPr/>
+              <a:lstStyle/>
+              <a:p>
+                <a:pPr>
+                  <a:defRPr sz="800">
+                    <a:latin typeface="Segoe UI"/>
+                  </a:defRPr>
+                </a:pPr>
+              </a:p>
+            </c:txPr>
+            <c:dLblPos val="outEnd"/>
+            <c:showLegendKey val="0"/>
+            <c:showVal val="1"/>
+            <c:showCatName val="0"/>
+            <c:showSerName val="0"/>
+            <c:showPercent val="0"/>
+            <c:showBubbleSize val="0"/>
+            <c:showLeaderLines val="1"/>
+          </c:dLbls>
+          <c:cat>
+            <c:strRef>
+              <c:f>Sheet1!$A$2:$A$5</c:f>
+              <c:strCache>
+                <c:ptCount val="4"/>
+                <c:pt idx="0">
+                  <c:v>Funcional (52)</c:v>
+                </c:pt>
+                <c:pt idx="1">
+                  <c:v>Estrutural (59)</c:v>
+                </c:pt>
+                <c:pt idx="2">
+                  <c:v>Correção (59)</c:v>
+                </c:pt>
+                <c:pt idx="3">
+                  <c:v>Mutação (64)</c:v>
+                </c:pt>
+              </c:strCache>
+            </c:strRef>
+          </c:cat>
+          <c:val>
+            <c:numRef>
+              <c:f>Sheet1!$B$2:$B$5</c:f>
+              <c:numCache>
+                <c:formatCode>General</c:formatCode>
+                <c:ptCount val="4"/>
+                <c:pt idx="0">
+                  <c:v>0.903</c:v>
+                </c:pt>
+                <c:pt idx="1">
+                  <c:v>1.0</c:v>
+                </c:pt>
+                <c:pt idx="2">
+                  <c:v>1.0</c:v>
+                </c:pt>
+                <c:pt idx="3">
+                  <c:v>1.0</c:v>
+                </c:pt>
+              </c:numCache>
+            </c:numRef>
+          </c:val>
+        </c:ser>
+        <c:ser>
+          <c:idx val="1"/>
+          <c:order val="1"/>
+          <c:tx>
+            <c:strRef>
+              <c:f>Sheet1!$C$1</c:f>
+              <c:strCache>
+                <c:ptCount val="1"/>
+                <c:pt idx="0">
+                  <c:v>Desvios</c:v>
+                </c:pt>
+              </c:strCache>
+            </c:strRef>
+          </c:tx>
+          <c:spPr>
+            <a:solidFill>
+              <a:srgbClr val="8A1038"/>
+            </a:solidFill>
+          </c:spPr>
+          <c:dLbls>
+            <c:numFmt formatCode="0%" sourceLinked="0"/>
+            <c:txPr>
+              <a:bodyPr/>
+              <a:lstStyle/>
+              <a:p>
+                <a:pPr>
+                  <a:defRPr sz="800">
+                    <a:latin typeface="Segoe UI"/>
+                  </a:defRPr>
+                </a:pPr>
+              </a:p>
+            </c:txPr>
+            <c:dLblPos val="outEnd"/>
+            <c:showLegendKey val="0"/>
+            <c:showVal val="1"/>
+            <c:showCatName val="0"/>
+            <c:showSerName val="0"/>
+            <c:showPercent val="0"/>
+            <c:showBubbleSize val="0"/>
+            <c:showLeaderLines val="1"/>
+          </c:dLbls>
+          <c:cat>
+            <c:strRef>
+              <c:f>Sheet1!$A$2:$A$5</c:f>
+              <c:strCache>
+                <c:ptCount val="4"/>
+                <c:pt idx="0">
+                  <c:v>Funcional (52)</c:v>
+                </c:pt>
+                <c:pt idx="1">
+                  <c:v>Estrutural (59)</c:v>
+                </c:pt>
+                <c:pt idx="2">
+                  <c:v>Correção (59)</c:v>
+                </c:pt>
+                <c:pt idx="3">
+                  <c:v>Mutação (64)</c:v>
+                </c:pt>
+              </c:strCache>
+            </c:strRef>
+          </c:cat>
+          <c:val>
+            <c:numRef>
+              <c:f>Sheet1!$C$2:$C$5</c:f>
+              <c:numCache>
+                <c:formatCode>General</c:formatCode>
+                <c:ptCount val="4"/>
+                <c:pt idx="0">
+                  <c:v>0.833</c:v>
+                </c:pt>
+                <c:pt idx="1">
+                  <c:v>0.981</c:v>
+                </c:pt>
+                <c:pt idx="2">
+                  <c:v>1.0</c:v>
+                </c:pt>
+                <c:pt idx="3">
+                  <c:v>1.0</c:v>
+                </c:pt>
+              </c:numCache>
+            </c:numRef>
+          </c:val>
+        </c:ser>
+        <c:ser>
+          <c:idx val="2"/>
+          <c:order val="2"/>
+          <c:tx>
+            <c:strRef>
+              <c:f>Sheet1!$D$1</c:f>
+              <c:strCache>
+                <c:ptCount val="1"/>
+                <c:pt idx="0">
+                  <c:v>Escore de mutação</c:v>
+                </c:pt>
+              </c:strCache>
+            </c:strRef>
+          </c:tx>
+          <c:spPr>
+            <a:solidFill>
+              <a:srgbClr val="1E8E5A"/>
+            </a:solidFill>
+          </c:spPr>
+          <c:dLbls>
+            <c:numFmt formatCode="0%" sourceLinked="0"/>
+            <c:txPr>
+              <a:bodyPr/>
+              <a:lstStyle/>
+              <a:p>
+                <a:pPr>
+                  <a:defRPr sz="800">
+                    <a:latin typeface="Segoe UI"/>
+                  </a:defRPr>
+                </a:pPr>
+              </a:p>
+            </c:txPr>
+            <c:dLblPos val="outEnd"/>
+            <c:showLegendKey val="0"/>
+            <c:showVal val="1"/>
+            <c:showCatName val="0"/>
+            <c:showSerName val="0"/>
+            <c:showPercent val="0"/>
+            <c:showBubbleSize val="0"/>
+            <c:showLeaderLines val="1"/>
+          </c:dLbls>
+          <c:cat>
+            <c:strRef>
+              <c:f>Sheet1!$A$2:$A$5</c:f>
+              <c:strCache>
+                <c:ptCount val="4"/>
+                <c:pt idx="0">
+                  <c:v>Funcional (52)</c:v>
+                </c:pt>
+                <c:pt idx="1">
+                  <c:v>Estrutural (59)</c:v>
+                </c:pt>
+                <c:pt idx="2">
+                  <c:v>Correção (59)</c:v>
+                </c:pt>
+                <c:pt idx="3">
+                  <c:v>Mutação (64)</c:v>
+                </c:pt>
+              </c:strCache>
+            </c:strRef>
+          </c:cat>
+          <c:val>
+            <c:numRef>
+              <c:f>Sheet1!$D$2:$D$5</c:f>
+              <c:numCache>
+                <c:formatCode>General</c:formatCode>
+                <c:ptCount val="4"/>
+                <c:pt idx="2">
+                  <c:v>0.9359999999999999</c:v>
+                </c:pt>
+                <c:pt idx="3">
+                  <c:v>0.961</c:v>
+                </c:pt>
+              </c:numCache>
+            </c:numRef>
+          </c:val>
+        </c:ser>
+        <c:gapWidth val="70"/>
+        <c:axId val="-2068027336"/>
+        <c:axId val="-2113994440"/>
+      </c:barChart>
+      <c:catAx>
+        <c:axId val="-2068027336"/>
+        <c:scaling>
+          <c:orientation val="minMax"/>
+        </c:scaling>
+        <c:delete val="0"/>
+        <c:axPos val="b"/>
+        <c:majorTickMark val="out"/>
+        <c:minorTickMark val="none"/>
+        <c:tickLblPos val="nextTo"/>
+        <c:txPr>
+          <a:bodyPr/>
+          <a:lstStyle/>
+          <a:p>
+            <a:pPr>
+              <a:defRPr sz="900">
+                <a:latin typeface="Segoe UI"/>
+              </a:defRPr>
+            </a:pPr>
+          </a:p>
+        </c:txPr>
+        <c:crossAx val="-2113994440"/>
+        <c:crosses val="autoZero"/>
+        <c:auto val="1"/>
+        <c:lblAlgn val="ctr"/>
+        <c:lblOffset val="100"/>
+        <c:noMultiLvlLbl val="0"/>
+      </c:catAx>
+      <c:valAx>
+        <c:axId val="-2113994440"/>
+        <c:scaling>
+          <c:max val="1.18"/>
+          <c:min val="0.0"/>
+        </c:scaling>
+        <c:delete/>
+        <c:axPos val="l"/>
+        <c:majorTickMark val="out"/>
+        <c:minorTickMark val="none"/>
+        <c:tickLblPos val="nextTo"/>
+        <c:crossAx val="-2068027336"/>
+        <c:crosses val="autoZero"/>
+      </c:valAx>
+    </c:plotArea>
+    <c:legend>
+      <c:legendPos val="t"/>
+      <c:overlay val="0"/>
+      <c:txPr>
+        <a:bodyPr/>
+        <a:lstStyle/>
+        <a:p>
+          <a:pPr>
+            <a:defRPr sz="900">
+              <a:latin typeface="Segoe UI"/>
+            </a:defRPr>
+          </a:pPr>
+        </a:p>
+      </c:txPr>
+    </c:legend>
+    <c:dispBlanksAs val="gap"/>
+  </c:chart>
+  <c:txPr>
+    <a:bodyPr/>
+    <a:lstStyle/>
+    <a:p>
+      <a:pPr>
+        <a:defRPr sz="1800"/>
+      </a:pPr>
+      <a:endParaRPr lang="en-US"/>
+    </a:p>
+  </c:txPr>
+  <c:externalData r:id="rId1">
+    <c:autoUpdate val="0"/>
+  </c:externalData>
+</c:chartSpace>
+</file>
+
+<file path=ppt/notesMasters/notesMaster1.xml><?xml version="1.0" encoding="utf-8"?>
+<p:notesMaster xmlns:a="http://schemas.openxmlformats.org/drawingml/2006/main" xmlns:p="http://schemas.openxmlformats.org/presentationml/2006/main" xmlns:r="http://schemas.openxmlformats.org/officeDocument/2006/relationships">
+  <p:cSld>
+    <p:bg>
+      <p:bgRef idx="1001">
+        <a:schemeClr val="bg1"/>
+      </p:bgRef>
+    </p:bg>
+    <p:spTree>
+      <p:nvGrpSpPr>
+        <p:cNvPr id="1" name=""/>
+        <p:cNvGrpSpPr/>
+        <p:nvPr/>
+      </p:nvGrpSpPr>
+      <p:grpSpPr>
+        <a:xfrm>
+          <a:off x="0" y="0"/>
+          <a:ext cx="0" cy="0"/>
+          <a:chOff x="0" y="0"/>
+          <a:chExt cx="0" cy="0"/>
+        </a:xfrm>
+      </p:grpSpPr>
+      <p:sp>
+        <p:nvSpPr>
+          <p:cNvPr id="2" name="Header Placeholder 1"/>
+          <p:cNvSpPr>
+            <a:spLocks noGrp="1"/>
+          </p:cNvSpPr>
+          <p:nvPr>
+            <p:ph type="hdr" sz="quarter"/>
+          </p:nvPr>
+        </p:nvSpPr>
+        <p:spPr>
+          <a:xfrm>
+            <a:off x="0" y="0"/>
+            <a:ext cx="2971800" cy="457200"/>
+          </a:xfrm>
+          <a:prstGeom prst="rect">
+            <a:avLst/>
+          </a:prstGeom>
+        </p:spPr>
+        <p:txBody>
+          <a:bodyPr vert="horz" lIns="91440" tIns="45720" rIns="91440" bIns="45720" rtlCol="0"/>
+          <a:lstStyle>
+            <a:lvl1pPr algn="l">
+              <a:defRPr sz="1200"/>
+            </a:lvl1pPr>
+          </a:lstStyle>
+          <a:p>
+            <a:endParaRPr lang="en-US"/>
+          </a:p>
+        </p:txBody>
+      </p:sp>
+      <p:sp>
+        <p:nvSpPr>
+          <p:cNvPr id="3" name="Date Placeholder 2"/>
+          <p:cNvSpPr>
+            <a:spLocks noGrp="1"/>
+          </p:cNvSpPr>
+          <p:nvPr>
+            <p:ph type="dt" idx="1"/>
+          </p:nvPr>
+        </p:nvSpPr>
+        <p:spPr>
+          <a:xfrm>
+            <a:off x="3884613" y="0"/>
+            <a:ext cx="2971800" cy="457200"/>
+          </a:xfrm>
+          <a:prstGeom prst="rect">
+            <a:avLst/>
+          </a:prstGeom>
+        </p:spPr>
+        <p:txBody>
+          <a:bodyPr vert="horz" lIns="91440" tIns="45720" rIns="91440" bIns="45720" rtlCol="0"/>
+          <a:lstStyle>
+            <a:lvl1pPr algn="r">
+              <a:defRPr sz="1200"/>
+            </a:lvl1pPr>
+          </a:lstStyle>
+          <a:p>
+            <a:fld id="{0F89C1C7-3DCD-1040-A9CF-14679D8B5DDD}" type="datetimeFigureOut">
+              <a:rPr lang="en-US" smtClean="0"/>
+              <a:t>10/17/16</a:t>
+            </a:fld>
+            <a:endParaRPr lang="en-US"/>
+          </a:p>
+        </p:txBody>
+      </p:sp>
+      <p:sp>
+        <p:nvSpPr>
+          <p:cNvPr id="4" name="Slide Image Placeholder 3"/>
+          <p:cNvSpPr>
+            <a:spLocks noGrp="1" noRot="1" noChangeAspect="1"/>
+          </p:cNvSpPr>
+          <p:nvPr>
+            <p:ph type="sldImg" idx="2"/>
+          </p:nvPr>
+        </p:nvSpPr>
+        <p:spPr>
+          <a:xfrm>
+            <a:off x="1143000" y="685800"/>
+            <a:ext cx="4572000" cy="3429000"/>
+          </a:xfrm>
+          <a:prstGeom prst="rect">
+            <a:avLst/>
+          </a:prstGeom>
+          <a:noFill/>
+          <a:ln w="12700">
+            <a:solidFill>
+              <a:prstClr val="black"/>
+            </a:solidFill>
+          </a:ln>
+        </p:spPr>
+        <p:txBody>
+          <a:bodyPr vert="horz" lIns="91440" tIns="45720" rIns="91440" bIns="45720" rtlCol="0" anchor="ctr"/>
+          <a:lstStyle/>
+          <a:p>
+            <a:endParaRPr lang="en-US"/>
+          </a:p>
+        </p:txBody>
+      </p:sp>
+      <p:sp>
+        <p:nvSpPr>
+          <p:cNvPr id="5" name="Notes Placeholder 4"/>
+          <p:cNvSpPr>
+            <a:spLocks noGrp="1"/>
+          </p:cNvSpPr>
+          <p:nvPr>
+            <p:ph type="body" sz="quarter" idx="3"/>
+          </p:nvPr>
+        </p:nvSpPr>
+        <p:spPr>
+          <a:xfrm>
+            <a:off x="685800" y="4343400"/>
+            <a:ext cx="5486400" cy="4114800"/>
+          </a:xfrm>
+          <a:prstGeom prst="rect">
+            <a:avLst/>
+          </a:prstGeom>
+        </p:spPr>
+        <p:txBody>
+          <a:bodyPr vert="horz" lIns="91440" tIns="45720" rIns="91440" bIns="45720" rtlCol="0"/>
+          <a:lstStyle/>
+          <a:p>
+            <a:pPr lvl="0"/>
+            <a:r>
+              <a:rPr lang="en-US" smtClean="0"/>
+              <a:t>Click to edit Master text styles</a:t>
+            </a:r>
+          </a:p>
+          <a:p>
+            <a:pPr lvl="1"/>
+            <a:r>
+              <a:rPr lang="en-US" smtClean="0"/>
+              <a:t>Second level</a:t>
+            </a:r>
+          </a:p>
+          <a:p>
+            <a:pPr lvl="2"/>
+            <a:r>
+              <a:rPr lang="en-US" smtClean="0"/>
+              <a:t>Third level</a:t>
+            </a:r>
+          </a:p>
+          <a:p>
+            <a:pPr lvl="3"/>
+            <a:r>
+              <a:rPr lang="en-US" smtClean="0"/>
+              <a:t>Fourth level</a:t>
+            </a:r>
+          </a:p>
+          <a:p>
+            <a:pPr lvl="4"/>
+            <a:r>
+              <a:rPr lang="en-US" smtClean="0"/>
+              <a:t>Fifth level</a:t>
+            </a:r>
+            <a:endParaRPr lang="en-US"/>
+          </a:p>
+        </p:txBody>
+      </p:sp>
+      <p:sp>
+        <p:nvSpPr>
+          <p:cNvPr id="6" name="Footer Placeholder 5"/>
+          <p:cNvSpPr>
+            <a:spLocks noGrp="1"/>
+          </p:cNvSpPr>
+          <p:nvPr>
+            <p:ph type="ftr" sz="quarter" idx="4"/>
+          </p:nvPr>
+        </p:nvSpPr>
+        <p:spPr>
+          <a:xfrm>
+            <a:off x="0" y="8685213"/>
+            <a:ext cx="2971800" cy="457200"/>
+          </a:xfrm>
+          <a:prstGeom prst="rect">
+            <a:avLst/>
+          </a:prstGeom>
+        </p:spPr>
+        <p:txBody>
+          <a:bodyPr vert="horz" lIns="91440" tIns="45720" rIns="91440" bIns="45720" rtlCol="0" anchor="b"/>
+          <a:lstStyle>
+            <a:lvl1pPr algn="l">
+              <a:defRPr sz="1200"/>
+            </a:lvl1pPr>
+          </a:lstStyle>
+          <a:p>
+            <a:endParaRPr lang="en-US"/>
+          </a:p>
+        </p:txBody>
+      </p:sp>
+      <p:sp>
+        <p:nvSpPr>
+          <p:cNvPr id="7" name="Slide Number Placeholder 6"/>
+          <p:cNvSpPr>
+            <a:spLocks noGrp="1"/>
+          </p:cNvSpPr>
+          <p:nvPr>
+            <p:ph type="sldNum" sz="quarter" idx="5"/>
+          </p:nvPr>
+        </p:nvSpPr>
+        <p:spPr>
+          <a:xfrm>
+            <a:off x="3884613" y="8685213"/>
+            <a:ext cx="2971800" cy="457200"/>
+          </a:xfrm>
+          <a:prstGeom prst="rect">
+            <a:avLst/>
+          </a:prstGeom>
+        </p:spPr>
+        <p:txBody>
+          <a:bodyPr vert="horz" lIns="91440" tIns="45720" rIns="91440" bIns="45720" rtlCol="0" anchor="b"/>
+          <a:lstStyle>
+            <a:lvl1pPr algn="r">
+              <a:defRPr sz="1200"/>
+            </a:lvl1pPr>
+          </a:lstStyle>
+          <a:p>
+            <a:fld id="{BB5E49A5-4136-284D-997B-48E1D791AD67}" type="slidenum">
+              <a:rPr lang="en-US" smtClean="0"/>
+              <a:t>‹#›</a:t>
+            </a:fld>
+            <a:endParaRPr lang="en-US"/>
+          </a:p>
+        </p:txBody>
+      </p:sp>
+    </p:spTree>
+    <p:extLst>
+      <p:ext uri="{BB962C8B-B14F-4D97-AF65-F5344CB8AC3E}">
+        <p14:creationId xmlns:p14="http://schemas.microsoft.com/office/powerpoint/2010/main" val="2623252185"/>
+      </p:ext>
+    </p:extLst>
+  </p:cSld>
+  <p:clrMap bg1="lt1" tx1="dk1" bg2="lt2" tx2="dk2" accent1="accent1" accent2="accent2" accent3="accent3" accent4="accent4" accent5="accent5" accent6="accent6" hlink="hlink" folHlink="folHlink"/>
+  <p:notesStyle>
+    <a:lvl1pPr marL="0" algn="l" defTabSz="457200" rtl="0" eaLnBrk="1" latinLnBrk="0" hangingPunct="1">
+      <a:defRPr sz="1200" kern="1200">
+        <a:solidFill>
+          <a:schemeClr val="tx1"/>
+        </a:solidFill>
+        <a:latin typeface="+mn-lt"/>
+        <a:ea typeface="+mn-ea"/>
+        <a:cs typeface="+mn-cs"/>
+      </a:defRPr>
+    </a:lvl1pPr>
+    <a:lvl2pPr marL="457200" algn="l" defTabSz="457200" rtl="0" eaLnBrk="1" latinLnBrk="0" hangingPunct="1">
+      <a:defRPr sz="1200" kern="1200">
+        <a:solidFill>
+          <a:schemeClr val="tx1"/>
+        </a:solidFill>
+        <a:latin typeface="+mn-lt"/>
+        <a:ea typeface="+mn-ea"/>
+        <a:cs typeface="+mn-cs"/>
+      </a:defRPr>
+    </a:lvl2pPr>
+    <a:lvl3pPr marL="914400" algn="l" defTabSz="457200" rtl="0" eaLnBrk="1" latinLnBrk="0" hangingPunct="1">
+      <a:defRPr sz="1200" kern="1200">
+        <a:solidFill>
+          <a:schemeClr val="tx1"/>
+        </a:solidFill>
+        <a:latin typeface="+mn-lt"/>
+        <a:ea typeface="+mn-ea"/>
+        <a:cs typeface="+mn-cs"/>
+      </a:defRPr>
+    </a:lvl3pPr>
+    <a:lvl4pPr marL="1371600" algn="l" defTabSz="457200" rtl="0" eaLnBrk="1" latinLnBrk="0" hangingPunct="1">
+      <a:defRPr sz="1200" kern="1200">
+        <a:solidFill>
+          <a:schemeClr val="tx1"/>
+        </a:solidFill>
+        <a:latin typeface="+mn-lt"/>
+        <a:ea typeface="+mn-ea"/>
+        <a:cs typeface="+mn-cs"/>
+      </a:defRPr>
+    </a:lvl4pPr>
+    <a:lvl5pPr marL="1828800" algn="l" defTabSz="457200" rtl="0" eaLnBrk="1" latinLnBrk="0" hangingPunct="1">
+      <a:defRPr sz="1200" kern="1200">
+        <a:solidFill>
+          <a:schemeClr val="tx1"/>
+        </a:solidFill>
+        <a:latin typeface="+mn-lt"/>
+        <a:ea typeface="+mn-ea"/>
+        <a:cs typeface="+mn-cs"/>
+      </a:defRPr>
+    </a:lvl5pPr>
+    <a:lvl6pPr marL="2286000" algn="l" defTabSz="457200" rtl="0" eaLnBrk="1" latinLnBrk="0" hangingPunct="1">
+      <a:defRPr sz="1200" kern="1200">
+        <a:solidFill>
+          <a:schemeClr val="tx1"/>
+        </a:solidFill>
+        <a:latin typeface="+mn-lt"/>
+        <a:ea typeface="+mn-ea"/>
+        <a:cs typeface="+mn-cs"/>
+      </a:defRPr>
+    </a:lvl6pPr>
+    <a:lvl7pPr marL="2743200" algn="l" defTabSz="457200" rtl="0" eaLnBrk="1" latinLnBrk="0" hangingPunct="1">
+      <a:defRPr sz="1200" kern="1200">
+        <a:solidFill>
+          <a:schemeClr val="tx1"/>
+        </a:solidFill>
+        <a:latin typeface="+mn-lt"/>
+        <a:ea typeface="+mn-ea"/>
+        <a:cs typeface="+mn-cs"/>
+      </a:defRPr>
+    </a:lvl7pPr>
+    <a:lvl8pPr marL="3200400" algn="l" defTabSz="457200" rtl="0" eaLnBrk="1" latinLnBrk="0" hangingPunct="1">
+      <a:defRPr sz="1200" kern="1200">
+        <a:solidFill>
+          <a:schemeClr val="tx1"/>
+        </a:solidFill>
+        <a:latin typeface="+mn-lt"/>
+        <a:ea typeface="+mn-ea"/>
+        <a:cs typeface="+mn-cs"/>
+      </a:defRPr>
+    </a:lvl8pPr>
+    <a:lvl9pPr marL="3657600" algn="l" defTabSz="457200" rtl="0" eaLnBrk="1" latinLnBrk="0" hangingPunct="1">
+      <a:defRPr sz="1200" kern="1200">
+        <a:solidFill>
+          <a:schemeClr val="tx1"/>
+        </a:solidFill>
+        <a:latin typeface="+mn-lt"/>
+        <a:ea typeface="+mn-ea"/>
+        <a:cs typeface="+mn-cs"/>
+      </a:defRPr>
+    </a:lvl9pPr>
+  </p:notesStyle>
+</p:notesMaster>
+</file>
+
+<file path=ppt/notesSlides/notesSlide1.xml><?xml version="1.0" encoding="utf-8"?>
+<p:notes xmlns:a="http://schemas.openxmlformats.org/drawingml/2006/main" xmlns:p="http://schemas.openxmlformats.org/presentationml/2006/main" xmlns:r="http://schemas.openxmlformats.org/officeDocument/2006/relationships">
+  <p:cSld>
+    <p:spTree>
+      <p:nvGrpSpPr>
+        <p:cNvPr id="1" name=""/>
+        <p:cNvGrpSpPr/>
+        <p:nvPr/>
+      </p:nvGrpSpPr>
+      <p:grpSpPr>
+        <a:xfrm>
+          <a:off x="0" y="0"/>
+          <a:ext cx="0" cy="0"/>
+          <a:chOff x="0" y="0"/>
+          <a:chExt cx="0" cy="0"/>
+        </a:xfrm>
+      </p:grpSpPr>
+      <p:sp>
+        <p:nvSpPr>
+          <p:cNvPr id="2" name="Slide Image Placeholder 1"/>
+          <p:cNvSpPr>
+            <a:spLocks noGrp="1"/>
+          </p:cNvSpPr>
+          <p:nvPr>
+            <p:ph type="sldImg" idx="2"/>
+          </p:nvPr>
+        </p:nvSpPr>
+        <p:spPr/>
+      </p:sp>
+      <p:sp>
+        <p:nvSpPr>
+          <p:cNvPr id="3" name="Notes Placeholder 2"/>
+          <p:cNvSpPr>
+            <a:spLocks noGrp="1"/>
+          </p:cNvSpPr>
+          <p:nvPr>
+            <p:ph type="body" idx="3" sz="quarter"/>
+          </p:nvPr>
+        </p:nvSpPr>
+        <p:spPr/>
+        <p:txBody>
+          <a:bodyPr/>
+          <a:lstStyle/>
+          <a:p>
+            <a:r>
+              <a:t>Objetivo (30 s): testar um sistema web de terceiros, o Hotel Management System em Flask, nas três funcionalidades com regra de negócio: reservar, cancelar e consultar disponibilidade.</a:t>
+            </a:r>
+          </a:p>
+          <a:p/>
+          <a:p>
+            <a:r>
+              <a:t>Funcional (40 s): só com o README e a interface, particionei 22 condições em 48 classes e apliquei valor limite (entrada hoje, uma noite, capacidade, estadias adjacentes). Foram 52 casos; no código original 30 falharam e revelaram 16 defeitos.</a:t>
+            </a:r>
+          </a:p>
+          <a:p/>
+          <a:p>
+            <a:r>
+              <a:t>Estrutural (40 s): medi com coverage.py --branch e defini a meta de 100% dos desvios viáveis. Os ramos que faltavam levaram a 7 casos novos e, lendo o código, a 3 defeitos que a especificação não sugeria: estado global, remoção dentro do laço e um produto cartesiano.</a:t>
+            </a:r>
+          </a:p>
+          <a:p/>
+          <a:p>
+            <a:r>
+              <a:t>Correção (30 s): antes de mutar, corrigi os 19 defeitos no fork, um commit por grupo. O mesmo teste é xfail estrito no original e passa no corrigido: isso comprova cada correção.</a:t>
+            </a:r>
+          </a:p>
+          <a:p/>
+          <a:p>
+            <a:r>
+              <a:t>Mutação (40 s): Cosmic Ray sobre todos os 204 mutantes das funções do recorte. Dos 13 vivos, 5 eram matáveis e ganharam casos; os 8 restantes são equivalentes e estão justificados no relatório.</a:t>
+            </a:r>
+          </a:p>
+          <a:p/>
+          <a:p>
+            <a:r>
+              <a:t>Ferramenta (20 s): organizei tudo no V&amp;V TestLab, que importa JUnit, cobertura e mutação pela ponte local e mantém a rastreabilidade até o defeito.</a:t>
+            </a:r>
+          </a:p>
+        </p:txBody>
+      </p:sp>
+      <p:sp>
+        <p:nvSpPr>
+          <p:cNvPr id="4" name="Slide Number Placeholder 3"/>
+          <p:cNvSpPr>
+            <a:spLocks noGrp="1"/>
+          </p:cNvSpPr>
+          <p:nvPr>
+            <p:ph type="sldNum" idx="5" sz="quarter"/>
+          </p:nvPr>
+        </p:nvSpPr>
+        <p:spPr/>
+      </p:sp>
+    </p:spTree>
+  </p:cSld>
+  <p:clrMapOvr>
+    <a:masterClrMapping/>
+  </p:clrMapOvr>
+</p:notes>
+</file>
+
+<file path=ppt/notesSlides/notesSlide2.xml><?xml version="1.0" encoding="utf-8"?>
+<p:notes xmlns:a="http://schemas.openxmlformats.org/drawingml/2006/main" xmlns:p="http://schemas.openxmlformats.org/presentationml/2006/main" xmlns:r="http://schemas.openxmlformats.org/officeDocument/2006/relationships">
+  <p:cSld>
+    <p:spTree>
+      <p:nvGrpSpPr>
+        <p:cNvPr id="1" name=""/>
+        <p:cNvGrpSpPr/>
+        <p:nvPr/>
+      </p:nvGrpSpPr>
+      <p:grpSpPr>
+        <a:xfrm>
+          <a:off x="0" y="0"/>
+          <a:ext cx="0" cy="0"/>
+          <a:chOff x="0" y="0"/>
+          <a:chExt cx="0" cy="0"/>
+        </a:xfrm>
+      </p:grpSpPr>
+      <p:sp>
+        <p:nvSpPr>
+          <p:cNvPr id="2" name="Slide Image Placeholder 1"/>
+          <p:cNvSpPr>
+            <a:spLocks noGrp="1"/>
+          </p:cNvSpPr>
+          <p:nvPr>
+            <p:ph type="sldImg" idx="2"/>
+          </p:nvPr>
+        </p:nvSpPr>
+        <p:spPr/>
+      </p:sp>
+      <p:sp>
+        <p:nvSpPr>
+          <p:cNvPr id="3" name="Notes Placeholder 2"/>
+          <p:cNvSpPr>
+            <a:spLocks noGrp="1"/>
+          </p:cNvSpPr>
+          <p:nvPr>
+            <p:ph type="body" idx="3" sz="quarter"/>
+          </p:nvPr>
+        </p:nvSpPr>
+        <p:spPr/>
+        <p:txBody>
+          <a:bodyPr/>
+          <a:lstStyle/>
+          <a:p>
+            <a:r>
+              <a:t>Números (30 s): a suíte final tem 64 casos, 100% de comandos e desvios nas funções do recorte e 96,1% de escore de mutação. Os 8 mutantes vivos são equivalentes, então 100% dos não equivalentes morreram. No gráfico, a cobertura sobe na etapa estrutural e o escore sobe na mutação.</a:t>
+            </a:r>
+          </a:p>
+          <a:p/>
+          <a:p>
+            <a:r>
+              <a:t>Defeito principal (40 s): a condição de conflito de datas é uma tautologia, sempre verdadeira. Depois da primeira reserva, o quarto nunca mais pode ser reservado. As imagens mostram a mesma reserva recusada no original e aceita no corrigido. Outros graves: cancelar reserva de outra pessoa e apagar dados com um link (GET).</a:t>
+            </a:r>
+          </a:p>
+          <a:p/>
+          <a:p>
+            <a:r>
+              <a:t>Defeito mascarado (20 s): o laço comparava cada quarto com reservas de outros quartos; isso só apareceu depois de corrigir a tautologia.</a:t>
+            </a:r>
+          </a:p>
+          <a:p/>
+          <a:p>
+            <a:r>
+              <a:t>Dificuldades (20 s): o projeto é de 2019 e não roda no Python atual; usei dois ambientes. O Cosmic Ray no Windows exigiu caminho absoluto do interpretador. Onde o README não definia o comportamento, declarei convenções.</a:t>
+            </a:r>
+          </a:p>
+          <a:p/>
+          <a:p>
+            <a:r>
+              <a:t>Lições (40 s): limites acham defeitos que valores típicos não acham; cobertura mede o que executou, não o que foi verificado (o original tinha 100% dos comandos com 33 testes falhando); a mutação avaliou a própria suíte e mostrou fragilidades mesmo com 100% dos desvios; e é preciso corrigir antes de mutar.</a:t>
+            </a:r>
+          </a:p>
+        </p:txBody>
+      </p:sp>
+      <p:sp>
+        <p:nvSpPr>
+          <p:cNvPr id="4" name="Slide Number Placeholder 3"/>
+          <p:cNvSpPr>
+            <a:spLocks noGrp="1"/>
+          </p:cNvSpPr>
+          <p:nvPr>
+            <p:ph type="sldNum" idx="5" sz="quarter"/>
+          </p:nvPr>
+        </p:nvSpPr>
+        <p:spPr/>
+      </p:sp>
+    </p:spTree>
+  </p:cSld>
+  <p:clrMapOvr>
+    <a:masterClrMapping/>
+  </p:clrMapOvr>
+</p:notes>
 </file>
 
 <file path=ppt/slideLayouts/slideLayout1.xml><?xml version="1.0" encoding="utf-8"?>
@@ -3097,8 +3973,153 @@
         </p:nvSpPr>
         <p:spPr>
           <a:xfrm>
-            <a:off x="365760" y="228600"/>
-            <a:ext cx="11430000" cy="548640"/>
+            <a:off x="0" y="0"/>
+            <a:ext cx="12191695" cy="960120"/>
+          </a:xfrm>
+          <a:prstGeom prst="rect">
+            <a:avLst/>
+          </a:prstGeom>
+          <a:solidFill>
+            <a:srgbClr val="0B1F3A"/>
+          </a:solidFill>
+          <a:ln>
+            <a:noFill/>
+          </a:ln>
+          <a:effectLst/>
+        </p:spPr>
+        <p:style>
+          <a:lnRef idx="1">
+            <a:schemeClr val="accent1"/>
+          </a:lnRef>
+          <a:fillRef idx="3">
+            <a:schemeClr val="accent1"/>
+          </a:fillRef>
+          <a:effectRef idx="2">
+            <a:schemeClr val="accent1"/>
+          </a:effectRef>
+          <a:fontRef idx="minor">
+            <a:schemeClr val="lt1"/>
+          </a:fontRef>
+        </p:style>
+        <p:txBody>
+          <a:bodyPr rtlCol="0" anchor="t" wrap="square" lIns="109728" rIns="109728" tIns="54864" bIns="54864"/>
+          <a:lstStyle/>
+          <a:p>
+            <a:pPr algn="ctr"/>
+          </a:p>
+        </p:txBody>
+      </p:sp>
+      <p:sp>
+        <p:nvSpPr>
+          <p:cNvPr id="3" name="Rectangle 2"/>
+          <p:cNvSpPr/>
+          <p:nvPr/>
+        </p:nvSpPr>
+        <p:spPr>
+          <a:xfrm>
+            <a:off x="0" y="960120"/>
+            <a:ext cx="12191695" cy="54864"/>
+          </a:xfrm>
+          <a:prstGeom prst="rect">
+            <a:avLst/>
+          </a:prstGeom>
+          <a:solidFill>
+            <a:srgbClr val="8A1038"/>
+          </a:solidFill>
+          <a:ln>
+            <a:noFill/>
+          </a:ln>
+          <a:effectLst/>
+        </p:spPr>
+        <p:style>
+          <a:lnRef idx="1">
+            <a:schemeClr val="accent1"/>
+          </a:lnRef>
+          <a:fillRef idx="3">
+            <a:schemeClr val="accent1"/>
+          </a:fillRef>
+          <a:effectRef idx="2">
+            <a:schemeClr val="accent1"/>
+          </a:effectRef>
+          <a:fontRef idx="minor">
+            <a:schemeClr val="lt1"/>
+          </a:fontRef>
+        </p:style>
+        <p:txBody>
+          <a:bodyPr rtlCol="0" anchor="t" wrap="square" lIns="109728" rIns="109728" tIns="54864" bIns="54864"/>
+          <a:lstStyle/>
+          <a:p>
+            <a:pPr algn="ctr"/>
+          </a:p>
+        </p:txBody>
+      </p:sp>
+      <p:sp>
+        <p:nvSpPr>
+          <p:cNvPr id="4" name="Oval 3"/>
+          <p:cNvSpPr/>
+          <p:nvPr/>
+        </p:nvSpPr>
+        <p:spPr>
+          <a:xfrm>
+            <a:off x="411480" y="201168"/>
+            <a:ext cx="566928" cy="566928"/>
+          </a:xfrm>
+          <a:prstGeom prst="ellipse">
+            <a:avLst/>
+          </a:prstGeom>
+          <a:solidFill>
+            <a:srgbClr val="8A1038"/>
+          </a:solidFill>
+          <a:ln>
+            <a:noFill/>
+          </a:ln>
+          <a:effectLst/>
+        </p:spPr>
+        <p:style>
+          <a:lnRef idx="1">
+            <a:schemeClr val="accent1"/>
+          </a:lnRef>
+          <a:fillRef idx="3">
+            <a:schemeClr val="accent1"/>
+          </a:fillRef>
+          <a:effectRef idx="2">
+            <a:schemeClr val="accent1"/>
+          </a:effectRef>
+          <a:fontRef idx="minor">
+            <a:schemeClr val="lt1"/>
+          </a:fontRef>
+        </p:style>
+        <p:txBody>
+          <a:bodyPr rtlCol="0" anchor="ctr" wrap="square" lIns="0" rIns="0" tIns="54864" bIns="54864"/>
+          <a:lstStyle/>
+          <a:p>
+            <a:pPr algn="ctr">
+              <a:spcAft>
+                <a:spcPts val="200"/>
+              </a:spcAft>
+            </a:pPr>
+            <a:r>
+              <a:rPr sz="2000" b="1">
+                <a:solidFill>
+                  <a:srgbClr val="FFFFFF"/>
+                </a:solidFill>
+                <a:latin typeface="Segoe UI"/>
+              </a:rPr>
+              <a:t>1</a:t>
+            </a:r>
+          </a:p>
+        </p:txBody>
+      </p:sp>
+      <p:sp>
+        <p:nvSpPr>
+          <p:cNvPr id="5" name="Rectangle 4"/>
+          <p:cNvSpPr/>
+          <p:nvPr/>
+        </p:nvSpPr>
+        <p:spPr>
+          <a:xfrm>
+            <a:off x="1143000" y="91440"/>
+            <a:ext cx="10607040" cy="502920"/>
           </a:xfrm>
           <a:prstGeom prst="rect">
             <a:avLst/>
@@ -3129,31 +4150,31 @@
           <a:p>
             <a:pPr algn="l">
               <a:spcAft>
-                <a:spcPts val="300"/>
+                <a:spcPts val="200"/>
               </a:spcAft>
             </a:pPr>
             <a:r>
-              <a:rPr sz="2600" b="1">
-                <a:solidFill>
-                  <a:srgbClr val="7A0C2E"/>
-                </a:solidFill>
-                <a:latin typeface="Segoe UI"/>
-              </a:rPr>
-              <a:t>1. Processo de desenvolvimento do teste</a:t>
-            </a:r>
-          </a:p>
-        </p:txBody>
-      </p:sp>
-      <p:sp>
-        <p:nvSpPr>
-          <p:cNvPr id="3" name="Rectangle 2"/>
+              <a:rPr sz="2500" b="1">
+                <a:solidFill>
+                  <a:srgbClr val="FFFFFF"/>
+                </a:solidFill>
+                <a:latin typeface="Segoe UI"/>
+              </a:rPr>
+              <a:t>Processo de desenvolvimento do teste</a:t>
+            </a:r>
+          </a:p>
+        </p:txBody>
+      </p:sp>
+      <p:sp>
+        <p:nvSpPr>
+          <p:cNvPr id="6" name="Rectangle 5"/>
           <p:cNvSpPr/>
           <p:nvPr/>
         </p:nvSpPr>
         <p:spPr>
           <a:xfrm>
-            <a:off x="365760" y="777240"/>
-            <a:ext cx="11430000" cy="365760"/>
+            <a:off x="1143000" y="548640"/>
+            <a:ext cx="10607040" cy="365760"/>
           </a:xfrm>
           <a:prstGeom prst="rect">
             <a:avLst/>
@@ -3184,283 +4205,17 @@
           <a:p>
             <a:pPr algn="l">
               <a:spcAft>
-                <a:spcPts val="300"/>
+                <a:spcPts val="200"/>
               </a:spcAft>
             </a:pPr>
             <a:r>
-              <a:rPr sz="1300" b="0">
-                <a:solidFill>
-                  <a:srgbClr val="555B66"/>
-                </a:solidFill>
-                <a:latin typeface="Segoe UI"/>
-              </a:rPr>
-              <a:t>Hotel Management System (Flask/SQLite, 354 SLOC) · commit 71b396b · recorte: reservar, cancelar e consultar disponibilidade</a:t>
-            </a:r>
-          </a:p>
-        </p:txBody>
-      </p:sp>
-      <p:sp>
-        <p:nvSpPr>
-          <p:cNvPr id="4" name="Rectangle 3"/>
-          <p:cNvSpPr/>
-          <p:nvPr/>
-        </p:nvSpPr>
-        <p:spPr>
-          <a:xfrm>
-            <a:off x="457200" y="1170432"/>
-            <a:ext cx="11247120" cy="36576"/>
-          </a:xfrm>
-          <a:prstGeom prst="rect">
-            <a:avLst/>
-          </a:prstGeom>
-          <a:solidFill>
-            <a:srgbClr val="7A0C2E"/>
-          </a:solidFill>
-          <a:ln>
-            <a:noFill/>
-          </a:ln>
-        </p:spPr>
-        <p:style>
-          <a:lnRef idx="1">
-            <a:schemeClr val="accent1"/>
-          </a:lnRef>
-          <a:fillRef idx="3">
-            <a:schemeClr val="accent1"/>
-          </a:fillRef>
-          <a:effectRef idx="2">
-            <a:schemeClr val="accent1"/>
-          </a:effectRef>
-          <a:fontRef idx="minor">
-            <a:schemeClr val="lt1"/>
-          </a:fontRef>
-        </p:style>
-        <p:txBody>
-          <a:bodyPr rtlCol="0" anchor="ctr"/>
-          <a:lstStyle/>
-          <a:p>
-            <a:pPr algn="ctr"/>
-          </a:p>
-        </p:txBody>
-      </p:sp>
-      <p:sp>
-        <p:nvSpPr>
-          <p:cNvPr id="5" name="Rectangle 4"/>
-          <p:cNvSpPr/>
-          <p:nvPr/>
-        </p:nvSpPr>
-        <p:spPr>
-          <a:xfrm>
-            <a:off x="411480" y="1417320"/>
-            <a:ext cx="2743200" cy="685800"/>
-          </a:xfrm>
-          <a:prstGeom prst="rect">
-            <a:avLst/>
-          </a:prstGeom>
-          <a:solidFill>
-            <a:srgbClr val="0F2A4A"/>
-          </a:solidFill>
-          <a:ln>
-            <a:noFill/>
-          </a:ln>
-          <a:effectLst/>
-        </p:spPr>
-        <p:style>
-          <a:lnRef idx="1">
-            <a:schemeClr val="accent1"/>
-          </a:lnRef>
-          <a:fillRef idx="3">
-            <a:schemeClr val="accent1"/>
-          </a:fillRef>
-          <a:effectRef idx="2">
-            <a:schemeClr val="accent1"/>
-          </a:effectRef>
-          <a:fontRef idx="minor">
-            <a:schemeClr val="lt1"/>
-          </a:fontRef>
-        </p:style>
-        <p:txBody>
-          <a:bodyPr rtlCol="0" anchor="t" wrap="square" lIns="109728" rIns="109728" tIns="54864" bIns="54864"/>
-          <a:lstStyle/>
-          <a:p>
-            <a:pPr algn="l">
-              <a:spcAft>
-                <a:spcPts val="0"/>
-              </a:spcAft>
-            </a:pPr>
-            <a:r>
-              <a:rPr sz="1700" b="1">
-                <a:solidFill>
-                  <a:srgbClr val="FFFFFF"/>
-                </a:solidFill>
-                <a:latin typeface="Segoe UI"/>
-              </a:rPr>
-              <a:t>1  Funcional</a:t>
-            </a:r>
-          </a:p>
-          <a:p>
-            <a:pPr algn="l">
-              <a:spcAft>
-                <a:spcPts val="0"/>
-              </a:spcAft>
-            </a:pPr>
-            <a:r>
-              <a:rPr sz="1050" b="0">
-                <a:solidFill>
-                  <a:srgbClr val="FFFFFF"/>
-                </a:solidFill>
-                <a:latin typeface="Segoe UI"/>
-              </a:rPr>
-              <a:t>pytest · só a especificação</a:t>
-            </a:r>
-          </a:p>
-        </p:txBody>
-      </p:sp>
-      <p:sp>
-        <p:nvSpPr>
-          <p:cNvPr id="6" name="Rectangle 5"/>
-          <p:cNvSpPr/>
-          <p:nvPr/>
-        </p:nvSpPr>
-        <p:spPr>
-          <a:xfrm>
-            <a:off x="411480" y="2103120"/>
-            <a:ext cx="2743200" cy="3063240"/>
-          </a:xfrm>
-          <a:prstGeom prst="rect">
-            <a:avLst/>
-          </a:prstGeom>
-          <a:solidFill>
-            <a:srgbClr val="F2F4F7"/>
-          </a:solidFill>
-          <a:ln>
-            <a:noFill/>
-          </a:ln>
-          <a:effectLst/>
-        </p:spPr>
-        <p:style>
-          <a:lnRef idx="1">
-            <a:schemeClr val="accent1"/>
-          </a:lnRef>
-          <a:fillRef idx="3">
-            <a:schemeClr val="accent1"/>
-          </a:fillRef>
-          <a:effectRef idx="2">
-            <a:schemeClr val="accent1"/>
-          </a:effectRef>
-          <a:fontRef idx="minor">
-            <a:schemeClr val="lt1"/>
-          </a:fontRef>
-        </p:style>
-        <p:txBody>
-          <a:bodyPr rtlCol="0" anchor="t" wrap="square" lIns="109728" rIns="109728" tIns="54864" bIns="54864"/>
-          <a:lstStyle/>
-          <a:p>
-            <a:pPr algn="l">
-              <a:spcAft>
-                <a:spcPts val="600"/>
-              </a:spcAft>
-            </a:pPr>
-            <a:r>
-              <a:rPr sz="1150" b="0">
-                <a:solidFill>
-                  <a:srgbClr val="0F2A4A"/>
-                </a:solidFill>
-                <a:latin typeface="Segoe UI"/>
-              </a:rPr>
-              <a:t>• 22 condições → </a:t>
-            </a:r>
-            <a:r>
-              <a:rPr sz="1150" b="1">
-                <a:solidFill>
-                  <a:srgbClr val="0F2A4A"/>
-                </a:solidFill>
-                <a:latin typeface="Segoe UI"/>
-              </a:rPr>
-              <a:t>48 classes</a:t>
-            </a:r>
-            <a:r>
-              <a:rPr sz="1150" b="0">
-                <a:solidFill>
-                  <a:srgbClr val="0F2A4A"/>
-                </a:solidFill>
-                <a:latin typeface="Segoe UI"/>
-              </a:rPr>
-              <a:t> (31 válidas, 17 inválidas)</a:t>
-            </a:r>
-          </a:p>
-          <a:p>
-            <a:pPr algn="l">
-              <a:spcAft>
-                <a:spcPts val="600"/>
-              </a:spcAft>
-            </a:pPr>
-            <a:r>
-              <a:rPr sz="1150" b="0">
-                <a:solidFill>
-                  <a:srgbClr val="0F2A4A"/>
-                </a:solidFill>
-                <a:latin typeface="Segoe UI"/>
-              </a:rPr>
-              <a:t>• Valor limite: abaixo / no limite / acima (datas, noites, hóspedes, capacidade, adjacência)</a:t>
-            </a:r>
-          </a:p>
-          <a:p>
-            <a:pPr algn="l">
-              <a:spcAft>
-                <a:spcPts val="600"/>
-              </a:spcAft>
-            </a:pPr>
-            <a:r>
-              <a:rPr sz="1150" b="0">
-                <a:solidFill>
-                  <a:srgbClr val="0F2A4A"/>
-                </a:solidFill>
-                <a:latin typeface="Segoe UI"/>
-              </a:rPr>
-              <a:t>• </a:t>
-            </a:r>
-            <a:r>
-              <a:rPr sz="1150" b="1">
-                <a:solidFill>
-                  <a:srgbClr val="0F2A4A"/>
-                </a:solidFill>
-                <a:latin typeface="Segoe UI"/>
-              </a:rPr>
-              <a:t>47 casos</a:t>
-            </a:r>
-            <a:r>
-              <a:rPr sz="1150" b="0">
-                <a:solidFill>
-                  <a:srgbClr val="0F2A4A"/>
-                </a:solidFill>
-                <a:latin typeface="Segoe UI"/>
-              </a:rPr>
-              <a:t>; 1 classe inválida por caso</a:t>
-            </a:r>
-          </a:p>
-          <a:p>
-            <a:pPr algn="l">
-              <a:spcAft>
-                <a:spcPts val="600"/>
-              </a:spcAft>
-            </a:pPr>
-            <a:r>
-              <a:rPr sz="1150" b="0">
-                <a:solidFill>
-                  <a:srgbClr val="0F2A4A"/>
-                </a:solidFill>
-                <a:latin typeface="Segoe UI"/>
-              </a:rPr>
-              <a:t>• Original: 21 passam, </a:t>
-            </a:r>
-            <a:r>
-              <a:rPr sz="1150" b="1">
-                <a:solidFill>
-                  <a:srgbClr val="0F2A4A"/>
-                </a:solidFill>
-                <a:latin typeface="Segoe UI"/>
-              </a:rPr>
-              <a:t>26 falham → 16 defeitos</a:t>
+              <a:rPr sz="1200" b="0">
+                <a:solidFill>
+                  <a:srgbClr val="C9D4E5"/>
+                </a:solidFill>
+                <a:latin typeface="Segoe UI"/>
+              </a:rPr>
+              <a:t>Hotel Management System (Flask + SQLite, 354 SLOC) · reservar, cancelar e consultar disponibilidade</a:t>
             </a:r>
           </a:p>
         </p:txBody>
@@ -3473,643 +4228,8 @@
         </p:nvSpPr>
         <p:spPr>
           <a:xfrm>
-            <a:off x="3264408" y="1417320"/>
-            <a:ext cx="2743200" cy="685800"/>
-          </a:xfrm>
-          <a:prstGeom prst="rect">
-            <a:avLst/>
-          </a:prstGeom>
-          <a:solidFill>
-            <a:srgbClr val="0F2A4A"/>
-          </a:solidFill>
-          <a:ln>
-            <a:noFill/>
-          </a:ln>
-          <a:effectLst/>
-        </p:spPr>
-        <p:style>
-          <a:lnRef idx="1">
-            <a:schemeClr val="accent1"/>
-          </a:lnRef>
-          <a:fillRef idx="3">
-            <a:schemeClr val="accent1"/>
-          </a:fillRef>
-          <a:effectRef idx="2">
-            <a:schemeClr val="accent1"/>
-          </a:effectRef>
-          <a:fontRef idx="minor">
-            <a:schemeClr val="lt1"/>
-          </a:fontRef>
-        </p:style>
-        <p:txBody>
-          <a:bodyPr rtlCol="0" anchor="t" wrap="square" lIns="109728" rIns="109728" tIns="54864" bIns="54864"/>
-          <a:lstStyle/>
-          <a:p>
-            <a:pPr algn="l">
-              <a:spcAft>
-                <a:spcPts val="0"/>
-              </a:spcAft>
-            </a:pPr>
-            <a:r>
-              <a:rPr sz="1700" b="1">
-                <a:solidFill>
-                  <a:srgbClr val="FFFFFF"/>
-                </a:solidFill>
-                <a:latin typeface="Segoe UI"/>
-              </a:rPr>
-              <a:t>2  Estrutural</a:t>
-            </a:r>
-          </a:p>
-          <a:p>
-            <a:pPr algn="l">
-              <a:spcAft>
-                <a:spcPts val="0"/>
-              </a:spcAft>
-            </a:pPr>
-            <a:r>
-              <a:rPr sz="1050" b="0">
-                <a:solidFill>
-                  <a:srgbClr val="FFFFFF"/>
-                </a:solidFill>
-                <a:latin typeface="Segoe UI"/>
-              </a:rPr>
-              <a:t>coverage.py --branch</a:t>
-            </a:r>
-          </a:p>
-        </p:txBody>
-      </p:sp>
-      <p:sp>
-        <p:nvSpPr>
-          <p:cNvPr id="8" name="Rectangle 7"/>
-          <p:cNvSpPr/>
-          <p:nvPr/>
-        </p:nvSpPr>
-        <p:spPr>
-          <a:xfrm>
-            <a:off x="3264408" y="2103120"/>
-            <a:ext cx="2743200" cy="3063240"/>
-          </a:xfrm>
-          <a:prstGeom prst="rect">
-            <a:avLst/>
-          </a:prstGeom>
-          <a:solidFill>
-            <a:srgbClr val="F2F4F7"/>
-          </a:solidFill>
-          <a:ln>
-            <a:noFill/>
-          </a:ln>
-          <a:effectLst/>
-        </p:spPr>
-        <p:style>
-          <a:lnRef idx="1">
-            <a:schemeClr val="accent1"/>
-          </a:lnRef>
-          <a:fillRef idx="3">
-            <a:schemeClr val="accent1"/>
-          </a:fillRef>
-          <a:effectRef idx="2">
-            <a:schemeClr val="accent1"/>
-          </a:effectRef>
-          <a:fontRef idx="minor">
-            <a:schemeClr val="lt1"/>
-          </a:fontRef>
-        </p:style>
-        <p:txBody>
-          <a:bodyPr rtlCol="0" anchor="t" wrap="square" lIns="109728" rIns="109728" tIns="54864" bIns="54864"/>
-          <a:lstStyle/>
-          <a:p>
-            <a:pPr algn="l">
-              <a:spcAft>
-                <a:spcPts val="600"/>
-              </a:spcAft>
-            </a:pPr>
-            <a:r>
-              <a:rPr sz="1150" b="0">
-                <a:solidFill>
-                  <a:srgbClr val="0F2A4A"/>
-                </a:solidFill>
-                <a:latin typeface="Segoe UI"/>
-              </a:rPr>
-              <a:t>• Meta: </a:t>
-            </a:r>
-            <a:r>
-              <a:rPr sz="1150" b="1">
-                <a:solidFill>
-                  <a:srgbClr val="0F2A4A"/>
-                </a:solidFill>
-                <a:latin typeface="Segoe UI"/>
-              </a:rPr>
-              <a:t>100% comandos e desvios viáveis</a:t>
-            </a:r>
-            <a:r>
-              <a:rPr sz="1150" b="0">
-                <a:solidFill>
-                  <a:srgbClr val="0F2A4A"/>
-                </a:solidFill>
-                <a:latin typeface="Segoe UI"/>
-              </a:rPr>
-              <a:t> nas 5 funções</a:t>
-            </a:r>
-          </a:p>
-          <a:p>
-            <a:pPr algn="l">
-              <a:spcAft>
-                <a:spcPts val="600"/>
-              </a:spcAft>
-            </a:pPr>
-            <a:r>
-              <a:rPr sz="1150" b="0">
-                <a:solidFill>
-                  <a:srgbClr val="0F2A4A"/>
-                </a:solidFill>
-                <a:latin typeface="Segoe UI"/>
-              </a:rPr>
-              <a:t>• Lacunas da etapa 1 → +7 casos (sessão encerrada, GET, outros quartos)</a:t>
-            </a:r>
-          </a:p>
-          <a:p>
-            <a:pPr algn="l">
-              <a:spcAft>
-                <a:spcPts val="600"/>
-              </a:spcAft>
-            </a:pPr>
-            <a:r>
-              <a:rPr sz="1150" b="0">
-                <a:solidFill>
-                  <a:srgbClr val="0F2A4A"/>
-                </a:solidFill>
-                <a:latin typeface="Segoe UI"/>
-              </a:rPr>
-              <a:t>• Leitura do código revela </a:t>
-            </a:r>
-            <a:r>
-              <a:rPr sz="1150" b="1">
-                <a:solidFill>
-                  <a:srgbClr val="0F2A4A"/>
-                </a:solidFill>
-                <a:latin typeface="Segoe UI"/>
-              </a:rPr>
-              <a:t>+3 defeitos</a:t>
-            </a:r>
-            <a:r>
-              <a:rPr sz="1150" b="0">
-                <a:solidFill>
-                  <a:srgbClr val="0F2A4A"/>
-                </a:solidFill>
-                <a:latin typeface="Segoe UI"/>
-              </a:rPr>
-              <a:t> (estado global, remove no laço, produto cartesiano)</a:t>
-            </a:r>
-          </a:p>
-          <a:p>
-            <a:pPr algn="l">
-              <a:spcAft>
-                <a:spcPts val="600"/>
-              </a:spcAft>
-            </a:pPr>
-            <a:r>
-              <a:rPr sz="1150" b="0">
-                <a:solidFill>
-                  <a:srgbClr val="0F2A4A"/>
-                </a:solidFill>
-                <a:latin typeface="Segoe UI"/>
-              </a:rPr>
-              <a:t>• </a:t>
-            </a:r>
-            <a:r>
-              <a:rPr sz="1150" b="1">
-                <a:solidFill>
-                  <a:srgbClr val="0F2A4A"/>
-                </a:solidFill>
-                <a:latin typeface="Segoe UI"/>
-              </a:rPr>
-              <a:t>54 casos</a:t>
-            </a:r>
-            <a:r>
-              <a:rPr sz="1150" b="0">
-                <a:solidFill>
-                  <a:srgbClr val="0F2A4A"/>
-                </a:solidFill>
-                <a:latin typeface="Segoe UI"/>
-              </a:rPr>
-              <a:t>: 100% comandos, 98,1% desvios (1 inviável)</a:t>
-            </a:r>
-          </a:p>
-        </p:txBody>
-      </p:sp>
-      <p:sp>
-        <p:nvSpPr>
-          <p:cNvPr id="9" name="Rectangle 8"/>
-          <p:cNvSpPr/>
-          <p:nvPr/>
-        </p:nvSpPr>
-        <p:spPr>
-          <a:xfrm>
-            <a:off x="6117336" y="1417320"/>
-            <a:ext cx="2743200" cy="685800"/>
-          </a:xfrm>
-          <a:prstGeom prst="rect">
-            <a:avLst/>
-          </a:prstGeom>
-          <a:solidFill>
-            <a:srgbClr val="7A0C2E"/>
-          </a:solidFill>
-          <a:ln>
-            <a:noFill/>
-          </a:ln>
-          <a:effectLst/>
-        </p:spPr>
-        <p:style>
-          <a:lnRef idx="1">
-            <a:schemeClr val="accent1"/>
-          </a:lnRef>
-          <a:fillRef idx="3">
-            <a:schemeClr val="accent1"/>
-          </a:fillRef>
-          <a:effectRef idx="2">
-            <a:schemeClr val="accent1"/>
-          </a:effectRef>
-          <a:fontRef idx="minor">
-            <a:schemeClr val="lt1"/>
-          </a:fontRef>
-        </p:style>
-        <p:txBody>
-          <a:bodyPr rtlCol="0" anchor="t" wrap="square" lIns="109728" rIns="109728" tIns="54864" bIns="54864"/>
-          <a:lstStyle/>
-          <a:p>
-            <a:pPr algn="l">
-              <a:spcAft>
-                <a:spcPts val="0"/>
-              </a:spcAft>
-            </a:pPr>
-            <a:r>
-              <a:rPr sz="1700" b="1">
-                <a:solidFill>
-                  <a:srgbClr val="FFFFFF"/>
-                </a:solidFill>
-                <a:latin typeface="Segoe UI"/>
-              </a:rPr>
-              <a:t>Correção</a:t>
-            </a:r>
-          </a:p>
-          <a:p>
-            <a:pPr algn="l">
-              <a:spcAft>
-                <a:spcPts val="0"/>
-              </a:spcAft>
-            </a:pPr>
-            <a:r>
-              <a:rPr sz="1050" b="0">
-                <a:solidFill>
-                  <a:srgbClr val="FFFFFF"/>
-                </a:solidFill>
-                <a:latin typeface="Segoe UI"/>
-              </a:rPr>
-              <a:t>fork no GitHub · 6 commits</a:t>
-            </a:r>
-          </a:p>
-        </p:txBody>
-      </p:sp>
-      <p:sp>
-        <p:nvSpPr>
-          <p:cNvPr id="10" name="Rectangle 9"/>
-          <p:cNvSpPr/>
-          <p:nvPr/>
-        </p:nvSpPr>
-        <p:spPr>
-          <a:xfrm>
-            <a:off x="6117336" y="2103120"/>
-            <a:ext cx="2743200" cy="3063240"/>
-          </a:xfrm>
-          <a:prstGeom prst="rect">
-            <a:avLst/>
-          </a:prstGeom>
-          <a:solidFill>
-            <a:srgbClr val="F2F4F7"/>
-          </a:solidFill>
-          <a:ln>
-            <a:noFill/>
-          </a:ln>
-          <a:effectLst/>
-        </p:spPr>
-        <p:style>
-          <a:lnRef idx="1">
-            <a:schemeClr val="accent1"/>
-          </a:lnRef>
-          <a:fillRef idx="3">
-            <a:schemeClr val="accent1"/>
-          </a:fillRef>
-          <a:effectRef idx="2">
-            <a:schemeClr val="accent1"/>
-          </a:effectRef>
-          <a:fontRef idx="minor">
-            <a:schemeClr val="lt1"/>
-          </a:fontRef>
-        </p:style>
-        <p:txBody>
-          <a:bodyPr rtlCol="0" anchor="t" wrap="square" lIns="109728" rIns="109728" tIns="54864" bIns="54864"/>
-          <a:lstStyle/>
-          <a:p>
-            <a:pPr algn="l">
-              <a:spcAft>
-                <a:spcPts val="600"/>
-              </a:spcAft>
-            </a:pPr>
-            <a:r>
-              <a:rPr sz="1150" b="0">
-                <a:solidFill>
-                  <a:srgbClr val="0F2A4A"/>
-                </a:solidFill>
-                <a:latin typeface="Segoe UI"/>
-              </a:rPr>
-              <a:t>• 19 defeitos corrigidos, 1 commit por grupo, cada um confirmado pelo teste que o revelou</a:t>
-            </a:r>
-          </a:p>
-          <a:p>
-            <a:pPr algn="l">
-              <a:spcAft>
-                <a:spcPts val="600"/>
-              </a:spcAft>
-            </a:pPr>
-            <a:r>
-              <a:rPr sz="1150" b="0">
-                <a:solidFill>
-                  <a:srgbClr val="0F2A4A"/>
-                </a:solidFill>
-                <a:latin typeface="Segoe UI"/>
-              </a:rPr>
-              <a:t>• Mesmo teste: xfail estrito no original, verde no corrigido</a:t>
-            </a:r>
-          </a:p>
-          <a:p>
-            <a:pPr algn="l">
-              <a:spcAft>
-                <a:spcPts val="600"/>
-              </a:spcAft>
-            </a:pPr>
-            <a:r>
-              <a:rPr sz="1150" b="0">
-                <a:solidFill>
-                  <a:srgbClr val="0F2A4A"/>
-                </a:solidFill>
-                <a:latin typeface="Segoe UI"/>
-              </a:rPr>
-              <a:t>• </a:t>
-            </a:r>
-            <a:r>
-              <a:rPr sz="1150" b="1">
-                <a:solidFill>
-                  <a:srgbClr val="0F2A4A"/>
-                </a:solidFill>
-                <a:latin typeface="Segoe UI"/>
-              </a:rPr>
-              <a:t>54/54 passam</a:t>
-            </a:r>
-            <a:r>
-              <a:rPr sz="1150" b="0">
-                <a:solidFill>
-                  <a:srgbClr val="0F2A4A"/>
-                </a:solidFill>
-                <a:latin typeface="Segoe UI"/>
-              </a:rPr>
-              <a:t>, sem skip; 100% comandos e desvios</a:t>
-            </a:r>
-          </a:p>
-        </p:txBody>
-      </p:sp>
-      <p:sp>
-        <p:nvSpPr>
-          <p:cNvPr id="11" name="Rectangle 10"/>
-          <p:cNvSpPr/>
-          <p:nvPr/>
-        </p:nvSpPr>
-        <p:spPr>
-          <a:xfrm>
-            <a:off x="8970264" y="1417320"/>
-            <a:ext cx="2743200" cy="685800"/>
-          </a:xfrm>
-          <a:prstGeom prst="rect">
-            <a:avLst/>
-          </a:prstGeom>
-          <a:solidFill>
-            <a:srgbClr val="0F2A4A"/>
-          </a:solidFill>
-          <a:ln>
-            <a:noFill/>
-          </a:ln>
-          <a:effectLst/>
-        </p:spPr>
-        <p:style>
-          <a:lnRef idx="1">
-            <a:schemeClr val="accent1"/>
-          </a:lnRef>
-          <a:fillRef idx="3">
-            <a:schemeClr val="accent1"/>
-          </a:fillRef>
-          <a:effectRef idx="2">
-            <a:schemeClr val="accent1"/>
-          </a:effectRef>
-          <a:fontRef idx="minor">
-            <a:schemeClr val="lt1"/>
-          </a:fontRef>
-        </p:style>
-        <p:txBody>
-          <a:bodyPr rtlCol="0" anchor="t" wrap="square" lIns="109728" rIns="109728" tIns="54864" bIns="54864"/>
-          <a:lstStyle/>
-          <a:p>
-            <a:pPr algn="l">
-              <a:spcAft>
-                <a:spcPts val="0"/>
-              </a:spcAft>
-            </a:pPr>
-            <a:r>
-              <a:rPr sz="1700" b="1">
-                <a:solidFill>
-                  <a:srgbClr val="FFFFFF"/>
-                </a:solidFill>
-                <a:latin typeface="Segoe UI"/>
-              </a:rPr>
-              <a:t>3  Mutação</a:t>
-            </a:r>
-          </a:p>
-          <a:p>
-            <a:pPr algn="l">
-              <a:spcAft>
-                <a:spcPts val="0"/>
-              </a:spcAft>
-            </a:pPr>
-            <a:r>
-              <a:rPr sz="1050" b="0">
-                <a:solidFill>
-                  <a:srgbClr val="FFFFFF"/>
-                </a:solidFill>
-                <a:latin typeface="Segoe UI"/>
-              </a:rPr>
-              <a:t>Cosmic Ray 8.4.3 · sem amostragem</a:t>
-            </a:r>
-          </a:p>
-        </p:txBody>
-      </p:sp>
-      <p:sp>
-        <p:nvSpPr>
-          <p:cNvPr id="12" name="Rectangle 11"/>
-          <p:cNvSpPr/>
-          <p:nvPr/>
-        </p:nvSpPr>
-        <p:spPr>
-          <a:xfrm>
-            <a:off x="8970264" y="2103120"/>
-            <a:ext cx="2743200" cy="3063240"/>
-          </a:xfrm>
-          <a:prstGeom prst="rect">
-            <a:avLst/>
-          </a:prstGeom>
-          <a:solidFill>
-            <a:srgbClr val="F2F4F7"/>
-          </a:solidFill>
-          <a:ln>
-            <a:noFill/>
-          </a:ln>
-          <a:effectLst/>
-        </p:spPr>
-        <p:style>
-          <a:lnRef idx="1">
-            <a:schemeClr val="accent1"/>
-          </a:lnRef>
-          <a:fillRef idx="3">
-            <a:schemeClr val="accent1"/>
-          </a:fillRef>
-          <a:effectRef idx="2">
-            <a:schemeClr val="accent1"/>
-          </a:effectRef>
-          <a:fontRef idx="minor">
-            <a:schemeClr val="lt1"/>
-          </a:fontRef>
-        </p:style>
-        <p:txBody>
-          <a:bodyPr rtlCol="0" anchor="t" wrap="square" lIns="109728" rIns="109728" tIns="54864" bIns="54864"/>
-          <a:lstStyle/>
-          <a:p>
-            <a:pPr algn="l">
-              <a:spcAft>
-                <a:spcPts val="600"/>
-              </a:spcAft>
-            </a:pPr>
-            <a:r>
-              <a:rPr sz="1150" b="0">
-                <a:solidFill>
-                  <a:srgbClr val="0F2A4A"/>
-                </a:solidFill>
-                <a:latin typeface="Segoe UI"/>
-              </a:rPr>
-              <a:t>• </a:t>
-            </a:r>
-            <a:r>
-              <a:rPr sz="1150" b="1">
-                <a:solidFill>
-                  <a:srgbClr val="0F2A4A"/>
-                </a:solidFill>
-                <a:latin typeface="Segoe UI"/>
-              </a:rPr>
-              <a:t>204 mutantes</a:t>
-            </a:r>
-            <a:r>
-              <a:rPr sz="1150" b="0">
-                <a:solidFill>
-                  <a:srgbClr val="0F2A4A"/>
-                </a:solidFill>
-                <a:latin typeface="Segoe UI"/>
-              </a:rPr>
-              <a:t> (todos os operadores, funções do recorte)</a:t>
-            </a:r>
-          </a:p>
-          <a:p>
-            <a:pPr algn="l">
-              <a:spcAft>
-                <a:spcPts val="600"/>
-              </a:spcAft>
-            </a:pPr>
-            <a:r>
-              <a:rPr sz="1150" b="0">
-                <a:solidFill>
-                  <a:srgbClr val="0F2A4A"/>
-                </a:solidFill>
-                <a:latin typeface="Segoe UI"/>
-              </a:rPr>
-              <a:t>• Inicial: 191 mortos → </a:t>
-            </a:r>
-            <a:r>
-              <a:rPr sz="1150" b="1">
-                <a:solidFill>
-                  <a:srgbClr val="0F2A4A"/>
-                </a:solidFill>
-                <a:latin typeface="Segoe UI"/>
-              </a:rPr>
-              <a:t>93,6%</a:t>
-            </a:r>
-          </a:p>
-          <a:p>
-            <a:pPr algn="l">
-              <a:spcAft>
-                <a:spcPts val="600"/>
-              </a:spcAft>
-            </a:pPr>
-            <a:r>
-              <a:rPr sz="1150" b="0">
-                <a:solidFill>
-                  <a:srgbClr val="0F2A4A"/>
-                </a:solidFill>
-                <a:latin typeface="Segoe UI"/>
-              </a:rPr>
-              <a:t>• 13 sobreviventes: 5 matáveis → +5 casos; 8 equivalentes justificados</a:t>
-            </a:r>
-          </a:p>
-          <a:p>
-            <a:pPr algn="l">
-              <a:spcAft>
-                <a:spcPts val="600"/>
-              </a:spcAft>
-            </a:pPr>
-            <a:r>
-              <a:rPr sz="1150" b="0">
-                <a:solidFill>
-                  <a:srgbClr val="0F2A4A"/>
-                </a:solidFill>
-                <a:latin typeface="Segoe UI"/>
-              </a:rPr>
-              <a:t>• Final: 196 mortos → </a:t>
-            </a:r>
-            <a:r>
-              <a:rPr sz="1150" b="1">
-                <a:solidFill>
-                  <a:srgbClr val="0F2A4A"/>
-                </a:solidFill>
-                <a:latin typeface="Segoe UI"/>
-              </a:rPr>
-              <a:t>96,1%</a:t>
-            </a:r>
-            <a:r>
-              <a:rPr sz="1150" b="0">
-                <a:solidFill>
-                  <a:srgbClr val="0F2A4A"/>
-                </a:solidFill>
-                <a:latin typeface="Segoe UI"/>
-              </a:rPr>
-              <a:t> (100% dos não equivalentes)</a:t>
-            </a:r>
-          </a:p>
-        </p:txBody>
-      </p:sp>
-      <p:sp>
-        <p:nvSpPr>
-          <p:cNvPr id="13" name="Rectangle 12"/>
-          <p:cNvSpPr/>
-          <p:nvPr/>
-        </p:nvSpPr>
-        <p:spPr>
-          <a:xfrm>
-            <a:off x="411480" y="5349240"/>
-            <a:ext cx="11338560" cy="1234440"/>
+            <a:off x="411480" y="6510528"/>
+            <a:ext cx="11338560" cy="274320"/>
           </a:xfrm>
           <a:prstGeom prst="rect">
             <a:avLst/>
@@ -4140,51 +4260,1332 @@
           <a:p>
             <a:pPr algn="l">
               <a:spcAft>
-                <a:spcPts val="300"/>
+                <a:spcPts val="200"/>
               </a:spcAft>
             </a:pPr>
             <a:r>
-              <a:rPr sz="1200" b="1">
-                <a:solidFill>
-                  <a:srgbClr val="0F2A4A"/>
-                </a:solidFill>
-                <a:latin typeface="Segoe UI"/>
-              </a:rPr>
-              <a:t>Rastreabilidade:</a:t>
-            </a:r>
-            <a:r>
-              <a:rPr sz="1200" b="0">
-                <a:solidFill>
-                  <a:srgbClr val="0F2A4A"/>
-                </a:solidFill>
-                <a:latin typeface="Segoe UI"/>
-              </a:rPr>
-              <a:t> REQ → CE (@pytest.mark.ce) → CT (nome do teste) → DEF (@pytest.mark.defeito) → commit de correção. Um script verifica que toda classe tem caso funcional.</a:t>
-            </a:r>
-          </a:p>
+              <a:rPr sz="900" b="0">
+                <a:solidFill>
+                  <a:srgbClr val="5B6472"/>
+                </a:solidFill>
+                <a:latin typeface="Segoe UI"/>
+              </a:rPr>
+              <a:t>Gabriel Felipe Jess Meira · Verificação e Validação · github.com/gabrielfjm/Hotel_Management_System</a:t>
+            </a:r>
+          </a:p>
+        </p:txBody>
+      </p:sp>
+      <p:sp>
+        <p:nvSpPr>
+          <p:cNvPr id="8" name="Pentagon 7"/>
+          <p:cNvSpPr/>
+          <p:nvPr/>
+        </p:nvSpPr>
+        <p:spPr>
+          <a:xfrm>
+            <a:off x="411480" y="1280160"/>
+            <a:ext cx="1847088" cy="676656"/>
+          </a:xfrm>
+          <a:prstGeom prst="homePlate">
+            <a:avLst/>
+          </a:prstGeom>
+          <a:solidFill>
+            <a:srgbClr val="1F5FA8"/>
+          </a:solidFill>
+          <a:ln>
+            <a:noFill/>
+          </a:ln>
+          <a:effectLst/>
+        </p:spPr>
+        <p:style>
+          <a:lnRef idx="1">
+            <a:schemeClr val="accent1"/>
+          </a:lnRef>
+          <a:fillRef idx="3">
+            <a:schemeClr val="accent1"/>
+          </a:fillRef>
+          <a:effectRef idx="2">
+            <a:schemeClr val="accent1"/>
+          </a:effectRef>
+          <a:fontRef idx="minor">
+            <a:schemeClr val="lt1"/>
+          </a:fontRef>
+        </p:style>
+        <p:txBody>
+          <a:bodyPr rtlCol="0" anchor="ctr" wrap="square" lIns="137160" rIns="109728" tIns="54864" bIns="54864"/>
+          <a:lstStyle/>
           <a:p>
             <a:pPr algn="l">
               <a:spcAft>
-                <a:spcPts val="300"/>
+                <a:spcPts val="0"/>
               </a:spcAft>
             </a:pPr>
             <a:r>
-              <a:rPr sz="1200" b="1">
-                <a:solidFill>
-                  <a:srgbClr val="0F2A4A"/>
-                </a:solidFill>
-                <a:latin typeface="Segoe UI"/>
-              </a:rPr>
-              <a:t>Reprodutível:</a:t>
-            </a:r>
-            <a:r>
-              <a:rPr sz="1200" b="0">
-                <a:solidFill>
-                  <a:srgbClr val="0F2A4A"/>
-                </a:solidFill>
-                <a:latin typeface="Segoe UI"/>
-              </a:rPr>
-              <a:t> SUT_VERSAO=original|corrigida escolhe o código; etapas.ps1 roda tudo e grava pytest.txt, junit.xml, coverage JSON/HTML e sessões Cosmic Ray em evidencias/.</a:t>
+              <a:rPr sz="1300" b="1">
+                <a:solidFill>
+                  <a:srgbClr val="FFFFFF"/>
+                </a:solidFill>
+                <a:latin typeface="Segoe UI"/>
+              </a:rPr>
+              <a:t>Funcional</a:t>
+            </a:r>
+          </a:p>
+          <a:p>
+            <a:pPr algn="l">
+              <a:spcAft>
+                <a:spcPts val="0"/>
+              </a:spcAft>
+            </a:pPr>
+            <a:r>
+              <a:rPr sz="850" b="0">
+                <a:solidFill>
+                  <a:srgbClr val="FFFFFF"/>
+                </a:solidFill>
+                <a:latin typeface="Segoe UI"/>
+              </a:rPr>
+              <a:t>pytest · só a especificação</a:t>
+            </a:r>
+          </a:p>
+        </p:txBody>
+      </p:sp>
+      <p:sp>
+        <p:nvSpPr>
+          <p:cNvPr id="9" name="Rectangle 8"/>
+          <p:cNvSpPr/>
+          <p:nvPr/>
+        </p:nvSpPr>
+        <p:spPr>
+          <a:xfrm>
+            <a:off x="438912" y="2057400"/>
+            <a:ext cx="1700784" cy="2377440"/>
+          </a:xfrm>
+          <a:prstGeom prst="rect">
+            <a:avLst/>
+          </a:prstGeom>
+          <a:solidFill>
+            <a:srgbClr val="F3F5F9"/>
+          </a:solidFill>
+          <a:ln w="9525">
+            <a:solidFill>
+              <a:srgbClr val="D7DDE6"/>
+            </a:solidFill>
+          </a:ln>
+          <a:effectLst/>
+        </p:spPr>
+        <p:style>
+          <a:lnRef idx="1">
+            <a:schemeClr val="accent1"/>
+          </a:lnRef>
+          <a:fillRef idx="3">
+            <a:schemeClr val="accent1"/>
+          </a:fillRef>
+          <a:effectRef idx="2">
+            <a:schemeClr val="accent1"/>
+          </a:effectRef>
+          <a:fontRef idx="minor">
+            <a:schemeClr val="lt1"/>
+          </a:fontRef>
+        </p:style>
+        <p:txBody>
+          <a:bodyPr rtlCol="0" anchor="t" wrap="square" lIns="109728" rIns="109728" tIns="54864" bIns="54864"/>
+          <a:lstStyle/>
+          <a:p>
+            <a:pPr algn="l">
+              <a:spcAft>
+                <a:spcPts val="600"/>
+              </a:spcAft>
+            </a:pPr>
+            <a:r>
+              <a:rPr sz="1050" b="1">
+                <a:solidFill>
+                  <a:srgbClr val="0B1F3A"/>
+                </a:solidFill>
+                <a:latin typeface="Segoe UI"/>
+              </a:rPr>
+              <a:t>48 classes</a:t>
+            </a:r>
+            <a:r>
+              <a:rPr sz="1050" b="0">
+                <a:solidFill>
+                  <a:srgbClr val="0B1F3A"/>
+                </a:solidFill>
+                <a:latin typeface="Segoe UI"/>
+              </a:rPr>
+              <a:t> (31 válidas, 17 inválidas)</a:t>
+            </a:r>
+          </a:p>
+          <a:p>
+            <a:pPr algn="l">
+              <a:spcAft>
+                <a:spcPts val="600"/>
+              </a:spcAft>
+            </a:pPr>
+            <a:r>
+              <a:rPr sz="1050" b="0">
+                <a:solidFill>
+                  <a:srgbClr val="0B1F3A"/>
+                </a:solidFill>
+                <a:latin typeface="Segoe UI"/>
+              </a:rPr>
+              <a:t>Valor limite: abaixo / no limite / acima</a:t>
+            </a:r>
+          </a:p>
+          <a:p>
+            <a:pPr algn="l">
+              <a:spcAft>
+                <a:spcPts val="600"/>
+              </a:spcAft>
+            </a:pPr>
+            <a:r>
+              <a:rPr sz="1050" b="1">
+                <a:solidFill>
+                  <a:srgbClr val="0B1F3A"/>
+                </a:solidFill>
+                <a:latin typeface="Segoe UI"/>
+              </a:rPr>
+              <a:t>52 casos</a:t>
+            </a:r>
+            <a:r>
+              <a:rPr sz="1050" b="0">
+                <a:solidFill>
+                  <a:srgbClr val="0B1F3A"/>
+                </a:solidFill>
+                <a:latin typeface="Segoe UI"/>
+              </a:rPr>
+              <a:t> no código original</a:t>
+            </a:r>
+          </a:p>
+          <a:p>
+            <a:pPr algn="l">
+              <a:spcAft>
+                <a:spcPts val="600"/>
+              </a:spcAft>
+            </a:pPr>
+            <a:r>
+              <a:rPr sz="1050" b="1">
+                <a:solidFill>
+                  <a:srgbClr val="0B1F3A"/>
+                </a:solidFill>
+                <a:latin typeface="Segoe UI"/>
+              </a:rPr>
+              <a:t>30 falham</a:t>
+            </a:r>
+            <a:r>
+              <a:rPr sz="1050" b="0">
+                <a:solidFill>
+                  <a:srgbClr val="0B1F3A"/>
+                </a:solidFill>
+                <a:latin typeface="Segoe UI"/>
+              </a:rPr>
+              <a:t> → 16 defeitos</a:t>
+            </a:r>
+          </a:p>
+        </p:txBody>
+      </p:sp>
+      <p:sp>
+        <p:nvSpPr>
+          <p:cNvPr id="10" name="Chevron 9"/>
+          <p:cNvSpPr/>
+          <p:nvPr/>
+        </p:nvSpPr>
+        <p:spPr>
+          <a:xfrm>
+            <a:off x="2203704" y="1280160"/>
+            <a:ext cx="1847088" cy="676656"/>
+          </a:xfrm>
+          <a:prstGeom prst="chevron">
+            <a:avLst/>
+          </a:prstGeom>
+          <a:solidFill>
+            <a:srgbClr val="1F5FA8"/>
+          </a:solidFill>
+          <a:ln>
+            <a:noFill/>
+          </a:ln>
+          <a:effectLst/>
+        </p:spPr>
+        <p:style>
+          <a:lnRef idx="1">
+            <a:schemeClr val="accent1"/>
+          </a:lnRef>
+          <a:fillRef idx="3">
+            <a:schemeClr val="accent1"/>
+          </a:fillRef>
+          <a:effectRef idx="2">
+            <a:schemeClr val="accent1"/>
+          </a:effectRef>
+          <a:fontRef idx="minor">
+            <a:schemeClr val="lt1"/>
+          </a:fontRef>
+        </p:style>
+        <p:txBody>
+          <a:bodyPr rtlCol="0" anchor="ctr" wrap="square" lIns="274320" rIns="109728" tIns="54864" bIns="54864"/>
+          <a:lstStyle/>
+          <a:p>
+            <a:pPr algn="l">
+              <a:spcAft>
+                <a:spcPts val="0"/>
+              </a:spcAft>
+            </a:pPr>
+            <a:r>
+              <a:rPr sz="1300" b="1">
+                <a:solidFill>
+                  <a:srgbClr val="FFFFFF"/>
+                </a:solidFill>
+                <a:latin typeface="Segoe UI"/>
+              </a:rPr>
+              <a:t>Estrutural</a:t>
+            </a:r>
+          </a:p>
+          <a:p>
+            <a:pPr algn="l">
+              <a:spcAft>
+                <a:spcPts val="0"/>
+              </a:spcAft>
+            </a:pPr>
+            <a:r>
+              <a:rPr sz="850" b="0">
+                <a:solidFill>
+                  <a:srgbClr val="FFFFFF"/>
+                </a:solidFill>
+                <a:latin typeface="Segoe UI"/>
+              </a:rPr>
+              <a:t>coverage.py</a:t>
+            </a:r>
+          </a:p>
+        </p:txBody>
+      </p:sp>
+      <p:sp>
+        <p:nvSpPr>
+          <p:cNvPr id="11" name="Rectangle 10"/>
+          <p:cNvSpPr/>
+          <p:nvPr/>
+        </p:nvSpPr>
+        <p:spPr>
+          <a:xfrm>
+            <a:off x="2231136" y="2057400"/>
+            <a:ext cx="1700784" cy="2377440"/>
+          </a:xfrm>
+          <a:prstGeom prst="rect">
+            <a:avLst/>
+          </a:prstGeom>
+          <a:solidFill>
+            <a:srgbClr val="F3F5F9"/>
+          </a:solidFill>
+          <a:ln w="9525">
+            <a:solidFill>
+              <a:srgbClr val="D7DDE6"/>
+            </a:solidFill>
+          </a:ln>
+          <a:effectLst/>
+        </p:spPr>
+        <p:style>
+          <a:lnRef idx="1">
+            <a:schemeClr val="accent1"/>
+          </a:lnRef>
+          <a:fillRef idx="3">
+            <a:schemeClr val="accent1"/>
+          </a:fillRef>
+          <a:effectRef idx="2">
+            <a:schemeClr val="accent1"/>
+          </a:effectRef>
+          <a:fontRef idx="minor">
+            <a:schemeClr val="lt1"/>
+          </a:fontRef>
+        </p:style>
+        <p:txBody>
+          <a:bodyPr rtlCol="0" anchor="t" wrap="square" lIns="109728" rIns="109728" tIns="54864" bIns="54864"/>
+          <a:lstStyle/>
+          <a:p>
+            <a:pPr algn="l">
+              <a:spcAft>
+                <a:spcPts val="600"/>
+              </a:spcAft>
+            </a:pPr>
+            <a:r>
+              <a:rPr sz="1050" b="0">
+                <a:solidFill>
+                  <a:srgbClr val="0B1F3A"/>
+                </a:solidFill>
+                <a:latin typeface="Segoe UI"/>
+              </a:rPr>
+              <a:t>Meta: </a:t>
+            </a:r>
+            <a:r>
+              <a:rPr sz="1050" b="1">
+                <a:solidFill>
+                  <a:srgbClr val="0B1F3A"/>
+                </a:solidFill>
+                <a:latin typeface="Segoe UI"/>
+              </a:rPr>
+              <a:t>100%</a:t>
+            </a:r>
+            <a:r>
+              <a:rPr sz="1050" b="0">
+                <a:solidFill>
+                  <a:srgbClr val="0B1F3A"/>
+                </a:solidFill>
+                <a:latin typeface="Segoe UI"/>
+              </a:rPr>
+              <a:t> de comandos e desvios viáveis</a:t>
+            </a:r>
+          </a:p>
+          <a:p>
+            <a:pPr algn="l">
+              <a:spcAft>
+                <a:spcPts val="600"/>
+              </a:spcAft>
+            </a:pPr>
+            <a:r>
+              <a:rPr sz="1050" b="1">
+                <a:solidFill>
+                  <a:srgbClr val="0B1F3A"/>
+                </a:solidFill>
+                <a:latin typeface="Segoe UI"/>
+              </a:rPr>
+              <a:t>+7 casos</a:t>
+            </a:r>
+            <a:r>
+              <a:rPr sz="1050" b="0">
+                <a:solidFill>
+                  <a:srgbClr val="0B1F3A"/>
+                </a:solidFill>
+                <a:latin typeface="Segoe UI"/>
+              </a:rPr>
+              <a:t> guiados pelas lacunas</a:t>
+            </a:r>
+          </a:p>
+          <a:p>
+            <a:pPr algn="l">
+              <a:spcAft>
+                <a:spcPts val="600"/>
+              </a:spcAft>
+            </a:pPr>
+            <a:r>
+              <a:rPr sz="1050" b="1">
+                <a:solidFill>
+                  <a:srgbClr val="0B1F3A"/>
+                </a:solidFill>
+                <a:latin typeface="Segoe UI"/>
+              </a:rPr>
+              <a:t>+3 defeitos</a:t>
+            </a:r>
+            <a:r>
+              <a:rPr sz="1050" b="0">
+                <a:solidFill>
+                  <a:srgbClr val="0B1F3A"/>
+                </a:solidFill>
+                <a:latin typeface="Segoe UI"/>
+              </a:rPr>
+              <a:t> só visíveis no código</a:t>
+            </a:r>
+          </a:p>
+          <a:p>
+            <a:pPr algn="l">
+              <a:spcAft>
+                <a:spcPts val="600"/>
+              </a:spcAft>
+            </a:pPr>
+            <a:r>
+              <a:rPr sz="1050" b="1">
+                <a:solidFill>
+                  <a:srgbClr val="0B1F3A"/>
+                </a:solidFill>
+                <a:latin typeface="Segoe UI"/>
+              </a:rPr>
+              <a:t>98,1%</a:t>
+            </a:r>
+            <a:r>
+              <a:rPr sz="1050" b="0">
+                <a:solidFill>
+                  <a:srgbClr val="0B1F3A"/>
+                </a:solidFill>
+                <a:latin typeface="Segoe UI"/>
+              </a:rPr>
+              <a:t> dos desvios (1 inviável)</a:t>
+            </a:r>
+          </a:p>
+        </p:txBody>
+      </p:sp>
+      <p:sp>
+        <p:nvSpPr>
+          <p:cNvPr id="12" name="Chevron 11"/>
+          <p:cNvSpPr/>
+          <p:nvPr/>
+        </p:nvSpPr>
+        <p:spPr>
+          <a:xfrm>
+            <a:off x="3995928" y="1280160"/>
+            <a:ext cx="1847088" cy="676656"/>
+          </a:xfrm>
+          <a:prstGeom prst="chevron">
+            <a:avLst/>
+          </a:prstGeom>
+          <a:solidFill>
+            <a:srgbClr val="8A1038"/>
+          </a:solidFill>
+          <a:ln>
+            <a:noFill/>
+          </a:ln>
+          <a:effectLst/>
+        </p:spPr>
+        <p:style>
+          <a:lnRef idx="1">
+            <a:schemeClr val="accent1"/>
+          </a:lnRef>
+          <a:fillRef idx="3">
+            <a:schemeClr val="accent1"/>
+          </a:fillRef>
+          <a:effectRef idx="2">
+            <a:schemeClr val="accent1"/>
+          </a:effectRef>
+          <a:fontRef idx="minor">
+            <a:schemeClr val="lt1"/>
+          </a:fontRef>
+        </p:style>
+        <p:txBody>
+          <a:bodyPr rtlCol="0" anchor="ctr" wrap="square" lIns="274320" rIns="109728" tIns="54864" bIns="54864"/>
+          <a:lstStyle/>
+          <a:p>
+            <a:pPr algn="l">
+              <a:spcAft>
+                <a:spcPts val="0"/>
+              </a:spcAft>
+            </a:pPr>
+            <a:r>
+              <a:rPr sz="1300" b="1">
+                <a:solidFill>
+                  <a:srgbClr val="FFFFFF"/>
+                </a:solidFill>
+                <a:latin typeface="Segoe UI"/>
+              </a:rPr>
+              <a:t>Correção</a:t>
+            </a:r>
+          </a:p>
+          <a:p>
+            <a:pPr algn="l">
+              <a:spcAft>
+                <a:spcPts val="0"/>
+              </a:spcAft>
+            </a:pPr>
+            <a:r>
+              <a:rPr sz="850" b="0">
+                <a:solidFill>
+                  <a:srgbClr val="FFFFFF"/>
+                </a:solidFill>
+                <a:latin typeface="Segoe UI"/>
+              </a:rPr>
+              <a:t>fork no GitHub · 6 commits</a:t>
+            </a:r>
+          </a:p>
+        </p:txBody>
+      </p:sp>
+      <p:sp>
+        <p:nvSpPr>
+          <p:cNvPr id="13" name="Rectangle 12"/>
+          <p:cNvSpPr/>
+          <p:nvPr/>
+        </p:nvSpPr>
+        <p:spPr>
+          <a:xfrm>
+            <a:off x="4023360" y="2057400"/>
+            <a:ext cx="1700784" cy="2377440"/>
+          </a:xfrm>
+          <a:prstGeom prst="rect">
+            <a:avLst/>
+          </a:prstGeom>
+          <a:solidFill>
+            <a:srgbClr val="F3F5F9"/>
+          </a:solidFill>
+          <a:ln w="9525">
+            <a:solidFill>
+              <a:srgbClr val="D7DDE6"/>
+            </a:solidFill>
+          </a:ln>
+          <a:effectLst/>
+        </p:spPr>
+        <p:style>
+          <a:lnRef idx="1">
+            <a:schemeClr val="accent1"/>
+          </a:lnRef>
+          <a:fillRef idx="3">
+            <a:schemeClr val="accent1"/>
+          </a:fillRef>
+          <a:effectRef idx="2">
+            <a:schemeClr val="accent1"/>
+          </a:effectRef>
+          <a:fontRef idx="minor">
+            <a:schemeClr val="lt1"/>
+          </a:fontRef>
+        </p:style>
+        <p:txBody>
+          <a:bodyPr rtlCol="0" anchor="t" wrap="square" lIns="109728" rIns="109728" tIns="54864" bIns="54864"/>
+          <a:lstStyle/>
+          <a:p>
+            <a:pPr algn="l">
+              <a:spcAft>
+                <a:spcPts val="600"/>
+              </a:spcAft>
+            </a:pPr>
+            <a:r>
+              <a:rPr sz="1050" b="1">
+                <a:solidFill>
+                  <a:srgbClr val="0B1F3A"/>
+                </a:solidFill>
+                <a:latin typeface="Segoe UI"/>
+              </a:rPr>
+              <a:t>19 defeitos</a:t>
+            </a:r>
+            <a:r>
+              <a:rPr sz="1050" b="0">
+                <a:solidFill>
+                  <a:srgbClr val="0B1F3A"/>
+                </a:solidFill>
+                <a:latin typeface="Segoe UI"/>
+              </a:rPr>
+              <a:t> corrigidos</a:t>
+            </a:r>
+          </a:p>
+          <a:p>
+            <a:pPr algn="l">
+              <a:spcAft>
+                <a:spcPts val="600"/>
+              </a:spcAft>
+            </a:pPr>
+            <a:r>
+              <a:rPr sz="1050" b="0">
+                <a:solidFill>
+                  <a:srgbClr val="0B1F3A"/>
+                </a:solidFill>
+                <a:latin typeface="Segoe UI"/>
+              </a:rPr>
+              <a:t>Cada commit confirmado pelo teste que revelou o defeito</a:t>
+            </a:r>
+          </a:p>
+          <a:p>
+            <a:pPr algn="l">
+              <a:spcAft>
+                <a:spcPts val="600"/>
+              </a:spcAft>
+            </a:pPr>
+            <a:r>
+              <a:rPr sz="1050" b="1">
+                <a:solidFill>
+                  <a:srgbClr val="0B1F3A"/>
+                </a:solidFill>
+                <a:latin typeface="Segoe UI"/>
+              </a:rPr>
+              <a:t>59/59</a:t>
+            </a:r>
+            <a:r>
+              <a:rPr sz="1050" b="0">
+                <a:solidFill>
+                  <a:srgbClr val="0B1F3A"/>
+                </a:solidFill>
+                <a:latin typeface="Segoe UI"/>
+              </a:rPr>
+              <a:t> passam, sem skip</a:t>
+            </a:r>
+          </a:p>
+          <a:p>
+            <a:pPr algn="l">
+              <a:spcAft>
+                <a:spcPts val="600"/>
+              </a:spcAft>
+            </a:pPr>
+            <a:r>
+              <a:rPr sz="1050" b="1">
+                <a:solidFill>
+                  <a:srgbClr val="0B1F3A"/>
+                </a:solidFill>
+                <a:latin typeface="Segoe UI"/>
+              </a:rPr>
+              <a:t>100%</a:t>
+            </a:r>
+            <a:r>
+              <a:rPr sz="1050" b="0">
+                <a:solidFill>
+                  <a:srgbClr val="0B1F3A"/>
+                </a:solidFill>
+                <a:latin typeface="Segoe UI"/>
+              </a:rPr>
+              <a:t> de comandos e desvios</a:t>
+            </a:r>
+          </a:p>
+        </p:txBody>
+      </p:sp>
+      <p:sp>
+        <p:nvSpPr>
+          <p:cNvPr id="14" name="Chevron 13"/>
+          <p:cNvSpPr/>
+          <p:nvPr/>
+        </p:nvSpPr>
+        <p:spPr>
+          <a:xfrm>
+            <a:off x="5788152" y="1280160"/>
+            <a:ext cx="1847088" cy="676656"/>
+          </a:xfrm>
+          <a:prstGeom prst="chevron">
+            <a:avLst/>
+          </a:prstGeom>
+          <a:solidFill>
+            <a:srgbClr val="1E8E5A"/>
+          </a:solidFill>
+          <a:ln>
+            <a:noFill/>
+          </a:ln>
+          <a:effectLst/>
+        </p:spPr>
+        <p:style>
+          <a:lnRef idx="1">
+            <a:schemeClr val="accent1"/>
+          </a:lnRef>
+          <a:fillRef idx="3">
+            <a:schemeClr val="accent1"/>
+          </a:fillRef>
+          <a:effectRef idx="2">
+            <a:schemeClr val="accent1"/>
+          </a:effectRef>
+          <a:fontRef idx="minor">
+            <a:schemeClr val="lt1"/>
+          </a:fontRef>
+        </p:style>
+        <p:txBody>
+          <a:bodyPr rtlCol="0" anchor="ctr" wrap="square" lIns="274320" rIns="109728" tIns="54864" bIns="54864"/>
+          <a:lstStyle/>
+          <a:p>
+            <a:pPr algn="l">
+              <a:spcAft>
+                <a:spcPts val="0"/>
+              </a:spcAft>
+            </a:pPr>
+            <a:r>
+              <a:rPr sz="1300" b="1">
+                <a:solidFill>
+                  <a:srgbClr val="FFFFFF"/>
+                </a:solidFill>
+                <a:latin typeface="Segoe UI"/>
+              </a:rPr>
+              <a:t>Mutação</a:t>
+            </a:r>
+          </a:p>
+          <a:p>
+            <a:pPr algn="l">
+              <a:spcAft>
+                <a:spcPts val="0"/>
+              </a:spcAft>
+            </a:pPr>
+            <a:r>
+              <a:rPr sz="850" b="0">
+                <a:solidFill>
+                  <a:srgbClr val="FFFFFF"/>
+                </a:solidFill>
+                <a:latin typeface="Segoe UI"/>
+              </a:rPr>
+              <a:t>Cosmic Ray · 204 mutantes</a:t>
+            </a:r>
+          </a:p>
+        </p:txBody>
+      </p:sp>
+      <p:sp>
+        <p:nvSpPr>
+          <p:cNvPr id="15" name="Rectangle 14"/>
+          <p:cNvSpPr/>
+          <p:nvPr/>
+        </p:nvSpPr>
+        <p:spPr>
+          <a:xfrm>
+            <a:off x="5815584" y="2057400"/>
+            <a:ext cx="1700784" cy="2377440"/>
+          </a:xfrm>
+          <a:prstGeom prst="rect">
+            <a:avLst/>
+          </a:prstGeom>
+          <a:solidFill>
+            <a:srgbClr val="F3F5F9"/>
+          </a:solidFill>
+          <a:ln w="9525">
+            <a:solidFill>
+              <a:srgbClr val="D7DDE6"/>
+            </a:solidFill>
+          </a:ln>
+          <a:effectLst/>
+        </p:spPr>
+        <p:style>
+          <a:lnRef idx="1">
+            <a:schemeClr val="accent1"/>
+          </a:lnRef>
+          <a:fillRef idx="3">
+            <a:schemeClr val="accent1"/>
+          </a:fillRef>
+          <a:effectRef idx="2">
+            <a:schemeClr val="accent1"/>
+          </a:effectRef>
+          <a:fontRef idx="minor">
+            <a:schemeClr val="lt1"/>
+          </a:fontRef>
+        </p:style>
+        <p:txBody>
+          <a:bodyPr rtlCol="0" anchor="t" wrap="square" lIns="109728" rIns="109728" tIns="54864" bIns="54864"/>
+          <a:lstStyle/>
+          <a:p>
+            <a:pPr algn="l">
+              <a:spcAft>
+                <a:spcPts val="600"/>
+              </a:spcAft>
+            </a:pPr>
+            <a:r>
+              <a:rPr sz="1050" b="0">
+                <a:solidFill>
+                  <a:srgbClr val="0B1F3A"/>
+                </a:solidFill>
+                <a:latin typeface="Segoe UI"/>
+              </a:rPr>
+              <a:t>Inicial: </a:t>
+            </a:r>
+            <a:r>
+              <a:rPr sz="1050" b="1">
+                <a:solidFill>
+                  <a:srgbClr val="0B1F3A"/>
+                </a:solidFill>
+                <a:latin typeface="Segoe UI"/>
+              </a:rPr>
+              <a:t>93,6%</a:t>
+            </a:r>
+            <a:r>
+              <a:rPr sz="1050" b="0">
+                <a:solidFill>
+                  <a:srgbClr val="0B1F3A"/>
+                </a:solidFill>
+                <a:latin typeface="Segoe UI"/>
+              </a:rPr>
+              <a:t> (191/204)</a:t>
+            </a:r>
+          </a:p>
+          <a:p>
+            <a:pPr algn="l">
+              <a:spcAft>
+                <a:spcPts val="600"/>
+              </a:spcAft>
+            </a:pPr>
+            <a:r>
+              <a:rPr sz="1050" b="0">
+                <a:solidFill>
+                  <a:srgbClr val="0B1F3A"/>
+                </a:solidFill>
+                <a:latin typeface="Segoe UI"/>
+              </a:rPr>
+              <a:t>13 vivos: </a:t>
+            </a:r>
+            <a:r>
+              <a:rPr sz="1050" b="1">
+                <a:solidFill>
+                  <a:srgbClr val="0B1F3A"/>
+                </a:solidFill>
+                <a:latin typeface="Segoe UI"/>
+              </a:rPr>
+              <a:t>5 matáveis</a:t>
+            </a:r>
+            <a:r>
+              <a:rPr sz="1050" b="0">
+                <a:solidFill>
+                  <a:srgbClr val="0B1F3A"/>
+                </a:solidFill>
+                <a:latin typeface="Segoe UI"/>
+              </a:rPr>
+              <a:t>, 8 equivalentes</a:t>
+            </a:r>
+          </a:p>
+          <a:p>
+            <a:pPr algn="l">
+              <a:spcAft>
+                <a:spcPts val="600"/>
+              </a:spcAft>
+            </a:pPr>
+            <a:r>
+              <a:rPr sz="1050" b="1">
+                <a:solidFill>
+                  <a:srgbClr val="0B1F3A"/>
+                </a:solidFill>
+                <a:latin typeface="Segoe UI"/>
+              </a:rPr>
+              <a:t>+5 casos</a:t>
+            </a:r>
+            <a:r>
+              <a:rPr sz="1050" b="0">
+                <a:solidFill>
+                  <a:srgbClr val="0B1F3A"/>
+                </a:solidFill>
+                <a:latin typeface="Segoe UI"/>
+              </a:rPr>
+              <a:t> para os matáveis</a:t>
+            </a:r>
+          </a:p>
+          <a:p>
+            <a:pPr algn="l">
+              <a:spcAft>
+                <a:spcPts val="600"/>
+              </a:spcAft>
+            </a:pPr>
+            <a:r>
+              <a:rPr sz="1050" b="0">
+                <a:solidFill>
+                  <a:srgbClr val="0B1F3A"/>
+                </a:solidFill>
+                <a:latin typeface="Segoe UI"/>
+              </a:rPr>
+              <a:t>Final: </a:t>
+            </a:r>
+            <a:r>
+              <a:rPr sz="1050" b="1">
+                <a:solidFill>
+                  <a:srgbClr val="0B1F3A"/>
+                </a:solidFill>
+                <a:latin typeface="Segoe UI"/>
+              </a:rPr>
+              <a:t>96,1%</a:t>
+            </a:r>
+            <a:r>
+              <a:rPr sz="1050" b="0">
+                <a:solidFill>
+                  <a:srgbClr val="0B1F3A"/>
+                </a:solidFill>
+                <a:latin typeface="Segoe UI"/>
+              </a:rPr>
+              <a:t> · 100% dos não equivalentes</a:t>
+            </a:r>
+          </a:p>
+        </p:txBody>
+      </p:sp>
+      <p:sp>
+        <p:nvSpPr>
+          <p:cNvPr id="16" name="Rectangle 15"/>
+          <p:cNvSpPr/>
+          <p:nvPr/>
+        </p:nvSpPr>
+        <p:spPr>
+          <a:xfrm>
+            <a:off x="411480" y="4590288"/>
+            <a:ext cx="7104888" cy="868680"/>
+          </a:xfrm>
+          <a:prstGeom prst="rect">
+            <a:avLst/>
+          </a:prstGeom>
+          <a:solidFill>
+            <a:srgbClr val="FFFFFF"/>
+          </a:solidFill>
+          <a:ln w="9525">
+            <a:solidFill>
+              <a:srgbClr val="D7DDE6"/>
+            </a:solidFill>
+          </a:ln>
+          <a:effectLst/>
+        </p:spPr>
+        <p:style>
+          <a:lnRef idx="1">
+            <a:schemeClr val="accent1"/>
+          </a:lnRef>
+          <a:fillRef idx="3">
+            <a:schemeClr val="accent1"/>
+          </a:fillRef>
+          <a:effectRef idx="2">
+            <a:schemeClr val="accent1"/>
+          </a:effectRef>
+          <a:fontRef idx="minor">
+            <a:schemeClr val="lt1"/>
+          </a:fontRef>
+        </p:style>
+        <p:txBody>
+          <a:bodyPr rtlCol="0" anchor="t" wrap="square" lIns="109728" rIns="109728" tIns="54864" bIns="54864"/>
+          <a:lstStyle/>
+          <a:p>
+            <a:pPr algn="l">
+              <a:spcAft>
+                <a:spcPts val="200"/>
+              </a:spcAft>
+            </a:pPr>
+            <a:r>
+              <a:rPr sz="1150" b="1">
+                <a:solidFill>
+                  <a:srgbClr val="8A1038"/>
+                </a:solidFill>
+                <a:latin typeface="Segoe UI"/>
+              </a:rPr>
+              <a:t>Rastreabilidade de ponta a ponta</a:t>
+            </a:r>
+          </a:p>
+          <a:p>
+            <a:pPr algn="l">
+              <a:spcAft>
+                <a:spcPts val="200"/>
+              </a:spcAft>
+            </a:pPr>
+            <a:r>
+              <a:rPr sz="1050" b="1">
+                <a:solidFill>
+                  <a:srgbClr val="0B1F3A"/>
+                </a:solidFill>
+                <a:latin typeface="Segoe UI"/>
+              </a:rPr>
+              <a:t>REQ</a:t>
+            </a:r>
+            <a:r>
+              <a:rPr sz="1050" b="0">
+                <a:solidFill>
+                  <a:srgbClr val="0B1F3A"/>
+                </a:solidFill>
+                <a:latin typeface="Segoe UI"/>
+              </a:rPr>
+              <a:t> → </a:t>
+            </a:r>
+            <a:r>
+              <a:rPr sz="1050" b="1">
+                <a:solidFill>
+                  <a:srgbClr val="0B1F3A"/>
+                </a:solidFill>
+                <a:latin typeface="Segoe UI"/>
+              </a:rPr>
+              <a:t>CE</a:t>
+            </a:r>
+            <a:r>
+              <a:rPr sz="1050" b="0">
+                <a:solidFill>
+                  <a:srgbClr val="0B1F3A"/>
+                </a:solidFill>
+                <a:latin typeface="Segoe UI"/>
+              </a:rPr>
+              <a:t> (@pytest.mark.ce) → </a:t>
+            </a:r>
+            <a:r>
+              <a:rPr sz="1050" b="1">
+                <a:solidFill>
+                  <a:srgbClr val="0B1F3A"/>
+                </a:solidFill>
+                <a:latin typeface="Segoe UI"/>
+              </a:rPr>
+              <a:t>CT</a:t>
+            </a:r>
+            <a:r>
+              <a:rPr sz="1050" b="0">
+                <a:solidFill>
+                  <a:srgbClr val="0B1F3A"/>
+                </a:solidFill>
+                <a:latin typeface="Segoe UI"/>
+              </a:rPr>
+              <a:t> (nome do teste) → </a:t>
+            </a:r>
+            <a:r>
+              <a:rPr sz="1050" b="1">
+                <a:solidFill>
+                  <a:srgbClr val="0B1F3A"/>
+                </a:solidFill>
+                <a:latin typeface="Segoe UI"/>
+              </a:rPr>
+              <a:t>execução</a:t>
+            </a:r>
+            <a:r>
+              <a:rPr sz="1050" b="0">
+                <a:solidFill>
+                  <a:srgbClr val="0B1F3A"/>
+                </a:solidFill>
+                <a:latin typeface="Segoe UI"/>
+              </a:rPr>
+              <a:t> (JUnit) → </a:t>
+            </a:r>
+            <a:r>
+              <a:rPr sz="1050" b="1">
+                <a:solidFill>
+                  <a:srgbClr val="0B1F3A"/>
+                </a:solidFill>
+                <a:latin typeface="Segoe UI"/>
+              </a:rPr>
+              <a:t>DEF</a:t>
+            </a:r>
+            <a:r>
+              <a:rPr sz="1050" b="0">
+                <a:solidFill>
+                  <a:srgbClr val="0B1F3A"/>
+                </a:solidFill>
+                <a:latin typeface="Segoe UI"/>
+              </a:rPr>
+              <a:t> (@pytest.mark.defeito) → </a:t>
+            </a:r>
+            <a:r>
+              <a:rPr sz="1050" b="1">
+                <a:solidFill>
+                  <a:srgbClr val="0B1F3A"/>
+                </a:solidFill>
+                <a:latin typeface="Segoe UI"/>
+              </a:rPr>
+              <a:t>commit</a:t>
+            </a:r>
+            <a:r>
+              <a:rPr sz="1050" b="0">
+                <a:solidFill>
+                  <a:srgbClr val="0B1F3A"/>
+                </a:solidFill>
+                <a:latin typeface="Segoe UI"/>
+              </a:rPr>
+              <a:t> de correção</a:t>
+            </a:r>
+          </a:p>
+        </p:txBody>
+      </p:sp>
+      <p:sp>
+        <p:nvSpPr>
+          <p:cNvPr id="17" name="Rectangle 16"/>
+          <p:cNvSpPr/>
+          <p:nvPr/>
+        </p:nvSpPr>
+        <p:spPr>
+          <a:xfrm>
+            <a:off x="411480" y="5532120"/>
+            <a:ext cx="7104888" cy="914400"/>
+          </a:xfrm>
+          <a:prstGeom prst="rect">
+            <a:avLst/>
+          </a:prstGeom>
+          <a:noFill/>
+          <a:ln>
+            <a:noFill/>
+          </a:ln>
+          <a:effectLst/>
+        </p:spPr>
+        <p:style>
+          <a:lnRef idx="1">
+            <a:schemeClr val="accent1"/>
+          </a:lnRef>
+          <a:fillRef idx="3">
+            <a:schemeClr val="accent1"/>
+          </a:fillRef>
+          <a:effectRef idx="2">
+            <a:schemeClr val="accent1"/>
+          </a:effectRef>
+          <a:fontRef idx="minor">
+            <a:schemeClr val="lt1"/>
+          </a:fontRef>
+        </p:style>
+        <p:txBody>
+          <a:bodyPr rtlCol="0" anchor="t" wrap="square" lIns="109728" rIns="109728" tIns="54864" bIns="54864"/>
+          <a:lstStyle/>
+          <a:p>
+            <a:pPr algn="l">
+              <a:spcAft>
+                <a:spcPts val="200"/>
+              </a:spcAft>
+            </a:pPr>
+            <a:r>
+              <a:rPr sz="1050" b="0">
+                <a:solidFill>
+                  <a:srgbClr val="5B6472"/>
+                </a:solidFill>
+                <a:latin typeface="Segoe UI"/>
+              </a:rPr>
+              <a:t>Mesmo teste nos dois códigos: </a:t>
+            </a:r>
+            <a:r>
+              <a:rPr sz="1050" b="1">
+                <a:solidFill>
+                  <a:srgbClr val="5B6472"/>
+                </a:solidFill>
+                <a:latin typeface="Segoe UI"/>
+              </a:rPr>
+              <a:t>xfail estrito no original</a:t>
+            </a:r>
+            <a:r>
+              <a:rPr sz="1050" b="0">
+                <a:solidFill>
+                  <a:srgbClr val="5B6472"/>
+                </a:solidFill>
+                <a:latin typeface="Segoe UI"/>
+              </a:rPr>
+              <a:t> (o defeito precisa aparecer) e </a:t>
+            </a:r>
+            <a:r>
+              <a:rPr sz="1050" b="1">
+                <a:solidFill>
+                  <a:srgbClr val="5B6472"/>
+                </a:solidFill>
+                <a:latin typeface="Segoe UI"/>
+              </a:rPr>
+              <a:t>verde no corrigido</a:t>
+            </a:r>
+            <a:r>
+              <a:rPr sz="1050" b="0">
+                <a:solidFill>
+                  <a:srgbClr val="5B6472"/>
+                </a:solidFill>
+                <a:latin typeface="Segoe UI"/>
+              </a:rPr>
+              <a:t>. etapas.ps1 / etapas.sh reproduzem tudo e gravam as evidências de cada etapa.</a:t>
+            </a:r>
+          </a:p>
+        </p:txBody>
+      </p:sp>
+      <p:pic>
+        <p:nvPicPr>
+          <p:cNvPr id="18" name="Picture 17" descr="original-03-quartos.png"/>
+          <p:cNvPicPr>
+            <a:picLocks noChangeAspect="1"/>
+          </p:cNvPicPr>
+          <p:nvPr/>
+        </p:nvPicPr>
+        <p:blipFill>
+          <a:blip r:embed="rId2"/>
+          <a:stretch>
+            <a:fillRect/>
+          </a:stretch>
+        </p:blipFill>
+        <p:spPr>
+          <a:xfrm>
+            <a:off x="7772400" y="1280160"/>
+            <a:ext cx="4023360" cy="1760220"/>
+          </a:xfrm>
+          <a:prstGeom prst="rect">
+            <a:avLst/>
+          </a:prstGeom>
+          <a:ln w="12700">
+            <a:solidFill>
+              <a:srgbClr val="D7DDE6"/>
+            </a:solidFill>
+          </a:ln>
+        </p:spPr>
+      </p:pic>
+      <p:sp>
+        <p:nvSpPr>
+          <p:cNvPr id="19" name="Rectangle 18"/>
+          <p:cNvSpPr/>
+          <p:nvPr/>
+        </p:nvSpPr>
+        <p:spPr>
+          <a:xfrm>
+            <a:off x="7772400" y="3054096"/>
+            <a:ext cx="4023360" cy="274320"/>
+          </a:xfrm>
+          <a:prstGeom prst="rect">
+            <a:avLst/>
+          </a:prstGeom>
+          <a:noFill/>
+          <a:ln>
+            <a:noFill/>
+          </a:ln>
+          <a:effectLst/>
+        </p:spPr>
+        <p:style>
+          <a:lnRef idx="1">
+            <a:schemeClr val="accent1"/>
+          </a:lnRef>
+          <a:fillRef idx="3">
+            <a:schemeClr val="accent1"/>
+          </a:fillRef>
+          <a:effectRef idx="2">
+            <a:schemeClr val="accent1"/>
+          </a:effectRef>
+          <a:fontRef idx="minor">
+            <a:schemeClr val="lt1"/>
+          </a:fontRef>
+        </p:style>
+        <p:txBody>
+          <a:bodyPr rtlCol="0" anchor="t" wrap="square" lIns="109728" rIns="109728" tIns="54864" bIns="54864"/>
+          <a:lstStyle/>
+          <a:p>
+            <a:pPr algn="ctr">
+              <a:spcAft>
+                <a:spcPts val="200"/>
+              </a:spcAft>
+            </a:pPr>
+            <a:r>
+              <a:rPr sz="950" b="0">
+                <a:solidFill>
+                  <a:srgbClr val="5B6472"/>
+                </a:solidFill>
+                <a:latin typeface="Segoe UI"/>
+              </a:rPr>
+              <a:t>SUT em execução: lista de quartos após o login</a:t>
+            </a:r>
+          </a:p>
+        </p:txBody>
+      </p:sp>
+      <p:pic>
+        <p:nvPicPr>
+          <p:cNvPr id="20" name="Picture 19" descr="04-rastreabilidade.png"/>
+          <p:cNvPicPr>
+            <a:picLocks noChangeAspect="1"/>
+          </p:cNvPicPr>
+          <p:nvPr/>
+        </p:nvPicPr>
+        <p:blipFill>
+          <a:blip r:embed="rId3"/>
+          <a:stretch>
+            <a:fillRect/>
+          </a:stretch>
+        </p:blipFill>
+        <p:spPr>
+          <a:xfrm>
+            <a:off x="7772400" y="3456432"/>
+            <a:ext cx="4023360" cy="2402840"/>
+          </a:xfrm>
+          <a:prstGeom prst="rect">
+            <a:avLst/>
+          </a:prstGeom>
+          <a:ln w="12700">
+            <a:solidFill>
+              <a:srgbClr val="D7DDE6"/>
+            </a:solidFill>
+          </a:ln>
+        </p:spPr>
+      </p:pic>
+      <p:sp>
+        <p:nvSpPr>
+          <p:cNvPr id="21" name="Rectangle 20"/>
+          <p:cNvSpPr/>
+          <p:nvPr/>
+        </p:nvSpPr>
+        <p:spPr>
+          <a:xfrm>
+            <a:off x="7772400" y="5877559"/>
+            <a:ext cx="4023360" cy="274320"/>
+          </a:xfrm>
+          <a:prstGeom prst="rect">
+            <a:avLst/>
+          </a:prstGeom>
+          <a:noFill/>
+          <a:ln>
+            <a:noFill/>
+          </a:ln>
+          <a:effectLst/>
+        </p:spPr>
+        <p:style>
+          <a:lnRef idx="1">
+            <a:schemeClr val="accent1"/>
+          </a:lnRef>
+          <a:fillRef idx="3">
+            <a:schemeClr val="accent1"/>
+          </a:fillRef>
+          <a:effectRef idx="2">
+            <a:schemeClr val="accent1"/>
+          </a:effectRef>
+          <a:fontRef idx="minor">
+            <a:schemeClr val="lt1"/>
+          </a:fontRef>
+        </p:style>
+        <p:txBody>
+          <a:bodyPr rtlCol="0" anchor="t" wrap="square" lIns="109728" rIns="109728" tIns="54864" bIns="54864"/>
+          <a:lstStyle/>
+          <a:p>
+            <a:pPr algn="ctr">
+              <a:spcAft>
+                <a:spcPts val="200"/>
+              </a:spcAft>
+            </a:pPr>
+            <a:r>
+              <a:rPr sz="950" b="0">
+                <a:solidFill>
+                  <a:srgbClr val="5B6472"/>
+                </a:solidFill>
+                <a:latin typeface="Segoe UI"/>
+              </a:rPr>
+              <a:t>V&amp;V TestLab: requisito → classe → caso → execução → defeito</a:t>
             </a:r>
           </a:p>
         </p:txBody>
@@ -4215,8 +5616,153 @@
         </p:nvSpPr>
         <p:spPr>
           <a:xfrm>
-            <a:off x="365760" y="228600"/>
-            <a:ext cx="11430000" cy="548640"/>
+            <a:off x="0" y="0"/>
+            <a:ext cx="12191695" cy="960120"/>
+          </a:xfrm>
+          <a:prstGeom prst="rect">
+            <a:avLst/>
+          </a:prstGeom>
+          <a:solidFill>
+            <a:srgbClr val="0B1F3A"/>
+          </a:solidFill>
+          <a:ln>
+            <a:noFill/>
+          </a:ln>
+          <a:effectLst/>
+        </p:spPr>
+        <p:style>
+          <a:lnRef idx="1">
+            <a:schemeClr val="accent1"/>
+          </a:lnRef>
+          <a:fillRef idx="3">
+            <a:schemeClr val="accent1"/>
+          </a:fillRef>
+          <a:effectRef idx="2">
+            <a:schemeClr val="accent1"/>
+          </a:effectRef>
+          <a:fontRef idx="minor">
+            <a:schemeClr val="lt1"/>
+          </a:fontRef>
+        </p:style>
+        <p:txBody>
+          <a:bodyPr rtlCol="0" anchor="t" wrap="square" lIns="109728" rIns="109728" tIns="54864" bIns="54864"/>
+          <a:lstStyle/>
+          <a:p>
+            <a:pPr algn="ctr"/>
+          </a:p>
+        </p:txBody>
+      </p:sp>
+      <p:sp>
+        <p:nvSpPr>
+          <p:cNvPr id="3" name="Rectangle 2"/>
+          <p:cNvSpPr/>
+          <p:nvPr/>
+        </p:nvSpPr>
+        <p:spPr>
+          <a:xfrm>
+            <a:off x="0" y="960120"/>
+            <a:ext cx="12191695" cy="54864"/>
+          </a:xfrm>
+          <a:prstGeom prst="rect">
+            <a:avLst/>
+          </a:prstGeom>
+          <a:solidFill>
+            <a:srgbClr val="8A1038"/>
+          </a:solidFill>
+          <a:ln>
+            <a:noFill/>
+          </a:ln>
+          <a:effectLst/>
+        </p:spPr>
+        <p:style>
+          <a:lnRef idx="1">
+            <a:schemeClr val="accent1"/>
+          </a:lnRef>
+          <a:fillRef idx="3">
+            <a:schemeClr val="accent1"/>
+          </a:fillRef>
+          <a:effectRef idx="2">
+            <a:schemeClr val="accent1"/>
+          </a:effectRef>
+          <a:fontRef idx="minor">
+            <a:schemeClr val="lt1"/>
+          </a:fontRef>
+        </p:style>
+        <p:txBody>
+          <a:bodyPr rtlCol="0" anchor="t" wrap="square" lIns="109728" rIns="109728" tIns="54864" bIns="54864"/>
+          <a:lstStyle/>
+          <a:p>
+            <a:pPr algn="ctr"/>
+          </a:p>
+        </p:txBody>
+      </p:sp>
+      <p:sp>
+        <p:nvSpPr>
+          <p:cNvPr id="4" name="Oval 3"/>
+          <p:cNvSpPr/>
+          <p:nvPr/>
+        </p:nvSpPr>
+        <p:spPr>
+          <a:xfrm>
+            <a:off x="411480" y="201168"/>
+            <a:ext cx="566928" cy="566928"/>
+          </a:xfrm>
+          <a:prstGeom prst="ellipse">
+            <a:avLst/>
+          </a:prstGeom>
+          <a:solidFill>
+            <a:srgbClr val="8A1038"/>
+          </a:solidFill>
+          <a:ln>
+            <a:noFill/>
+          </a:ln>
+          <a:effectLst/>
+        </p:spPr>
+        <p:style>
+          <a:lnRef idx="1">
+            <a:schemeClr val="accent1"/>
+          </a:lnRef>
+          <a:fillRef idx="3">
+            <a:schemeClr val="accent1"/>
+          </a:fillRef>
+          <a:effectRef idx="2">
+            <a:schemeClr val="accent1"/>
+          </a:effectRef>
+          <a:fontRef idx="minor">
+            <a:schemeClr val="lt1"/>
+          </a:fontRef>
+        </p:style>
+        <p:txBody>
+          <a:bodyPr rtlCol="0" anchor="ctr" wrap="square" lIns="0" rIns="0" tIns="54864" bIns="54864"/>
+          <a:lstStyle/>
+          <a:p>
+            <a:pPr algn="ctr">
+              <a:spcAft>
+                <a:spcPts val="200"/>
+              </a:spcAft>
+            </a:pPr>
+            <a:r>
+              <a:rPr sz="2000" b="1">
+                <a:solidFill>
+                  <a:srgbClr val="FFFFFF"/>
+                </a:solidFill>
+                <a:latin typeface="Segoe UI"/>
+              </a:rPr>
+              <a:t>2</a:t>
+            </a:r>
+          </a:p>
+        </p:txBody>
+      </p:sp>
+      <p:sp>
+        <p:nvSpPr>
+          <p:cNvPr id="5" name="Rectangle 4"/>
+          <p:cNvSpPr/>
+          <p:nvPr/>
+        </p:nvSpPr>
+        <p:spPr>
+          <a:xfrm>
+            <a:off x="1143000" y="91440"/>
+            <a:ext cx="10607040" cy="502920"/>
           </a:xfrm>
           <a:prstGeom prst="rect">
             <a:avLst/>
@@ -4247,31 +5793,31 @@
           <a:p>
             <a:pPr algn="l">
               <a:spcAft>
-                <a:spcPts val="300"/>
+                <a:spcPts val="200"/>
               </a:spcAft>
             </a:pPr>
             <a:r>
-              <a:rPr sz="2600" b="1">
-                <a:solidFill>
-                  <a:srgbClr val="7A0C2E"/>
-                </a:solidFill>
-                <a:latin typeface="Segoe UI"/>
-              </a:rPr>
-              <a:t>2. Resultados, dificuldades e lições aprendidas</a:t>
-            </a:r>
-          </a:p>
-        </p:txBody>
-      </p:sp>
-      <p:sp>
-        <p:nvSpPr>
-          <p:cNvPr id="3" name="Rectangle 2"/>
+              <a:rPr sz="2500" b="1">
+                <a:solidFill>
+                  <a:srgbClr val="FFFFFF"/>
+                </a:solidFill>
+                <a:latin typeface="Segoe UI"/>
+              </a:rPr>
+              <a:t>Resultados, dificuldades e lições aprendidas</a:t>
+            </a:r>
+          </a:p>
+        </p:txBody>
+      </p:sp>
+      <p:sp>
+        <p:nvSpPr>
+          <p:cNvPr id="6" name="Rectangle 5"/>
           <p:cNvSpPr/>
           <p:nvPr/>
         </p:nvSpPr>
         <p:spPr>
           <a:xfrm>
-            <a:off x="365760" y="777240"/>
-            <a:ext cx="11430000" cy="365760"/>
+            <a:off x="1143000" y="548640"/>
+            <a:ext cx="10607040" cy="365760"/>
           </a:xfrm>
           <a:prstGeom prst="rect">
             <a:avLst/>
@@ -4302,774 +5848,31 @@
           <a:p>
             <a:pPr algn="l">
               <a:spcAft>
-                <a:spcPts val="300"/>
+                <a:spcPts val="200"/>
               </a:spcAft>
             </a:pPr>
             <a:r>
-              <a:rPr sz="1300" b="0">
-                <a:solidFill>
-                  <a:srgbClr val="555B66"/>
-                </a:solidFill>
-                <a:latin typeface="Segoe UI"/>
-              </a:rPr>
-              <a:t>19 defeitos encontrados e corrigidos · suíte final: 59 casos, 100% de desvios, 96,1% de escore de mutação</a:t>
-            </a:r>
-          </a:p>
-        </p:txBody>
-      </p:sp>
-      <p:sp>
-        <p:nvSpPr>
-          <p:cNvPr id="4" name="Rectangle 3"/>
+              <a:rPr sz="1200" b="0">
+                <a:solidFill>
+                  <a:srgbClr val="C9D4E5"/>
+                </a:solidFill>
+                <a:latin typeface="Segoe UI"/>
+              </a:rPr>
+              <a:t>64 casos · 19 defeitos encontrados e corrigidos · 100% dos desvios · 96,1% de escore de mutação</a:t>
+            </a:r>
+          </a:p>
+        </p:txBody>
+      </p:sp>
+      <p:sp>
+        <p:nvSpPr>
+          <p:cNvPr id="7" name="Rectangle 6"/>
           <p:cNvSpPr/>
           <p:nvPr/>
         </p:nvSpPr>
         <p:spPr>
           <a:xfrm>
-            <a:off x="457200" y="1170432"/>
-            <a:ext cx="11247120" cy="36576"/>
-          </a:xfrm>
-          <a:prstGeom prst="rect">
-            <a:avLst/>
-          </a:prstGeom>
-          <a:solidFill>
-            <a:srgbClr val="7A0C2E"/>
-          </a:solidFill>
-          <a:ln>
-            <a:noFill/>
-          </a:ln>
-        </p:spPr>
-        <p:style>
-          <a:lnRef idx="1">
-            <a:schemeClr val="accent1"/>
-          </a:lnRef>
-          <a:fillRef idx="3">
-            <a:schemeClr val="accent1"/>
-          </a:fillRef>
-          <a:effectRef idx="2">
-            <a:schemeClr val="accent1"/>
-          </a:effectRef>
-          <a:fontRef idx="minor">
-            <a:schemeClr val="lt1"/>
-          </a:fontRef>
-        </p:style>
-        <p:txBody>
-          <a:bodyPr rtlCol="0" anchor="ctr"/>
-          <a:lstStyle/>
-          <a:p>
-            <a:pPr algn="ctr"/>
-          </a:p>
-        </p:txBody>
-      </p:sp>
-      <p:graphicFrame>
-        <p:nvGraphicFramePr>
-          <p:cNvPr id="5" name="Table 4"/>
-          <p:cNvGraphicFramePr>
-            <a:graphicFrameLocks noGrp="1"/>
-          </p:cNvGraphicFramePr>
-          <p:nvPr/>
-        </p:nvGraphicFramePr>
-        <p:xfrm>
-          <a:off x="411480" y="1371600"/>
-          <a:ext cx="6675120" cy="1737360"/>
-        </p:xfrm>
-        <a:graphic>
-          <a:graphicData uri="http://schemas.openxmlformats.org/drawingml/2006/table">
-            <a:tbl>
-              <a:tblPr firstRow="1" bandRow="1">
-                <a:tableStyleId>{5C22544A-7EE6-4342-B048-85BDC9FD1C3A}</a:tableStyleId>
-              </a:tblPr>
-              <a:tblGrid>
-                <a:gridCol w="1417320"/>
-                <a:gridCol w="960120"/>
-                <a:gridCol w="731520"/>
-                <a:gridCol w="1143000"/>
-                <a:gridCol w="1143000"/>
-                <a:gridCol w="1280160"/>
-              </a:tblGrid>
-              <a:tr h="347472">
-                <a:tc>
-                  <a:txBody>
-                    <a:bodyPr/>
-                    <a:lstStyle/>
-                    <a:p>
-                      <a:r>
-                        <a:rPr sz="1150" b="1">
-                          <a:solidFill>
-                            <a:srgbClr val="FFFFFF"/>
-                          </a:solidFill>
-                          <a:latin typeface="Segoe UI"/>
-                        </a:rPr>
-                        <a:t>Etapa</a:t>
-                      </a:r>
-                    </a:p>
-                  </a:txBody>
-                  <a:tcPr>
-                    <a:solidFill>
-                      <a:srgbClr val="0F2A4A"/>
-                    </a:solidFill>
-                  </a:tcPr>
-                </a:tc>
-                <a:tc>
-                  <a:txBody>
-                    <a:bodyPr/>
-                    <a:lstStyle/>
-                    <a:p>
-                      <a:r>
-                        <a:rPr sz="1150" b="1">
-                          <a:solidFill>
-                            <a:srgbClr val="FFFFFF"/>
-                          </a:solidFill>
-                          <a:latin typeface="Segoe UI"/>
-                        </a:rPr>
-                        <a:t>Código</a:t>
-                      </a:r>
-                    </a:p>
-                  </a:txBody>
-                  <a:tcPr>
-                    <a:solidFill>
-                      <a:srgbClr val="0F2A4A"/>
-                    </a:solidFill>
-                  </a:tcPr>
-                </a:tc>
-                <a:tc>
-                  <a:txBody>
-                    <a:bodyPr/>
-                    <a:lstStyle/>
-                    <a:p>
-                      <a:r>
-                        <a:rPr sz="1150" b="1">
-                          <a:solidFill>
-                            <a:srgbClr val="FFFFFF"/>
-                          </a:solidFill>
-                          <a:latin typeface="Segoe UI"/>
-                        </a:rPr>
-                        <a:t>Casos</a:t>
-                      </a:r>
-                    </a:p>
-                  </a:txBody>
-                  <a:tcPr>
-                    <a:solidFill>
-                      <a:srgbClr val="0F2A4A"/>
-                    </a:solidFill>
-                  </a:tcPr>
-                </a:tc>
-                <a:tc>
-                  <a:txBody>
-                    <a:bodyPr/>
-                    <a:lstStyle/>
-                    <a:p>
-                      <a:r>
-                        <a:rPr sz="1150" b="1">
-                          <a:solidFill>
-                            <a:srgbClr val="FFFFFF"/>
-                          </a:solidFill>
-                          <a:latin typeface="Segoe UI"/>
-                        </a:rPr>
-                        <a:t>Comandos</a:t>
-                      </a:r>
-                    </a:p>
-                  </a:txBody>
-                  <a:tcPr>
-                    <a:solidFill>
-                      <a:srgbClr val="0F2A4A"/>
-                    </a:solidFill>
-                  </a:tcPr>
-                </a:tc>
-                <a:tc>
-                  <a:txBody>
-                    <a:bodyPr/>
-                    <a:lstStyle/>
-                    <a:p>
-                      <a:r>
-                        <a:rPr sz="1150" b="1">
-                          <a:solidFill>
-                            <a:srgbClr val="FFFFFF"/>
-                          </a:solidFill>
-                          <a:latin typeface="Segoe UI"/>
-                        </a:rPr>
-                        <a:t>Desvios</a:t>
-                      </a:r>
-                    </a:p>
-                  </a:txBody>
-                  <a:tcPr>
-                    <a:solidFill>
-                      <a:srgbClr val="0F2A4A"/>
-                    </a:solidFill>
-                  </a:tcPr>
-                </a:tc>
-                <a:tc>
-                  <a:txBody>
-                    <a:bodyPr/>
-                    <a:lstStyle/>
-                    <a:p>
-                      <a:r>
-                        <a:rPr sz="1150" b="1">
-                          <a:solidFill>
-                            <a:srgbClr val="FFFFFF"/>
-                          </a:solidFill>
-                          <a:latin typeface="Segoe UI"/>
-                        </a:rPr>
-                        <a:t>Mutação</a:t>
-                      </a:r>
-                    </a:p>
-                  </a:txBody>
-                  <a:tcPr>
-                    <a:solidFill>
-                      <a:srgbClr val="0F2A4A"/>
-                    </a:solidFill>
-                  </a:tcPr>
-                </a:tc>
-              </a:tr>
-              <a:tr h="347472">
-                <a:tc>
-                  <a:txBody>
-                    <a:bodyPr/>
-                    <a:lstStyle/>
-                    <a:p>
-                      <a:r>
-                        <a:rPr sz="1150" b="0">
-                          <a:solidFill>
-                            <a:srgbClr val="0F2A4A"/>
-                          </a:solidFill>
-                          <a:latin typeface="Segoe UI"/>
-                        </a:rPr>
-                        <a:t>1. Funcional</a:t>
-                      </a:r>
-                    </a:p>
-                  </a:txBody>
-                  <a:tcPr>
-                    <a:solidFill>
-                      <a:srgbClr val="F2F4F7"/>
-                    </a:solidFill>
-                  </a:tcPr>
-                </a:tc>
-                <a:tc>
-                  <a:txBody>
-                    <a:bodyPr/>
-                    <a:lstStyle/>
-                    <a:p>
-                      <a:r>
-                        <a:rPr sz="1150" b="0">
-                          <a:solidFill>
-                            <a:srgbClr val="0F2A4A"/>
-                          </a:solidFill>
-                          <a:latin typeface="Segoe UI"/>
-                        </a:rPr>
-                        <a:t>original</a:t>
-                      </a:r>
-                    </a:p>
-                  </a:txBody>
-                  <a:tcPr>
-                    <a:solidFill>
-                      <a:srgbClr val="F2F4F7"/>
-                    </a:solidFill>
-                  </a:tcPr>
-                </a:tc>
-                <a:tc>
-                  <a:txBody>
-                    <a:bodyPr/>
-                    <a:lstStyle/>
-                    <a:p>
-                      <a:r>
-                        <a:rPr sz="1150" b="0">
-                          <a:solidFill>
-                            <a:srgbClr val="0F2A4A"/>
-                          </a:solidFill>
-                          <a:latin typeface="Segoe UI"/>
-                        </a:rPr>
-                        <a:t>47</a:t>
-                      </a:r>
-                    </a:p>
-                  </a:txBody>
-                  <a:tcPr>
-                    <a:solidFill>
-                      <a:srgbClr val="F2F4F7"/>
-                    </a:solidFill>
-                  </a:tcPr>
-                </a:tc>
-                <a:tc>
-                  <a:txBody>
-                    <a:bodyPr/>
-                    <a:lstStyle/>
-                    <a:p>
-                      <a:r>
-                        <a:rPr sz="1150" b="0">
-                          <a:solidFill>
-                            <a:srgbClr val="0F2A4A"/>
-                          </a:solidFill>
-                          <a:latin typeface="Segoe UI"/>
-                        </a:rPr>
-                        <a:t>90,3%</a:t>
-                      </a:r>
-                    </a:p>
-                  </a:txBody>
-                  <a:tcPr>
-                    <a:solidFill>
-                      <a:srgbClr val="F2F4F7"/>
-                    </a:solidFill>
-                  </a:tcPr>
-                </a:tc>
-                <a:tc>
-                  <a:txBody>
-                    <a:bodyPr/>
-                    <a:lstStyle/>
-                    <a:p>
-                      <a:r>
-                        <a:rPr sz="1150" b="0">
-                          <a:solidFill>
-                            <a:srgbClr val="0F2A4A"/>
-                          </a:solidFill>
-                          <a:latin typeface="Segoe UI"/>
-                        </a:rPr>
-                        <a:t>83,3%</a:t>
-                      </a:r>
-                    </a:p>
-                  </a:txBody>
-                  <a:tcPr>
-                    <a:solidFill>
-                      <a:srgbClr val="F2F4F7"/>
-                    </a:solidFill>
-                  </a:tcPr>
-                </a:tc>
-                <a:tc>
-                  <a:txBody>
-                    <a:bodyPr/>
-                    <a:lstStyle/>
-                    <a:p>
-                      <a:r>
-                        <a:rPr sz="1150" b="0">
-                          <a:solidFill>
-                            <a:srgbClr val="0F2A4A"/>
-                          </a:solidFill>
-                          <a:latin typeface="Segoe UI"/>
-                        </a:rPr>
-                        <a:t>—</a:t>
-                      </a:r>
-                    </a:p>
-                  </a:txBody>
-                  <a:tcPr>
-                    <a:solidFill>
-                      <a:srgbClr val="F2F4F7"/>
-                    </a:solidFill>
-                  </a:tcPr>
-                </a:tc>
-              </a:tr>
-              <a:tr h="347472">
-                <a:tc>
-                  <a:txBody>
-                    <a:bodyPr/>
-                    <a:lstStyle/>
-                    <a:p>
-                      <a:r>
-                        <a:rPr sz="1150" b="0">
-                          <a:solidFill>
-                            <a:srgbClr val="0F2A4A"/>
-                          </a:solidFill>
-                          <a:latin typeface="Segoe UI"/>
-                        </a:rPr>
-                        <a:t>2. Estrutural</a:t>
-                      </a:r>
-                    </a:p>
-                  </a:txBody>
-                  <a:tcPr>
-                    <a:solidFill>
-                      <a:srgbClr val="FFFFFF"/>
-                    </a:solidFill>
-                  </a:tcPr>
-                </a:tc>
-                <a:tc>
-                  <a:txBody>
-                    <a:bodyPr/>
-                    <a:lstStyle/>
-                    <a:p>
-                      <a:r>
-                        <a:rPr sz="1150" b="0">
-                          <a:solidFill>
-                            <a:srgbClr val="0F2A4A"/>
-                          </a:solidFill>
-                          <a:latin typeface="Segoe UI"/>
-                        </a:rPr>
-                        <a:t>original</a:t>
-                      </a:r>
-                    </a:p>
-                  </a:txBody>
-                  <a:tcPr>
-                    <a:solidFill>
-                      <a:srgbClr val="FFFFFF"/>
-                    </a:solidFill>
-                  </a:tcPr>
-                </a:tc>
-                <a:tc>
-                  <a:txBody>
-                    <a:bodyPr/>
-                    <a:lstStyle/>
-                    <a:p>
-                      <a:r>
-                        <a:rPr sz="1150" b="0">
-                          <a:solidFill>
-                            <a:srgbClr val="0F2A4A"/>
-                          </a:solidFill>
-                          <a:latin typeface="Segoe UI"/>
-                        </a:rPr>
-                        <a:t>54</a:t>
-                      </a:r>
-                    </a:p>
-                  </a:txBody>
-                  <a:tcPr>
-                    <a:solidFill>
-                      <a:srgbClr val="FFFFFF"/>
-                    </a:solidFill>
-                  </a:tcPr>
-                </a:tc>
-                <a:tc>
-                  <a:txBody>
-                    <a:bodyPr/>
-                    <a:lstStyle/>
-                    <a:p>
-                      <a:r>
-                        <a:rPr sz="1150" b="0">
-                          <a:solidFill>
-                            <a:srgbClr val="0F2A4A"/>
-                          </a:solidFill>
-                          <a:latin typeface="Segoe UI"/>
-                        </a:rPr>
-                        <a:t>100,0%</a:t>
-                      </a:r>
-                    </a:p>
-                  </a:txBody>
-                  <a:tcPr>
-                    <a:solidFill>
-                      <a:srgbClr val="FFFFFF"/>
-                    </a:solidFill>
-                  </a:tcPr>
-                </a:tc>
-                <a:tc>
-                  <a:txBody>
-                    <a:bodyPr/>
-                    <a:lstStyle/>
-                    <a:p>
-                      <a:r>
-                        <a:rPr sz="1150" b="0">
-                          <a:solidFill>
-                            <a:srgbClr val="0F2A4A"/>
-                          </a:solidFill>
-                          <a:latin typeface="Segoe UI"/>
-                        </a:rPr>
-                        <a:t>98,1%</a:t>
-                      </a:r>
-                    </a:p>
-                  </a:txBody>
-                  <a:tcPr>
-                    <a:solidFill>
-                      <a:srgbClr val="FFFFFF"/>
-                    </a:solidFill>
-                  </a:tcPr>
-                </a:tc>
-                <a:tc>
-                  <a:txBody>
-                    <a:bodyPr/>
-                    <a:lstStyle/>
-                    <a:p>
-                      <a:r>
-                        <a:rPr sz="1150" b="0">
-                          <a:solidFill>
-                            <a:srgbClr val="0F2A4A"/>
-                          </a:solidFill>
-                          <a:latin typeface="Segoe UI"/>
-                        </a:rPr>
-                        <a:t>—</a:t>
-                      </a:r>
-                    </a:p>
-                  </a:txBody>
-                  <a:tcPr>
-                    <a:solidFill>
-                      <a:srgbClr val="FFFFFF"/>
-                    </a:solidFill>
-                  </a:tcPr>
-                </a:tc>
-              </a:tr>
-              <a:tr h="347472">
-                <a:tc>
-                  <a:txBody>
-                    <a:bodyPr/>
-                    <a:lstStyle/>
-                    <a:p>
-                      <a:r>
-                        <a:rPr sz="1150" b="0">
-                          <a:solidFill>
-                            <a:srgbClr val="0F2A4A"/>
-                          </a:solidFill>
-                          <a:latin typeface="Segoe UI"/>
-                        </a:rPr>
-                        <a:t>3. Correção</a:t>
-                      </a:r>
-                    </a:p>
-                  </a:txBody>
-                  <a:tcPr>
-                    <a:solidFill>
-                      <a:srgbClr val="F2F4F7"/>
-                    </a:solidFill>
-                  </a:tcPr>
-                </a:tc>
-                <a:tc>
-                  <a:txBody>
-                    <a:bodyPr/>
-                    <a:lstStyle/>
-                    <a:p>
-                      <a:r>
-                        <a:rPr sz="1150" b="0">
-                          <a:solidFill>
-                            <a:srgbClr val="0F2A4A"/>
-                          </a:solidFill>
-                          <a:latin typeface="Segoe UI"/>
-                        </a:rPr>
-                        <a:t>corrigida</a:t>
-                      </a:r>
-                    </a:p>
-                  </a:txBody>
-                  <a:tcPr>
-                    <a:solidFill>
-                      <a:srgbClr val="F2F4F7"/>
-                    </a:solidFill>
-                  </a:tcPr>
-                </a:tc>
-                <a:tc>
-                  <a:txBody>
-                    <a:bodyPr/>
-                    <a:lstStyle/>
-                    <a:p>
-                      <a:r>
-                        <a:rPr sz="1150" b="0">
-                          <a:solidFill>
-                            <a:srgbClr val="0F2A4A"/>
-                          </a:solidFill>
-                          <a:latin typeface="Segoe UI"/>
-                        </a:rPr>
-                        <a:t>54</a:t>
-                      </a:r>
-                    </a:p>
-                  </a:txBody>
-                  <a:tcPr>
-                    <a:solidFill>
-                      <a:srgbClr val="F2F4F7"/>
-                    </a:solidFill>
-                  </a:tcPr>
-                </a:tc>
-                <a:tc>
-                  <a:txBody>
-                    <a:bodyPr/>
-                    <a:lstStyle/>
-                    <a:p>
-                      <a:r>
-                        <a:rPr sz="1150" b="0">
-                          <a:solidFill>
-                            <a:srgbClr val="0F2A4A"/>
-                          </a:solidFill>
-                          <a:latin typeface="Segoe UI"/>
-                        </a:rPr>
-                        <a:t>100,0%</a:t>
-                      </a:r>
-                    </a:p>
-                  </a:txBody>
-                  <a:tcPr>
-                    <a:solidFill>
-                      <a:srgbClr val="F2F4F7"/>
-                    </a:solidFill>
-                  </a:tcPr>
-                </a:tc>
-                <a:tc>
-                  <a:txBody>
-                    <a:bodyPr/>
-                    <a:lstStyle/>
-                    <a:p>
-                      <a:r>
-                        <a:rPr sz="1150" b="0">
-                          <a:solidFill>
-                            <a:srgbClr val="0F2A4A"/>
-                          </a:solidFill>
-                          <a:latin typeface="Segoe UI"/>
-                        </a:rPr>
-                        <a:t>100,0%</a:t>
-                      </a:r>
-                    </a:p>
-                  </a:txBody>
-                  <a:tcPr>
-                    <a:solidFill>
-                      <a:srgbClr val="F2F4F7"/>
-                    </a:solidFill>
-                  </a:tcPr>
-                </a:tc>
-                <a:tc>
-                  <a:txBody>
-                    <a:bodyPr/>
-                    <a:lstStyle/>
-                    <a:p>
-                      <a:r>
-                        <a:rPr sz="1150" b="0">
-                          <a:solidFill>
-                            <a:srgbClr val="0F2A4A"/>
-                          </a:solidFill>
-                          <a:latin typeface="Segoe UI"/>
-                        </a:rPr>
-                        <a:t>93,6%</a:t>
-                      </a:r>
-                    </a:p>
-                  </a:txBody>
-                  <a:tcPr>
-                    <a:solidFill>
-                      <a:srgbClr val="F2F4F7"/>
-                    </a:solidFill>
-                  </a:tcPr>
-                </a:tc>
-              </a:tr>
-              <a:tr h="347472">
-                <a:tc>
-                  <a:txBody>
-                    <a:bodyPr/>
-                    <a:lstStyle/>
-                    <a:p>
-                      <a:r>
-                        <a:rPr sz="1150" b="0">
-                          <a:solidFill>
-                            <a:srgbClr val="0F2A4A"/>
-                          </a:solidFill>
-                          <a:latin typeface="Segoe UI"/>
-                        </a:rPr>
-                        <a:t>4. Mutação</a:t>
-                      </a:r>
-                    </a:p>
-                  </a:txBody>
-                  <a:tcPr>
-                    <a:solidFill>
-                      <a:srgbClr val="FFFFFF"/>
-                    </a:solidFill>
-                  </a:tcPr>
-                </a:tc>
-                <a:tc>
-                  <a:txBody>
-                    <a:bodyPr/>
-                    <a:lstStyle/>
-                    <a:p>
-                      <a:r>
-                        <a:rPr sz="1150" b="0">
-                          <a:solidFill>
-                            <a:srgbClr val="0F2A4A"/>
-                          </a:solidFill>
-                          <a:latin typeface="Segoe UI"/>
-                        </a:rPr>
-                        <a:t>corrigida</a:t>
-                      </a:r>
-                    </a:p>
-                  </a:txBody>
-                  <a:tcPr>
-                    <a:solidFill>
-                      <a:srgbClr val="FFFFFF"/>
-                    </a:solidFill>
-                  </a:tcPr>
-                </a:tc>
-                <a:tc>
-                  <a:txBody>
-                    <a:bodyPr/>
-                    <a:lstStyle/>
-                    <a:p>
-                      <a:r>
-                        <a:rPr sz="1150" b="0">
-                          <a:solidFill>
-                            <a:srgbClr val="0F2A4A"/>
-                          </a:solidFill>
-                          <a:latin typeface="Segoe UI"/>
-                        </a:rPr>
-                        <a:t>59</a:t>
-                      </a:r>
-                    </a:p>
-                  </a:txBody>
-                  <a:tcPr>
-                    <a:solidFill>
-                      <a:srgbClr val="FFFFFF"/>
-                    </a:solidFill>
-                  </a:tcPr>
-                </a:tc>
-                <a:tc>
-                  <a:txBody>
-                    <a:bodyPr/>
-                    <a:lstStyle/>
-                    <a:p>
-                      <a:r>
-                        <a:rPr sz="1150" b="0">
-                          <a:solidFill>
-                            <a:srgbClr val="0F2A4A"/>
-                          </a:solidFill>
-                          <a:latin typeface="Segoe UI"/>
-                        </a:rPr>
-                        <a:t>100,0%</a:t>
-                      </a:r>
-                    </a:p>
-                  </a:txBody>
-                  <a:tcPr>
-                    <a:solidFill>
-                      <a:srgbClr val="FFFFFF"/>
-                    </a:solidFill>
-                  </a:tcPr>
-                </a:tc>
-                <a:tc>
-                  <a:txBody>
-                    <a:bodyPr/>
-                    <a:lstStyle/>
-                    <a:p>
-                      <a:r>
-                        <a:rPr sz="1150" b="0">
-                          <a:solidFill>
-                            <a:srgbClr val="0F2A4A"/>
-                          </a:solidFill>
-                          <a:latin typeface="Segoe UI"/>
-                        </a:rPr>
-                        <a:t>100,0%</a:t>
-                      </a:r>
-                    </a:p>
-                  </a:txBody>
-                  <a:tcPr>
-                    <a:solidFill>
-                      <a:srgbClr val="FFFFFF"/>
-                    </a:solidFill>
-                  </a:tcPr>
-                </a:tc>
-                <a:tc>
-                  <a:txBody>
-                    <a:bodyPr/>
-                    <a:lstStyle/>
-                    <a:p>
-                      <a:r>
-                        <a:rPr sz="1150" b="0">
-                          <a:solidFill>
-                            <a:srgbClr val="0F2A4A"/>
-                          </a:solidFill>
-                          <a:latin typeface="Segoe UI"/>
-                        </a:rPr>
-                        <a:t>96,1%</a:t>
-                      </a:r>
-                    </a:p>
-                  </a:txBody>
-                  <a:tcPr>
-                    <a:solidFill>
-                      <a:srgbClr val="FFFFFF"/>
-                    </a:solidFill>
-                  </a:tcPr>
-                </a:tc>
-              </a:tr>
-            </a:tbl>
-          </a:graphicData>
-        </a:graphic>
-      </p:graphicFrame>
-      <p:sp>
-        <p:nvSpPr>
-          <p:cNvPr id="6" name="Rectangle 5"/>
-          <p:cNvSpPr/>
-          <p:nvPr/>
-        </p:nvSpPr>
-        <p:spPr>
-          <a:xfrm>
-            <a:off x="411480" y="3246120"/>
-            <a:ext cx="6675120" cy="3291840"/>
+            <a:off x="411480" y="6510528"/>
+            <a:ext cx="11338560" cy="274320"/>
           </a:xfrm>
           <a:prstGeom prst="rect">
             <a:avLst/>
@@ -5100,243 +5903,440 @@
           <a:p>
             <a:pPr algn="l">
               <a:spcAft>
-                <a:spcPts val="300"/>
+                <a:spcPts val="200"/>
               </a:spcAft>
             </a:pPr>
             <a:r>
-              <a:rPr sz="1400" b="1">
-                <a:solidFill>
-                  <a:srgbClr val="7A0C2E"/>
-                </a:solidFill>
-                <a:latin typeface="Segoe UI"/>
-              </a:rPr>
-              <a:t>Defeitos mais graves (todos com teste automatizado)</a:t>
-            </a:r>
-          </a:p>
-          <a:p>
-            <a:pPr algn="l">
-              <a:spcAft>
-                <a:spcPts val="500"/>
-              </a:spcAft>
-            </a:pPr>
-            <a:r>
-              <a:rPr sz="1150" b="0">
-                <a:solidFill>
-                  <a:srgbClr val="0F2A4A"/>
-                </a:solidFill>
-                <a:latin typeface="Segoe UI"/>
-              </a:rPr>
-              <a:t>• </a:t>
-            </a:r>
-            <a:r>
-              <a:rPr sz="1150" b="1">
-                <a:solidFill>
-                  <a:srgbClr val="0F2A4A"/>
-                </a:solidFill>
-                <a:latin typeface="Segoe UI"/>
-              </a:rPr>
-              <a:t>DEF-01</a:t>
-            </a:r>
-            <a:r>
-              <a:rPr sz="1150" b="0">
-                <a:solidFill>
-                  <a:srgbClr val="0F2A4A"/>
-                </a:solidFill>
-                <a:latin typeface="Segoe UI"/>
-              </a:rPr>
-              <a:t> predicado de conflito é uma </a:t>
-            </a:r>
-            <a:r>
-              <a:rPr sz="1150" b="1">
-                <a:solidFill>
-                  <a:srgbClr val="0F2A4A"/>
-                </a:solidFill>
-                <a:latin typeface="Segoe UI"/>
-              </a:rPr>
-              <a:t>tautologia</a:t>
-            </a:r>
-            <a:r>
-              <a:rPr sz="1150" b="0">
-                <a:solidFill>
-                  <a:srgbClr val="0F2A4A"/>
-                </a:solidFill>
-                <a:latin typeface="Segoe UI"/>
-              </a:rPr>
-              <a:t>: depois da 1ª reserva, o quarto nunca mais fica livre</a:t>
-            </a:r>
-          </a:p>
-          <a:p>
-            <a:pPr algn="l">
-              <a:spcAft>
-                <a:spcPts val="500"/>
-              </a:spcAft>
-            </a:pPr>
-            <a:r>
-              <a:rPr sz="1150" b="0">
-                <a:solidFill>
-                  <a:srgbClr val="0F2A4A"/>
-                </a:solidFill>
-                <a:latin typeface="Segoe UI"/>
-              </a:rPr>
-              <a:t>• </a:t>
-            </a:r>
-            <a:r>
-              <a:rPr sz="1150" b="1">
-                <a:solidFill>
-                  <a:srgbClr val="0F2A4A"/>
-                </a:solidFill>
-                <a:latin typeface="Segoe UI"/>
-              </a:rPr>
-              <a:t>DEF-08/10</a:t>
-            </a:r>
-            <a:r>
-              <a:rPr sz="1150" b="0">
-                <a:solidFill>
-                  <a:srgbClr val="0F2A4A"/>
-                </a:solidFill>
-                <a:latin typeface="Segoe UI"/>
-              </a:rPr>
-              <a:t> qualquer usuário cancela reserva alheia; </a:t>
-            </a:r>
-            <a:r>
-              <a:rPr sz="1150" b="1">
-                <a:solidFill>
-                  <a:srgbClr val="0F2A4A"/>
-                </a:solidFill>
-                <a:latin typeface="Segoe UI"/>
-              </a:rPr>
-              <a:t>GET</a:t>
-            </a:r>
-            <a:r>
-              <a:rPr sz="1150" b="0">
-                <a:solidFill>
-                  <a:srgbClr val="0F2A4A"/>
-                </a:solidFill>
-                <a:latin typeface="Segoe UI"/>
-              </a:rPr>
-              <a:t> apaga dados</a:t>
-            </a:r>
-          </a:p>
-          <a:p>
-            <a:pPr algn="l">
-              <a:spcAft>
-                <a:spcPts val="500"/>
-              </a:spcAft>
-            </a:pPr>
-            <a:r>
-              <a:rPr sz="1150" b="0">
-                <a:solidFill>
-                  <a:srgbClr val="0F2A4A"/>
-                </a:solidFill>
-                <a:latin typeface="Segoe UI"/>
-              </a:rPr>
-              <a:t>• </a:t>
-            </a:r>
-            <a:r>
-              <a:rPr sz="1150" b="1">
-                <a:solidFill>
-                  <a:srgbClr val="0F2A4A"/>
-                </a:solidFill>
-                <a:latin typeface="Segoe UI"/>
-              </a:rPr>
-              <a:t>DEF-15</a:t>
-            </a:r>
-            <a:r>
-              <a:rPr sz="1150" b="0">
-                <a:solidFill>
-                  <a:srgbClr val="0F2A4A"/>
-                </a:solidFill>
-                <a:latin typeface="Segoe UI"/>
-              </a:rPr>
-              <a:t> produto cartesiano reservas × vínculos, </a:t>
-            </a:r>
-            <a:r>
-              <a:rPr sz="1150" b="1">
-                <a:solidFill>
-                  <a:srgbClr val="0F2A4A"/>
-                </a:solidFill>
-                <a:latin typeface="Segoe UI"/>
-              </a:rPr>
-              <a:t>mascarado</a:t>
-            </a:r>
-            <a:r>
-              <a:rPr sz="1150" b="0">
-                <a:solidFill>
-                  <a:srgbClr val="0F2A4A"/>
-                </a:solidFill>
-                <a:latin typeface="Segoe UI"/>
-              </a:rPr>
-              <a:t> pelo DEF-01</a:t>
-            </a:r>
-          </a:p>
-          <a:p>
-            <a:pPr algn="l">
-              <a:spcAft>
-                <a:spcPts val="500"/>
-              </a:spcAft>
-            </a:pPr>
-            <a:r>
-              <a:rPr sz="1150" b="0">
-                <a:solidFill>
-                  <a:srgbClr val="0F2A4A"/>
-                </a:solidFill>
-                <a:latin typeface="Segoe UI"/>
-              </a:rPr>
-              <a:t>• </a:t>
-            </a:r>
-            <a:r>
-              <a:rPr sz="1150" b="1">
-                <a:solidFill>
-                  <a:srgbClr val="0F2A4A"/>
-                </a:solidFill>
-                <a:latin typeface="Segoe UI"/>
-              </a:rPr>
-              <a:t>DEF-16/17</a:t>
-            </a:r>
-            <a:r>
-              <a:rPr sz="1150" b="0">
-                <a:solidFill>
-                  <a:srgbClr val="0F2A4A"/>
-                </a:solidFill>
-                <a:latin typeface="Segoe UI"/>
-              </a:rPr>
-              <a:t> filtro em variável global vaza entre sessões; remove() no laço pula quartos</a:t>
-            </a:r>
-          </a:p>
-          <a:p>
-            <a:pPr algn="l">
-              <a:spcAft>
-                <a:spcPts val="500"/>
-              </a:spcAft>
-            </a:pPr>
-            <a:r>
-              <a:rPr sz="1150" b="0">
-                <a:solidFill>
-                  <a:srgbClr val="0F2A4A"/>
-                </a:solidFill>
-                <a:latin typeface="Segoe UI"/>
-              </a:rPr>
-              <a:t>• Outros: entrada hoje recusada, 0 hóspedes aceito, quarto repetido/inexistente, KeyError/500 sem sessão</a:t>
-            </a:r>
-          </a:p>
-        </p:txBody>
-      </p:sp>
-      <p:sp>
-        <p:nvSpPr>
-          <p:cNvPr id="7" name="Rectangle 6"/>
+              <a:rPr sz="900" b="0">
+                <a:solidFill>
+                  <a:srgbClr val="5B6472"/>
+                </a:solidFill>
+                <a:latin typeface="Segoe UI"/>
+              </a:rPr>
+              <a:t>Gabriel Felipe Jess Meira · Verificação e Validação · github.com/gabrielfjm/Hotel_Management_System</a:t>
+            </a:r>
+          </a:p>
+        </p:txBody>
+      </p:sp>
+      <p:sp>
+        <p:nvSpPr>
+          <p:cNvPr id="8" name="Rectangle 7"/>
           <p:cNvSpPr/>
           <p:nvPr/>
         </p:nvSpPr>
         <p:spPr>
           <a:xfrm>
-            <a:off x="7315200" y="1371600"/>
-            <a:ext cx="4480560" cy="4434840"/>
+            <a:off x="411480" y="1188720"/>
+            <a:ext cx="1737360" cy="868680"/>
           </a:xfrm>
           <a:prstGeom prst="rect">
             <a:avLst/>
           </a:prstGeom>
           <a:solidFill>
-            <a:srgbClr val="F2F4F7"/>
+            <a:srgbClr val="F3F5F9"/>
+          </a:solidFill>
+          <a:ln w="9525">
+            <a:solidFill>
+              <a:srgbClr val="D7DDE6"/>
+            </a:solidFill>
+          </a:ln>
+          <a:effectLst/>
+        </p:spPr>
+        <p:style>
+          <a:lnRef idx="1">
+            <a:schemeClr val="accent1"/>
+          </a:lnRef>
+          <a:fillRef idx="3">
+            <a:schemeClr val="accent1"/>
+          </a:fillRef>
+          <a:effectRef idx="2">
+            <a:schemeClr val="accent1"/>
+          </a:effectRef>
+          <a:fontRef idx="minor">
+            <a:schemeClr val="lt1"/>
+          </a:fontRef>
+        </p:style>
+        <p:txBody>
+          <a:bodyPr rtlCol="0" anchor="ctr" wrap="square" lIns="109728" rIns="109728" tIns="54864" bIns="54864"/>
+          <a:lstStyle/>
+          <a:p>
+            <a:pPr algn="ctr">
+              <a:spcAft>
+                <a:spcPts val="0"/>
+              </a:spcAft>
+            </a:pPr>
+            <a:r>
+              <a:rPr sz="2400" b="1">
+                <a:solidFill>
+                  <a:srgbClr val="1F5FA8"/>
+                </a:solidFill>
+                <a:latin typeface="Segoe UI"/>
+              </a:rPr>
+              <a:t>64</a:t>
+            </a:r>
+          </a:p>
+          <a:p>
+            <a:pPr algn="ctr">
+              <a:spcAft>
+                <a:spcPts val="0"/>
+              </a:spcAft>
+            </a:pPr>
+            <a:r>
+              <a:rPr sz="950" b="0">
+                <a:solidFill>
+                  <a:srgbClr val="5B6472"/>
+                </a:solidFill>
+                <a:latin typeface="Segoe UI"/>
+              </a:rPr>
+              <a:t>casos de teste</a:t>
+            </a:r>
+          </a:p>
+        </p:txBody>
+      </p:sp>
+      <p:sp>
+        <p:nvSpPr>
+          <p:cNvPr id="9" name="Rectangle 8"/>
+          <p:cNvSpPr/>
+          <p:nvPr/>
+        </p:nvSpPr>
+        <p:spPr>
+          <a:xfrm>
+            <a:off x="2240280" y="1188720"/>
+            <a:ext cx="1737360" cy="868680"/>
+          </a:xfrm>
+          <a:prstGeom prst="rect">
+            <a:avLst/>
+          </a:prstGeom>
+          <a:solidFill>
+            <a:srgbClr val="F3F5F9"/>
+          </a:solidFill>
+          <a:ln w="9525">
+            <a:solidFill>
+              <a:srgbClr val="D7DDE6"/>
+            </a:solidFill>
+          </a:ln>
+          <a:effectLst/>
+        </p:spPr>
+        <p:style>
+          <a:lnRef idx="1">
+            <a:schemeClr val="accent1"/>
+          </a:lnRef>
+          <a:fillRef idx="3">
+            <a:schemeClr val="accent1"/>
+          </a:fillRef>
+          <a:effectRef idx="2">
+            <a:schemeClr val="accent1"/>
+          </a:effectRef>
+          <a:fontRef idx="minor">
+            <a:schemeClr val="lt1"/>
+          </a:fontRef>
+        </p:style>
+        <p:txBody>
+          <a:bodyPr rtlCol="0" anchor="ctr" wrap="square" lIns="109728" rIns="109728" tIns="54864" bIns="54864"/>
+          <a:lstStyle/>
+          <a:p>
+            <a:pPr algn="ctr">
+              <a:spcAft>
+                <a:spcPts val="0"/>
+              </a:spcAft>
+            </a:pPr>
+            <a:r>
+              <a:rPr sz="2400" b="1">
+                <a:solidFill>
+                  <a:srgbClr val="8A1038"/>
+                </a:solidFill>
+                <a:latin typeface="Segoe UI"/>
+              </a:rPr>
+              <a:t>19</a:t>
+            </a:r>
+          </a:p>
+          <a:p>
+            <a:pPr algn="ctr">
+              <a:spcAft>
+                <a:spcPts val="0"/>
+              </a:spcAft>
+            </a:pPr>
+            <a:r>
+              <a:rPr sz="950" b="0">
+                <a:solidFill>
+                  <a:srgbClr val="5B6472"/>
+                </a:solidFill>
+                <a:latin typeface="Segoe UI"/>
+              </a:rPr>
+              <a:t>defeitos corrigidos</a:t>
+            </a:r>
+          </a:p>
+        </p:txBody>
+      </p:sp>
+      <p:sp>
+        <p:nvSpPr>
+          <p:cNvPr id="10" name="Rectangle 9"/>
+          <p:cNvSpPr/>
+          <p:nvPr/>
+        </p:nvSpPr>
+        <p:spPr>
+          <a:xfrm>
+            <a:off x="4069080" y="1188720"/>
+            <a:ext cx="1737360" cy="868680"/>
+          </a:xfrm>
+          <a:prstGeom prst="rect">
+            <a:avLst/>
+          </a:prstGeom>
+          <a:solidFill>
+            <a:srgbClr val="F3F5F9"/>
+          </a:solidFill>
+          <a:ln w="9525">
+            <a:solidFill>
+              <a:srgbClr val="D7DDE6"/>
+            </a:solidFill>
+          </a:ln>
+          <a:effectLst/>
+        </p:spPr>
+        <p:style>
+          <a:lnRef idx="1">
+            <a:schemeClr val="accent1"/>
+          </a:lnRef>
+          <a:fillRef idx="3">
+            <a:schemeClr val="accent1"/>
+          </a:fillRef>
+          <a:effectRef idx="2">
+            <a:schemeClr val="accent1"/>
+          </a:effectRef>
+          <a:fontRef idx="minor">
+            <a:schemeClr val="lt1"/>
+          </a:fontRef>
+        </p:style>
+        <p:txBody>
+          <a:bodyPr rtlCol="0" anchor="ctr" wrap="square" lIns="109728" rIns="109728" tIns="54864" bIns="54864"/>
+          <a:lstStyle/>
+          <a:p>
+            <a:pPr algn="ctr">
+              <a:spcAft>
+                <a:spcPts val="0"/>
+              </a:spcAft>
+            </a:pPr>
+            <a:r>
+              <a:rPr sz="2400" b="1">
+                <a:solidFill>
+                  <a:srgbClr val="1E8E5A"/>
+                </a:solidFill>
+                <a:latin typeface="Segoe UI"/>
+              </a:rPr>
+              <a:t>100%</a:t>
+            </a:r>
+          </a:p>
+          <a:p>
+            <a:pPr algn="ctr">
+              <a:spcAft>
+                <a:spcPts val="0"/>
+              </a:spcAft>
+            </a:pPr>
+            <a:r>
+              <a:rPr sz="950" b="0">
+                <a:solidFill>
+                  <a:srgbClr val="5B6472"/>
+                </a:solidFill>
+                <a:latin typeface="Segoe UI"/>
+              </a:rPr>
+              <a:t>dos desvios cobertos</a:t>
+            </a:r>
+          </a:p>
+        </p:txBody>
+      </p:sp>
+      <p:sp>
+        <p:nvSpPr>
+          <p:cNvPr id="11" name="Rectangle 10"/>
+          <p:cNvSpPr/>
+          <p:nvPr/>
+        </p:nvSpPr>
+        <p:spPr>
+          <a:xfrm>
+            <a:off x="5897880" y="1188720"/>
+            <a:ext cx="1737360" cy="868680"/>
+          </a:xfrm>
+          <a:prstGeom prst="rect">
+            <a:avLst/>
+          </a:prstGeom>
+          <a:solidFill>
+            <a:srgbClr val="F3F5F9"/>
+          </a:solidFill>
+          <a:ln w="9525">
+            <a:solidFill>
+              <a:srgbClr val="D7DDE6"/>
+            </a:solidFill>
+          </a:ln>
+          <a:effectLst/>
+        </p:spPr>
+        <p:style>
+          <a:lnRef idx="1">
+            <a:schemeClr val="accent1"/>
+          </a:lnRef>
+          <a:fillRef idx="3">
+            <a:schemeClr val="accent1"/>
+          </a:fillRef>
+          <a:effectRef idx="2">
+            <a:schemeClr val="accent1"/>
+          </a:effectRef>
+          <a:fontRef idx="minor">
+            <a:schemeClr val="lt1"/>
+          </a:fontRef>
+        </p:style>
+        <p:txBody>
+          <a:bodyPr rtlCol="0" anchor="ctr" wrap="square" lIns="109728" rIns="109728" tIns="54864" bIns="54864"/>
+          <a:lstStyle/>
+          <a:p>
+            <a:pPr algn="ctr">
+              <a:spcAft>
+                <a:spcPts val="0"/>
+              </a:spcAft>
+            </a:pPr>
+            <a:r>
+              <a:rPr sz="2400" b="1">
+                <a:solidFill>
+                  <a:srgbClr val="D97A1E"/>
+                </a:solidFill>
+                <a:latin typeface="Segoe UI"/>
+              </a:rPr>
+              <a:t>96,1%</a:t>
+            </a:r>
+          </a:p>
+          <a:p>
+            <a:pPr algn="ctr">
+              <a:spcAft>
+                <a:spcPts val="0"/>
+              </a:spcAft>
+            </a:pPr>
+            <a:r>
+              <a:rPr sz="950" b="0">
+                <a:solidFill>
+                  <a:srgbClr val="5B6472"/>
+                </a:solidFill>
+                <a:latin typeface="Segoe UI"/>
+              </a:rPr>
+              <a:t>escore de mutação</a:t>
+            </a:r>
+          </a:p>
+        </p:txBody>
+      </p:sp>
+      <p:graphicFrame>
+        <p:nvGraphicFramePr>
+          <p:cNvPr id="12" name="Chart 11"/>
+          <p:cNvGraphicFramePr>
+            <a:graphicFrameLocks noGrp="1"/>
+          </p:cNvGraphicFramePr>
+          <p:nvPr/>
+        </p:nvGraphicFramePr>
+        <p:xfrm>
+          <a:off x="411480" y="2176272"/>
+          <a:ext cx="7223760" cy="2395728"/>
+        </p:xfrm>
+        <a:graphic>
+          <a:graphicData uri="http://schemas.openxmlformats.org/drawingml/2006/chart">
+            <c:chart xmlns:c="http://schemas.openxmlformats.org/drawingml/2006/chart" r:id="rId2"/>
+          </a:graphicData>
+        </a:graphic>
+      </p:graphicFrame>
+      <p:sp>
+        <p:nvSpPr>
+          <p:cNvPr id="13" name="Rectangle 12"/>
+          <p:cNvSpPr/>
+          <p:nvPr/>
+        </p:nvSpPr>
+        <p:spPr>
+          <a:xfrm>
+            <a:off x="7863840" y="1170432"/>
+            <a:ext cx="3931920" cy="292608"/>
+          </a:xfrm>
+          <a:prstGeom prst="rect">
+            <a:avLst/>
+          </a:prstGeom>
+          <a:noFill/>
+          <a:ln>
+            <a:noFill/>
+          </a:ln>
+          <a:effectLst/>
+        </p:spPr>
+        <p:style>
+          <a:lnRef idx="1">
+            <a:schemeClr val="accent1"/>
+          </a:lnRef>
+          <a:fillRef idx="3">
+            <a:schemeClr val="accent1"/>
+          </a:fillRef>
+          <a:effectRef idx="2">
+            <a:schemeClr val="accent1"/>
+          </a:effectRef>
+          <a:fontRef idx="minor">
+            <a:schemeClr val="lt1"/>
+          </a:fontRef>
+        </p:style>
+        <p:txBody>
+          <a:bodyPr rtlCol="0" anchor="t" wrap="square" lIns="109728" rIns="109728" tIns="54864" bIns="54864"/>
+          <a:lstStyle/>
+          <a:p>
+            <a:pPr algn="l">
+              <a:spcAft>
+                <a:spcPts val="200"/>
+              </a:spcAft>
+            </a:pPr>
+            <a:r>
+              <a:rPr sz="1050" b="1">
+                <a:solidFill>
+                  <a:srgbClr val="8A1038"/>
+                </a:solidFill>
+                <a:latin typeface="Segoe UI"/>
+              </a:rPr>
+              <a:t>DEF-01 · reservar o 101 fora do período ocupado</a:t>
+            </a:r>
+          </a:p>
+        </p:txBody>
+      </p:sp>
+      <p:pic>
+        <p:nvPicPr>
+          <p:cNvPr id="14" name="Picture 13" descr="original-07-reserva-resultado.png"/>
+          <p:cNvPicPr>
+            <a:picLocks noChangeAspect="1"/>
+          </p:cNvPicPr>
+          <p:nvPr/>
+        </p:nvPicPr>
+        <p:blipFill>
+          <a:blip r:embed="rId3"/>
+          <a:srcRect b="50000"/>
+          <a:stretch>
+            <a:fillRect/>
+          </a:stretch>
+        </p:blipFill>
+        <p:spPr>
+          <a:xfrm>
+            <a:off x="7863840" y="1481328"/>
+            <a:ext cx="3931920" cy="860107"/>
+          </a:xfrm>
+          <a:prstGeom prst="rect">
+            <a:avLst/>
+          </a:prstGeom>
+          <a:ln w="12700">
+            <a:solidFill>
+              <a:srgbClr val="D7DDE6"/>
+            </a:solidFill>
+          </a:ln>
+        </p:spPr>
+      </p:pic>
+      <p:sp>
+        <p:nvSpPr>
+          <p:cNvPr id="15" name="Rectangle 14"/>
+          <p:cNvSpPr/>
+          <p:nvPr/>
+        </p:nvSpPr>
+        <p:spPr>
+          <a:xfrm>
+            <a:off x="10287000" y="2048827"/>
+            <a:ext cx="1463040" cy="237744"/>
+          </a:xfrm>
+          <a:prstGeom prst="rect">
+            <a:avLst/>
+          </a:prstGeom>
+          <a:solidFill>
+            <a:srgbClr val="8A1038"/>
           </a:solidFill>
           <a:ln>
             <a:noFill/>
@@ -5358,6 +6358,365 @@
           </a:fontRef>
         </p:style>
         <p:txBody>
+          <a:bodyPr rtlCol="0" anchor="ctr" wrap="square" lIns="109728" rIns="109728" tIns="54864" bIns="54864"/>
+          <a:lstStyle/>
+          <a:p>
+            <a:pPr algn="ctr">
+              <a:spcAft>
+                <a:spcPts val="0"/>
+              </a:spcAft>
+            </a:pPr>
+            <a:r>
+              <a:rPr sz="850" b="1">
+                <a:solidFill>
+                  <a:srgbClr val="FFFFFF"/>
+                </a:solidFill>
+                <a:latin typeface="Segoe UI"/>
+              </a:rPr>
+              <a:t>ORIGINAL · recusada</a:t>
+            </a:r>
+          </a:p>
+        </p:txBody>
+      </p:sp>
+      <p:pic>
+        <p:nvPicPr>
+          <p:cNvPr id="16" name="Picture 15" descr="original-03-quartos.png"/>
+          <p:cNvPicPr>
+            <a:picLocks noChangeAspect="1"/>
+          </p:cNvPicPr>
+          <p:nvPr/>
+        </p:nvPicPr>
+        <p:blipFill>
+          <a:blip r:embed="rId4"/>
+          <a:srcRect b="50000"/>
+          <a:stretch>
+            <a:fillRect/>
+          </a:stretch>
+        </p:blipFill>
+        <p:spPr>
+          <a:xfrm>
+            <a:off x="7863840" y="2414587"/>
+            <a:ext cx="3931920" cy="860107"/>
+          </a:xfrm>
+          <a:prstGeom prst="rect">
+            <a:avLst/>
+          </a:prstGeom>
+          <a:ln w="12700">
+            <a:solidFill>
+              <a:srgbClr val="D7DDE6"/>
+            </a:solidFill>
+          </a:ln>
+        </p:spPr>
+      </p:pic>
+      <p:sp>
+        <p:nvSpPr>
+          <p:cNvPr id="17" name="Rectangle 16"/>
+          <p:cNvSpPr/>
+          <p:nvPr/>
+        </p:nvSpPr>
+        <p:spPr>
+          <a:xfrm>
+            <a:off x="10287000" y="2982086"/>
+            <a:ext cx="1463040" cy="237744"/>
+          </a:xfrm>
+          <a:prstGeom prst="rect">
+            <a:avLst/>
+          </a:prstGeom>
+          <a:solidFill>
+            <a:srgbClr val="1E8E5A"/>
+          </a:solidFill>
+          <a:ln>
+            <a:noFill/>
+          </a:ln>
+          <a:effectLst/>
+        </p:spPr>
+        <p:style>
+          <a:lnRef idx="1">
+            <a:schemeClr val="accent1"/>
+          </a:lnRef>
+          <a:fillRef idx="3">
+            <a:schemeClr val="accent1"/>
+          </a:fillRef>
+          <a:effectRef idx="2">
+            <a:schemeClr val="accent1"/>
+          </a:effectRef>
+          <a:fontRef idx="minor">
+            <a:schemeClr val="lt1"/>
+          </a:fontRef>
+        </p:style>
+        <p:txBody>
+          <a:bodyPr rtlCol="0" anchor="ctr" wrap="square" lIns="109728" rIns="109728" tIns="54864" bIns="54864"/>
+          <a:lstStyle/>
+          <a:p>
+            <a:pPr algn="ctr">
+              <a:spcAft>
+                <a:spcPts val="0"/>
+              </a:spcAft>
+            </a:pPr>
+            <a:r>
+              <a:rPr sz="850" b="1">
+                <a:solidFill>
+                  <a:srgbClr val="FFFFFF"/>
+                </a:solidFill>
+                <a:latin typeface="Segoe UI"/>
+              </a:rPr>
+              <a:t>CORRIGIDO · aceita</a:t>
+            </a:r>
+          </a:p>
+        </p:txBody>
+      </p:sp>
+      <p:sp>
+        <p:nvSpPr>
+          <p:cNvPr id="18" name="Rectangle 17"/>
+          <p:cNvSpPr/>
+          <p:nvPr/>
+        </p:nvSpPr>
+        <p:spPr>
+          <a:xfrm>
+            <a:off x="7863840" y="3384422"/>
+            <a:ext cx="3931920" cy="1187577"/>
+          </a:xfrm>
+          <a:prstGeom prst="rect">
+            <a:avLst/>
+          </a:prstGeom>
+          <a:solidFill>
+            <a:srgbClr val="F3F5F9"/>
+          </a:solidFill>
+          <a:ln w="9525">
+            <a:solidFill>
+              <a:srgbClr val="D7DDE6"/>
+            </a:solidFill>
+          </a:ln>
+          <a:effectLst/>
+        </p:spPr>
+        <p:style>
+          <a:lnRef idx="1">
+            <a:schemeClr val="accent1"/>
+          </a:lnRef>
+          <a:fillRef idx="3">
+            <a:schemeClr val="accent1"/>
+          </a:fillRef>
+          <a:effectRef idx="2">
+            <a:schemeClr val="accent1"/>
+          </a:effectRef>
+          <a:fontRef idx="minor">
+            <a:schemeClr val="lt1"/>
+          </a:fontRef>
+        </p:style>
+        <p:txBody>
+          <a:bodyPr rtlCol="0" anchor="t" wrap="square" lIns="109728" rIns="109728" tIns="54864" bIns="54864"/>
+          <a:lstStyle/>
+          <a:p>
+            <a:pPr algn="l">
+              <a:spcAft>
+                <a:spcPts val="200"/>
+              </a:spcAft>
+            </a:pPr>
+            <a:r>
+              <a:rPr sz="1100" b="1">
+                <a:solidFill>
+                  <a:srgbClr val="8A1038"/>
+                </a:solidFill>
+                <a:latin typeface="Segoe UI"/>
+              </a:rPr>
+              <a:t>Defeitos mais graves</a:t>
+            </a:r>
+          </a:p>
+          <a:p>
+            <a:pPr algn="l">
+              <a:spcAft>
+                <a:spcPts val="100"/>
+              </a:spcAft>
+            </a:pPr>
+            <a:r>
+              <a:rPr sz="950" b="0">
+                <a:solidFill>
+                  <a:srgbClr val="0B1F3A"/>
+                </a:solidFill>
+                <a:latin typeface="Segoe UI"/>
+              </a:rPr>
+              <a:t>• </a:t>
+            </a:r>
+            <a:r>
+              <a:rPr sz="950" b="1">
+                <a:solidFill>
+                  <a:srgbClr val="0B1F3A"/>
+                </a:solidFill>
+                <a:latin typeface="Segoe UI"/>
+              </a:rPr>
+              <a:t>Tautologia</a:t>
+            </a:r>
+            <a:r>
+              <a:rPr sz="950" b="0">
+                <a:solidFill>
+                  <a:srgbClr val="0B1F3A"/>
+                </a:solidFill>
+                <a:latin typeface="Segoe UI"/>
+              </a:rPr>
+              <a:t> no conflito de datas bloqueia o quarto</a:t>
+            </a:r>
+          </a:p>
+          <a:p>
+            <a:pPr algn="l">
+              <a:spcAft>
+                <a:spcPts val="100"/>
+              </a:spcAft>
+            </a:pPr>
+            <a:r>
+              <a:rPr sz="950" b="0">
+                <a:solidFill>
+                  <a:srgbClr val="0B1F3A"/>
+                </a:solidFill>
+                <a:latin typeface="Segoe UI"/>
+              </a:rPr>
+              <a:t>• </a:t>
+            </a:r>
+            <a:r>
+              <a:rPr sz="950" b="1">
+                <a:solidFill>
+                  <a:srgbClr val="0B1F3A"/>
+                </a:solidFill>
+                <a:latin typeface="Segoe UI"/>
+              </a:rPr>
+              <a:t>Qualquer usuário</a:t>
+            </a:r>
+            <a:r>
+              <a:rPr sz="950" b="0">
+                <a:solidFill>
+                  <a:srgbClr val="0B1F3A"/>
+                </a:solidFill>
+                <a:latin typeface="Segoe UI"/>
+              </a:rPr>
+              <a:t> cancela reserva alheia; </a:t>
+            </a:r>
+            <a:r>
+              <a:rPr sz="950" b="1">
+                <a:solidFill>
+                  <a:srgbClr val="0B1F3A"/>
+                </a:solidFill>
+                <a:latin typeface="Segoe UI"/>
+              </a:rPr>
+              <a:t>GET</a:t>
+            </a:r>
+            <a:r>
+              <a:rPr sz="950" b="0">
+                <a:solidFill>
+                  <a:srgbClr val="0B1F3A"/>
+                </a:solidFill>
+                <a:latin typeface="Segoe UI"/>
+              </a:rPr>
+              <a:t> apaga</a:t>
+            </a:r>
+          </a:p>
+          <a:p>
+            <a:pPr algn="l">
+              <a:spcAft>
+                <a:spcPts val="100"/>
+              </a:spcAft>
+            </a:pPr>
+            <a:r>
+              <a:rPr sz="950" b="0">
+                <a:solidFill>
+                  <a:srgbClr val="0B1F3A"/>
+                </a:solidFill>
+                <a:latin typeface="Segoe UI"/>
+              </a:rPr>
+              <a:t>• Filtro em </a:t>
+            </a:r>
+            <a:r>
+              <a:rPr sz="950" b="1">
+                <a:solidFill>
+                  <a:srgbClr val="0B1F3A"/>
+                </a:solidFill>
+                <a:latin typeface="Segoe UI"/>
+              </a:rPr>
+              <a:t>variável global</a:t>
+            </a:r>
+            <a:r>
+              <a:rPr sz="950" b="0">
+                <a:solidFill>
+                  <a:srgbClr val="0B1F3A"/>
+                </a:solidFill>
+                <a:latin typeface="Segoe UI"/>
+              </a:rPr>
+              <a:t> vaza entre sessões</a:t>
+            </a:r>
+          </a:p>
+          <a:p>
+            <a:pPr algn="l">
+              <a:spcAft>
+                <a:spcPts val="100"/>
+              </a:spcAft>
+            </a:pPr>
+            <a:r>
+              <a:rPr sz="950" b="0">
+                <a:solidFill>
+                  <a:srgbClr val="0B1F3A"/>
+                </a:solidFill>
+                <a:latin typeface="Segoe UI"/>
+              </a:rPr>
+              <a:t>• Defeito </a:t>
+            </a:r>
+            <a:r>
+              <a:rPr sz="950" b="1">
+                <a:solidFill>
+                  <a:srgbClr val="0B1F3A"/>
+                </a:solidFill>
+                <a:latin typeface="Segoe UI"/>
+              </a:rPr>
+              <a:t>mascarado</a:t>
+            </a:r>
+            <a:r>
+              <a:rPr sz="950" b="0">
+                <a:solidFill>
+                  <a:srgbClr val="0B1F3A"/>
+                </a:solidFill>
+                <a:latin typeface="Segoe UI"/>
+              </a:rPr>
+              <a:t> (produto cartesiano)</a:t>
+            </a:r>
+          </a:p>
+        </p:txBody>
+      </p:sp>
+      <p:sp>
+        <p:nvSpPr>
+          <p:cNvPr id="19" name="Rectangle 18"/>
+          <p:cNvSpPr/>
+          <p:nvPr/>
+        </p:nvSpPr>
+        <p:spPr>
+          <a:xfrm>
+            <a:off x="411480" y="4709160"/>
+            <a:ext cx="3657600" cy="1737360"/>
+          </a:xfrm>
+          <a:prstGeom prst="rect">
+            <a:avLst/>
+          </a:prstGeom>
+          <a:solidFill>
+            <a:srgbClr val="FFFFFF"/>
+          </a:solidFill>
+          <a:ln w="9525">
+            <a:solidFill>
+              <a:srgbClr val="D7DDE6"/>
+            </a:solidFill>
+          </a:ln>
+          <a:effectLst/>
+        </p:spPr>
+        <p:style>
+          <a:lnRef idx="1">
+            <a:schemeClr val="accent1"/>
+          </a:lnRef>
+          <a:fillRef idx="3">
+            <a:schemeClr val="accent1"/>
+          </a:fillRef>
+          <a:effectRef idx="2">
+            <a:schemeClr val="accent1"/>
+          </a:effectRef>
+          <a:fontRef idx="minor">
+            <a:schemeClr val="lt1"/>
+          </a:fontRef>
+        </p:style>
+        <p:txBody>
           <a:bodyPr rtlCol="0" anchor="t" wrap="square" lIns="109728" rIns="109728" tIns="54864" bIns="54864"/>
           <a:lstStyle/>
           <a:p>
@@ -5367,194 +6726,106 @@
               </a:spcAft>
             </a:pPr>
             <a:r>
-              <a:rPr sz="1400" b="1">
-                <a:solidFill>
-                  <a:srgbClr val="7A0C2E"/>
-                </a:solidFill>
-                <a:latin typeface="Segoe UI"/>
-              </a:rPr>
-              <a:t>Lições aprendidas</a:t>
+              <a:rPr sz="1200" b="1">
+                <a:solidFill>
+                  <a:srgbClr val="8A1038"/>
+                </a:solidFill>
+                <a:latin typeface="Segoe UI"/>
+              </a:rPr>
+              <a:t>Dificuldades</a:t>
             </a:r>
           </a:p>
           <a:p>
             <a:pPr algn="l">
               <a:spcAft>
-                <a:spcPts val="600"/>
+                <a:spcPts val="200"/>
               </a:spcAft>
             </a:pPr>
             <a:r>
-              <a:rPr sz="1150" b="0">
-                <a:solidFill>
-                  <a:srgbClr val="0F2A4A"/>
-                </a:solidFill>
-                <a:latin typeface="Segoe UI"/>
-              </a:rPr>
-              <a:t>• </a:t>
-            </a:r>
-            <a:r>
-              <a:rPr sz="1150" b="1">
-                <a:solidFill>
-                  <a:srgbClr val="0F2A4A"/>
-                </a:solidFill>
-                <a:latin typeface="Segoe UI"/>
-              </a:rPr>
-              <a:t>Funcional</a:t>
-            </a:r>
-            <a:r>
-              <a:rPr sz="1150" b="0">
-                <a:solidFill>
-                  <a:srgbClr val="0F2A4A"/>
-                </a:solidFill>
-                <a:latin typeface="Segoe UI"/>
-              </a:rPr>
-              <a:t> achou 16 de 19 defeitos: limites (entrada hoje, estadias adjacentes) valem mais que valores típicos</a:t>
+              <a:rPr sz="1000" b="0">
+                <a:solidFill>
+                  <a:srgbClr val="0B1F3A"/>
+                </a:solidFill>
+                <a:latin typeface="Segoe UI"/>
+              </a:rPr>
+              <a:t>• Dependências de 2019: Python 3.9 e Python 3.12 separados</a:t>
             </a:r>
           </a:p>
           <a:p>
             <a:pPr algn="l">
               <a:spcAft>
-                <a:spcPts val="600"/>
+                <a:spcPts val="200"/>
               </a:spcAft>
             </a:pPr>
             <a:r>
-              <a:rPr sz="1150" b="0">
-                <a:solidFill>
-                  <a:srgbClr val="0F2A4A"/>
-                </a:solidFill>
-                <a:latin typeface="Segoe UI"/>
-              </a:rPr>
-              <a:t>• </a:t>
-            </a:r>
-            <a:r>
-              <a:rPr sz="1150" b="1">
-                <a:solidFill>
-                  <a:srgbClr val="0F2A4A"/>
-                </a:solidFill>
-                <a:latin typeface="Segoe UI"/>
-              </a:rPr>
-              <a:t>Cobertura ≠ correção:</a:t>
-            </a:r>
-            <a:r>
-              <a:rPr sz="1150" b="0">
-                <a:solidFill>
-                  <a:srgbClr val="0F2A4A"/>
-                </a:solidFill>
-                <a:latin typeface="Segoe UI"/>
-              </a:rPr>
-              <a:t> 100% dos comandos no original com 29 testes falhando</a:t>
+              <a:rPr sz="1000" b="0">
+                <a:solidFill>
+                  <a:srgbClr val="0B1F3A"/>
+                </a:solidFill>
+                <a:latin typeface="Segoe UI"/>
+              </a:rPr>
+              <a:t>• Cosmic Ray no Windows (caminho do interpretador)</a:t>
             </a:r>
           </a:p>
           <a:p>
             <a:pPr algn="l">
               <a:spcAft>
-                <a:spcPts val="600"/>
+                <a:spcPts val="200"/>
               </a:spcAft>
             </a:pPr>
             <a:r>
-              <a:rPr sz="1150" b="0">
-                <a:solidFill>
-                  <a:srgbClr val="0F2A4A"/>
-                </a:solidFill>
-                <a:latin typeface="Segoe UI"/>
-              </a:rPr>
-              <a:t>• </a:t>
-            </a:r>
-            <a:r>
-              <a:rPr sz="1150" b="1">
-                <a:solidFill>
-                  <a:srgbClr val="0F2A4A"/>
-                </a:solidFill>
-                <a:latin typeface="Segoe UI"/>
-              </a:rPr>
-              <a:t>Estrutural</a:t>
-            </a:r>
-            <a:r>
-              <a:rPr sz="1150" b="0">
-                <a:solidFill>
-                  <a:srgbClr val="0F2A4A"/>
-                </a:solidFill>
-                <a:latin typeface="Segoe UI"/>
-              </a:rPr>
-              <a:t> achou o que a especificação não sugere e revelou um defeito </a:t>
-            </a:r>
-            <a:r>
-              <a:rPr sz="1150" b="1">
-                <a:solidFill>
-                  <a:srgbClr val="0F2A4A"/>
-                </a:solidFill>
-                <a:latin typeface="Segoe UI"/>
-              </a:rPr>
-              <a:t>mascarado</a:t>
-            </a:r>
-          </a:p>
-          <a:p>
-            <a:pPr algn="l">
-              <a:spcAft>
-                <a:spcPts val="600"/>
-              </a:spcAft>
-            </a:pPr>
-            <a:r>
-              <a:rPr sz="1150" b="0">
-                <a:solidFill>
-                  <a:srgbClr val="0F2A4A"/>
-                </a:solidFill>
-                <a:latin typeface="Segoe UI"/>
-              </a:rPr>
-              <a:t>• </a:t>
-            </a:r>
-            <a:r>
-              <a:rPr sz="1150" b="1">
-                <a:solidFill>
-                  <a:srgbClr val="0F2A4A"/>
-                </a:solidFill>
-                <a:latin typeface="Segoe UI"/>
-              </a:rPr>
-              <a:t>Mutação testa os testes:</a:t>
-            </a:r>
-            <a:r>
-              <a:rPr sz="1150" b="0">
-                <a:solidFill>
-                  <a:srgbClr val="0F2A4A"/>
-                </a:solidFill>
-                <a:latin typeface="Segoe UI"/>
-              </a:rPr>
-              <a:t> com 100% de desvios, 5 mutantes vivos (IDs &gt; 256, oráculo de um sentido só)</a:t>
-            </a:r>
-          </a:p>
-          <a:p>
-            <a:pPr algn="l">
-              <a:spcAft>
-                <a:spcPts val="600"/>
-              </a:spcAft>
-            </a:pPr>
-            <a:r>
-              <a:rPr sz="1150" b="0">
-                <a:solidFill>
-                  <a:srgbClr val="0F2A4A"/>
-                </a:solidFill>
-                <a:latin typeface="Segoe UI"/>
-              </a:rPr>
-              <a:t>• </a:t>
-            </a:r>
-            <a:r>
-              <a:rPr sz="1150" b="1">
-                <a:solidFill>
-                  <a:srgbClr val="0F2A4A"/>
-                </a:solidFill>
-                <a:latin typeface="Segoe UI"/>
-              </a:rPr>
-              <a:t>Corrigir antes de mutar:</a:t>
-            </a:r>
-            <a:r>
-              <a:rPr sz="1150" b="0">
-                <a:solidFill>
-                  <a:srgbClr val="0F2A4A"/>
-                </a:solidFill>
-                <a:latin typeface="Segoe UI"/>
-              </a:rPr>
-              <a:t> mutar o original invalidaria o escore</a:t>
-            </a:r>
-          </a:p>
+              <a:rPr sz="1000" b="0">
+                <a:solidFill>
+                  <a:srgbClr val="0B1F3A"/>
+                </a:solidFill>
+                <a:latin typeface="Segoe UI"/>
+              </a:rPr>
+              <a:t>• Oráculos não escritos → convenções declaradas</a:t>
+            </a:r>
+          </a:p>
+        </p:txBody>
+      </p:sp>
+      <p:sp>
+        <p:nvSpPr>
+          <p:cNvPr id="20" name="Rectangle 19"/>
+          <p:cNvSpPr/>
+          <p:nvPr/>
+        </p:nvSpPr>
+        <p:spPr>
+          <a:xfrm>
+            <a:off x="4206240" y="4709160"/>
+            <a:ext cx="7589520" cy="1737360"/>
+          </a:xfrm>
+          <a:prstGeom prst="rect">
+            <a:avLst/>
+          </a:prstGeom>
+          <a:solidFill>
+            <a:srgbClr val="FFFFFF"/>
+          </a:solidFill>
+          <a:ln w="9525">
+            <a:solidFill>
+              <a:srgbClr val="D7DDE6"/>
+            </a:solidFill>
+          </a:ln>
+          <a:effectLst/>
+        </p:spPr>
+        <p:style>
+          <a:lnRef idx="1">
+            <a:schemeClr val="accent1"/>
+          </a:lnRef>
+          <a:fillRef idx="3">
+            <a:schemeClr val="accent1"/>
+          </a:fillRef>
+          <a:effectRef idx="2">
+            <a:schemeClr val="accent1"/>
+          </a:effectRef>
+          <a:fontRef idx="minor">
+            <a:schemeClr val="lt1"/>
+          </a:fontRef>
+        </p:style>
+        <p:txBody>
+          <a:bodyPr rtlCol="0" anchor="t" wrap="square" lIns="109728" rIns="109728" tIns="54864" bIns="54864"/>
+          <a:lstStyle/>
           <a:p>
             <a:pPr algn="l">
               <a:spcAft>
@@ -5562,61 +6833,149 @@
               </a:spcAft>
             </a:pPr>
             <a:r>
-              <a:rPr sz="1400" b="1">
-                <a:solidFill>
-                  <a:srgbClr val="7A0C2E"/>
-                </a:solidFill>
-                <a:latin typeface="Segoe UI"/>
-              </a:rPr>
-              <a:t>Dificuldades</a:t>
+              <a:rPr sz="1200" b="1">
+                <a:solidFill>
+                  <a:srgbClr val="8A1038"/>
+                </a:solidFill>
+                <a:latin typeface="Segoe UI"/>
+              </a:rPr>
+              <a:t>Lições aprendidas</a:t>
             </a:r>
           </a:p>
           <a:p>
             <a:pPr algn="l">
               <a:spcAft>
-                <a:spcPts val="400"/>
+                <a:spcPts val="200"/>
               </a:spcAft>
             </a:pPr>
             <a:r>
-              <a:rPr sz="1150" b="0">
-                <a:solidFill>
-                  <a:srgbClr val="0F2A4A"/>
-                </a:solidFill>
-                <a:latin typeface="Segoe UI"/>
-              </a:rPr>
-              <a:t>• Dependências de 2019 → 2 ambientes (Py 3.9 / 3.12) e compat.py</a:t>
+              <a:rPr sz="1000" b="0">
+                <a:solidFill>
+                  <a:srgbClr val="0B1F3A"/>
+                </a:solidFill>
+                <a:latin typeface="Segoe UI"/>
+              </a:rPr>
+              <a:t>• </a:t>
+            </a:r>
+            <a:r>
+              <a:rPr sz="1000" b="1">
+                <a:solidFill>
+                  <a:srgbClr val="0B1F3A"/>
+                </a:solidFill>
+                <a:latin typeface="Segoe UI"/>
+              </a:rPr>
+              <a:t>Limites valem mais que valores típicos</a:t>
+            </a:r>
+            <a:r>
+              <a:rPr sz="1000" b="0">
+                <a:solidFill>
+                  <a:srgbClr val="0B1F3A"/>
+                </a:solidFill>
+                <a:latin typeface="Segoe UI"/>
+              </a:rPr>
+              <a:t>: a técnica funcional achou 16 dos 19 defeitos</a:t>
             </a:r>
           </a:p>
           <a:p>
             <a:pPr algn="l">
               <a:spcAft>
-                <a:spcPts val="400"/>
+                <a:spcPts val="200"/>
               </a:spcAft>
             </a:pPr>
             <a:r>
-              <a:rPr sz="1150" b="0">
-                <a:solidFill>
-                  <a:srgbClr val="0F2A4A"/>
-                </a:solidFill>
-                <a:latin typeface="Segoe UI"/>
-              </a:rPr>
-              <a:t>• Cosmic Ray no Windows (caminho do interpretador)</a:t>
+              <a:rPr sz="1000" b="0">
+                <a:solidFill>
+                  <a:srgbClr val="0B1F3A"/>
+                </a:solidFill>
+                <a:latin typeface="Segoe UI"/>
+              </a:rPr>
+              <a:t>• </a:t>
+            </a:r>
+            <a:r>
+              <a:rPr sz="1000" b="1">
+                <a:solidFill>
+                  <a:srgbClr val="0B1F3A"/>
+                </a:solidFill>
+                <a:latin typeface="Segoe UI"/>
+              </a:rPr>
+              <a:t>Cobertura ≠ correção</a:t>
+            </a:r>
+            <a:r>
+              <a:rPr sz="1000" b="0">
+                <a:solidFill>
+                  <a:srgbClr val="0B1F3A"/>
+                </a:solidFill>
+                <a:latin typeface="Segoe UI"/>
+              </a:rPr>
+              <a:t>: 100% dos comandos no original com 33 testes falhando</a:t>
             </a:r>
           </a:p>
           <a:p>
             <a:pPr algn="l">
               <a:spcAft>
-                <a:spcPts val="400"/>
+                <a:spcPts val="200"/>
               </a:spcAft>
             </a:pPr>
             <a:r>
-              <a:rPr sz="1150" b="0">
-                <a:solidFill>
-                  <a:srgbClr val="0F2A4A"/>
-                </a:solidFill>
-                <a:latin typeface="Segoe UI"/>
-              </a:rPr>
-              <a:t>• Oráculos não escritos → convenções declaradas no relatório</a:t>
+              <a:rPr sz="1000" b="0">
+                <a:solidFill>
+                  <a:srgbClr val="0B1F3A"/>
+                </a:solidFill>
+                <a:latin typeface="Segoe UI"/>
+              </a:rPr>
+              <a:t>• </a:t>
+            </a:r>
+            <a:r>
+              <a:rPr sz="1000" b="1">
+                <a:solidFill>
+                  <a:srgbClr val="0B1F3A"/>
+                </a:solidFill>
+                <a:latin typeface="Segoe UI"/>
+              </a:rPr>
+              <a:t>Mutação testa os testes</a:t>
+            </a:r>
+            <a:r>
+              <a:rPr sz="1000" b="0">
+                <a:solidFill>
+                  <a:srgbClr val="0B1F3A"/>
+                </a:solidFill>
+                <a:latin typeface="Segoe UI"/>
+              </a:rPr>
+              <a:t>: com 100% dos desvios ainda havia 5 mutantes vivos</a:t>
+            </a:r>
+          </a:p>
+          <a:p>
+            <a:pPr algn="l">
+              <a:spcAft>
+                <a:spcPts val="200"/>
+              </a:spcAft>
+            </a:pPr>
+            <a:r>
+              <a:rPr sz="1000" b="0">
+                <a:solidFill>
+                  <a:srgbClr val="0B1F3A"/>
+                </a:solidFill>
+                <a:latin typeface="Segoe UI"/>
+              </a:rPr>
+              <a:t>• </a:t>
+            </a:r>
+            <a:r>
+              <a:rPr sz="1000" b="1">
+                <a:solidFill>
+                  <a:srgbClr val="0B1F3A"/>
+                </a:solidFill>
+                <a:latin typeface="Segoe UI"/>
+              </a:rPr>
+              <a:t>Corrigir antes de mutar</a:t>
+            </a:r>
+            <a:r>
+              <a:rPr sz="1000" b="0">
+                <a:solidFill>
+                  <a:srgbClr val="0B1F3A"/>
+                </a:solidFill>
+                <a:latin typeface="Segoe UI"/>
+              </a:rPr>
+              <a:t>: mutar código com defeitos invalida o escore</a:t>
             </a:r>
           </a:p>
         </p:txBody>
@@ -5947,4 +7306,324 @@
   </a:objectDefaults>
   <a:extraClrSchemeLst/>
 </a:theme>
+</file>
+
+<file path=ppt/theme/theme2.xml><?xml version="1.0" encoding="utf-8"?>
+<a:theme xmlns:a="http://schemas.openxmlformats.org/drawingml/2006/main" name="Office Theme">
+  <a:themeElements>
+    <a:clrScheme name="Office">
+      <a:dk1>
+        <a:sysClr val="windowText" lastClr="000000"/>
+      </a:dk1>
+      <a:lt1>
+        <a:sysClr val="window" lastClr="FFFFFF"/>
+      </a:lt1>
+      <a:dk2>
+        <a:srgbClr val="1F497D"/>
+      </a:dk2>
+      <a:lt2>
+        <a:srgbClr val="EEECE1"/>
+      </a:lt2>
+      <a:accent1>
+        <a:srgbClr val="4F81BD"/>
+      </a:accent1>
+      <a:accent2>
+        <a:srgbClr val="C0504D"/>
+      </a:accent2>
+      <a:accent3>
+        <a:srgbClr val="9BBB59"/>
+      </a:accent3>
+      <a:accent4>
+        <a:srgbClr val="8064A2"/>
+      </a:accent4>
+      <a:accent5>
+        <a:srgbClr val="4BACC6"/>
+      </a:accent5>
+      <a:accent6>
+        <a:srgbClr val="F79646"/>
+      </a:accent6>
+      <a:hlink>
+        <a:srgbClr val="0000FF"/>
+      </a:hlink>
+      <a:folHlink>
+        <a:srgbClr val="800080"/>
+      </a:folHlink>
+    </a:clrScheme>
+    <a:fontScheme name="Office">
+      <a:majorFont>
+        <a:latin typeface="Calibri"/>
+        <a:ea typeface=""/>
+        <a:cs typeface=""/>
+        <a:font script="Jpan" typeface="ＭＳ Ｐゴシック"/>
+        <a:font script="Hang" typeface="맑은 고딕"/>
+        <a:font script="Hans" typeface="宋体"/>
+        <a:font script="Hant" typeface="新細明體"/>
+        <a:font script="Arab" typeface="Times New Roman"/>
+        <a:font script="Hebr" typeface="Times New Roman"/>
+        <a:font script="Thai" typeface="Angsana New"/>
+        <a:font script="Ethi" typeface="Nyala"/>
+        <a:font script="Beng" typeface="Vrinda"/>
+        <a:font script="Gujr" typeface="Shruti"/>
+        <a:font script="Khmr" typeface="MoolBoran"/>
+        <a:font script="Knda" typeface="Tunga"/>
+        <a:font script="Guru" typeface="Raavi"/>
+        <a:font script="Cans" typeface="Euphemia"/>
+        <a:font script="Cher" typeface="Plantagenet Cherokee"/>
+        <a:font script="Yiii" typeface="Microsoft Yi Baiti"/>
+        <a:font script="Tibt" typeface="Microsoft Himalaya"/>
+        <a:font script="Thaa" typeface="MV Boli"/>
+        <a:font script="Deva" typeface="Mangal"/>
+        <a:font script="Telu" typeface="Gautami"/>
+        <a:font script="Taml" typeface="Latha"/>
+        <a:font script="Syrc" typeface="Estrangelo Edessa"/>
+        <a:font script="Orya" typeface="Kalinga"/>
+        <a:font script="Mlym" typeface="Kartika"/>
+        <a:font script="Laoo" typeface="DokChampa"/>
+        <a:font script="Sinh" typeface="Iskoola Pota"/>
+        <a:font script="Mong" typeface="Mongolian Baiti"/>
+        <a:font script="Viet" typeface="Times New Roman"/>
+        <a:font script="Uigh" typeface="Microsoft Uighur"/>
+        <a:font script="Geor" typeface="Sylfaen"/>
+      </a:majorFont>
+      <a:minorFont>
+        <a:latin typeface="Calibri"/>
+        <a:ea typeface=""/>
+        <a:cs typeface=""/>
+        <a:font script="Jpan" typeface="ＭＳ Ｐゴシック"/>
+        <a:font script="Hang" typeface="맑은 고딕"/>
+        <a:font script="Hans" typeface="宋体"/>
+        <a:font script="Hant" typeface="新細明體"/>
+        <a:font script="Arab" typeface="Arial"/>
+        <a:font script="Hebr" typeface="Arial"/>
+        <a:font script="Thai" typeface="Cordia New"/>
+        <a:font script="Ethi" typeface="Nyala"/>
+        <a:font script="Beng" typeface="Vrinda"/>
+        <a:font script="Gujr" typeface="Shruti"/>
+        <a:font script="Khmr" typeface="DaunPenh"/>
+        <a:font script="Knda" typeface="Tunga"/>
+        <a:font script="Guru" typeface="Raavi"/>
+        <a:font script="Cans" typeface="Euphemia"/>
+        <a:font script="Cher" typeface="Plantagenet Cherokee"/>
+        <a:font script="Yiii" typeface="Microsoft Yi Baiti"/>
+        <a:font script="Tibt" typeface="Microsoft Himalaya"/>
+        <a:font script="Thaa" typeface="MV Boli"/>
+        <a:font script="Deva" typeface="Mangal"/>
+        <a:font script="Telu" typeface="Gautami"/>
+        <a:font script="Taml" typeface="Latha"/>
+        <a:font script="Syrc" typeface="Estrangelo Edessa"/>
+        <a:font script="Orya" typeface="Kalinga"/>
+        <a:font script="Mlym" typeface="Kartika"/>
+        <a:font script="Laoo" typeface="DokChampa"/>
+        <a:font script="Sinh" typeface="Iskoola Pota"/>
+        <a:font script="Mong" typeface="Mongolian Baiti"/>
+        <a:font script="Viet" typeface="Arial"/>
+        <a:font script="Uigh" typeface="Microsoft Uighur"/>
+        <a:font script="Geor" typeface="Sylfaen"/>
+      </a:minorFont>
+    </a:fontScheme>
+    <a:fmtScheme name="Office">
+      <a:fillStyleLst>
+        <a:solidFill>
+          <a:schemeClr val="phClr"/>
+        </a:solidFill>
+        <a:gradFill rotWithShape="1">
+          <a:gsLst>
+            <a:gs pos="0">
+              <a:schemeClr val="phClr">
+                <a:tint val="50000"/>
+                <a:satMod val="300000"/>
+              </a:schemeClr>
+            </a:gs>
+            <a:gs pos="35000">
+              <a:schemeClr val="phClr">
+                <a:tint val="37000"/>
+                <a:satMod val="300000"/>
+              </a:schemeClr>
+            </a:gs>
+            <a:gs pos="100000">
+              <a:schemeClr val="phClr">
+                <a:tint val="15000"/>
+                <a:satMod val="350000"/>
+              </a:schemeClr>
+            </a:gs>
+          </a:gsLst>
+          <a:lin ang="16200000" scaled="1"/>
+        </a:gradFill>
+        <a:gradFill rotWithShape="1">
+          <a:gsLst>
+            <a:gs pos="0">
+              <a:schemeClr val="phClr">
+                <a:tint val="100000"/>
+                <a:shade val="100000"/>
+                <a:satMod val="130000"/>
+              </a:schemeClr>
+            </a:gs>
+            <a:gs pos="100000">
+              <a:schemeClr val="phClr">
+                <a:tint val="50000"/>
+                <a:shade val="100000"/>
+                <a:satMod val="350000"/>
+              </a:schemeClr>
+            </a:gs>
+          </a:gsLst>
+          <a:lin ang="16200000" scaled="0"/>
+        </a:gradFill>
+      </a:fillStyleLst>
+      <a:lnStyleLst>
+        <a:ln w="9525" cap="flat" cmpd="sng" algn="ctr">
+          <a:solidFill>
+            <a:schemeClr val="phClr">
+              <a:shade val="95000"/>
+              <a:satMod val="105000"/>
+            </a:schemeClr>
+          </a:solidFill>
+          <a:prstDash val="solid"/>
+        </a:ln>
+        <a:ln w="25400" cap="flat" cmpd="sng" algn="ctr">
+          <a:solidFill>
+            <a:schemeClr val="phClr"/>
+          </a:solidFill>
+          <a:prstDash val="solid"/>
+        </a:ln>
+        <a:ln w="38100" cap="flat" cmpd="sng" algn="ctr">
+          <a:solidFill>
+            <a:schemeClr val="phClr"/>
+          </a:solidFill>
+          <a:prstDash val="solid"/>
+        </a:ln>
+      </a:lnStyleLst>
+      <a:effectStyleLst>
+        <a:effectStyle>
+          <a:effectLst>
+            <a:outerShdw blurRad="40000" dist="20000" dir="5400000" rotWithShape="0">
+              <a:srgbClr val="000000">
+                <a:alpha val="38000"/>
+              </a:srgbClr>
+            </a:outerShdw>
+          </a:effectLst>
+        </a:effectStyle>
+        <a:effectStyle>
+          <a:effectLst>
+            <a:outerShdw blurRad="40000" dist="23000" dir="5400000" rotWithShape="0">
+              <a:srgbClr val="000000">
+                <a:alpha val="35000"/>
+              </a:srgbClr>
+            </a:outerShdw>
+          </a:effectLst>
+        </a:effectStyle>
+        <a:effectStyle>
+          <a:effectLst>
+            <a:outerShdw blurRad="40000" dist="23000" dir="5400000" rotWithShape="0">
+              <a:srgbClr val="000000">
+                <a:alpha val="35000"/>
+              </a:srgbClr>
+            </a:outerShdw>
+          </a:effectLst>
+          <a:scene3d>
+            <a:camera prst="orthographicFront">
+              <a:rot lat="0" lon="0" rev="0"/>
+            </a:camera>
+            <a:lightRig rig="threePt" dir="t">
+              <a:rot lat="0" lon="0" rev="1200000"/>
+            </a:lightRig>
+          </a:scene3d>
+          <a:sp3d>
+            <a:bevelT w="63500" h="25400"/>
+          </a:sp3d>
+        </a:effectStyle>
+      </a:effectStyleLst>
+      <a:bgFillStyleLst>
+        <a:solidFill>
+          <a:schemeClr val="phClr"/>
+        </a:solidFill>
+        <a:gradFill rotWithShape="1">
+          <a:gsLst>
+            <a:gs pos="0">
+              <a:schemeClr val="phClr">
+                <a:tint val="40000"/>
+                <a:satMod val="350000"/>
+              </a:schemeClr>
+            </a:gs>
+            <a:gs pos="40000">
+              <a:schemeClr val="phClr">
+                <a:tint val="45000"/>
+                <a:shade val="99000"/>
+                <a:satMod val="350000"/>
+              </a:schemeClr>
+            </a:gs>
+            <a:gs pos="100000">
+              <a:schemeClr val="phClr">
+                <a:shade val="20000"/>
+                <a:satMod val="255000"/>
+              </a:schemeClr>
+            </a:gs>
+          </a:gsLst>
+          <a:path path="circle">
+            <a:fillToRect l="50000" t="-80000" r="50000" b="180000"/>
+          </a:path>
+        </a:gradFill>
+        <a:gradFill rotWithShape="1">
+          <a:gsLst>
+            <a:gs pos="0">
+              <a:schemeClr val="phClr">
+                <a:tint val="80000"/>
+                <a:satMod val="300000"/>
+              </a:schemeClr>
+            </a:gs>
+            <a:gs pos="100000">
+              <a:schemeClr val="phClr">
+                <a:shade val="30000"/>
+                <a:satMod val="200000"/>
+              </a:schemeClr>
+            </a:gs>
+          </a:gsLst>
+          <a:path path="circle">
+            <a:fillToRect l="50000" t="50000" r="50000" b="50000"/>
+          </a:path>
+        </a:gradFill>
+      </a:bgFillStyleLst>
+    </a:fmtScheme>
+  </a:themeElements>
+  <a:objectDefaults>
+    <a:spDef>
+      <a:spPr/>
+      <a:bodyPr/>
+      <a:lstStyle/>
+      <a:style>
+        <a:lnRef idx="1">
+          <a:schemeClr val="accent1"/>
+        </a:lnRef>
+        <a:fillRef idx="3">
+          <a:schemeClr val="accent1"/>
+        </a:fillRef>
+        <a:effectRef idx="2">
+          <a:schemeClr val="accent1"/>
+        </a:effectRef>
+        <a:fontRef idx="minor">
+          <a:schemeClr val="lt1"/>
+        </a:fontRef>
+      </a:style>
+    </a:spDef>
+    <a:lnDef>
+      <a:spPr/>
+      <a:bodyPr/>
+      <a:lstStyle/>
+      <a:style>
+        <a:lnRef idx="2">
+          <a:schemeClr val="accent1"/>
+        </a:lnRef>
+        <a:fillRef idx="0">
+          <a:schemeClr val="accent1"/>
+        </a:fillRef>
+        <a:effectRef idx="1">
+          <a:schemeClr val="accent1"/>
+        </a:effectRef>
+        <a:fontRef idx="minor">
+          <a:schemeClr val="tx1"/>
+        </a:fontRef>
+      </a:style>
+    </a:lnDef>
+  </a:objectDefaults>
+  <a:extraClrSchemeLst/>
+</a:theme>
 </file>
--- a/docs/apresentacao-2-slides.pptx
+++ b/docs/apresentacao-2-slides.pptx
@@ -164,16 +164,16 @@
               <c:strCache>
                 <c:ptCount val="4"/>
                 <c:pt idx="0">
-                  <c:v>Funcional (52)</c:v>
+                  <c:v>Funcional (50)</c:v>
                 </c:pt>
                 <c:pt idx="1">
-                  <c:v>Estrutural (59)</c:v>
+                  <c:v>Estrutural (57)</c:v>
                 </c:pt>
                 <c:pt idx="2">
-                  <c:v>Correção (59)</c:v>
+                  <c:v>Correção (57)</c:v>
                 </c:pt>
                 <c:pt idx="3">
-                  <c:v>Mutação (64)</c:v>
+                  <c:v>Mutação (60)</c:v>
                 </c:pt>
               </c:strCache>
             </c:strRef>
@@ -185,7 +185,7 @@
                 <c:formatCode>General</c:formatCode>
                 <c:ptCount val="4"/>
                 <c:pt idx="0">
-                  <c:v>0.903</c:v>
+                  <c:v>0.9129999999999999</c:v>
                 </c:pt>
                 <c:pt idx="1">
                   <c:v>1.0</c:v>
@@ -247,16 +247,16 @@
               <c:strCache>
                 <c:ptCount val="4"/>
                 <c:pt idx="0">
-                  <c:v>Funcional (52)</c:v>
+                  <c:v>Funcional (50)</c:v>
                 </c:pt>
                 <c:pt idx="1">
-                  <c:v>Estrutural (59)</c:v>
+                  <c:v>Estrutural (57)</c:v>
                 </c:pt>
                 <c:pt idx="2">
-                  <c:v>Correção (59)</c:v>
+                  <c:v>Correção (57)</c:v>
                 </c:pt>
                 <c:pt idx="3">
-                  <c:v>Mutação (64)</c:v>
+                  <c:v>Mutação (60)</c:v>
                 </c:pt>
               </c:strCache>
             </c:strRef>
@@ -268,10 +268,10 @@
                 <c:formatCode>General</c:formatCode>
                 <c:ptCount val="4"/>
                 <c:pt idx="0">
-                  <c:v>0.833</c:v>
+                  <c:v>0.84</c:v>
                 </c:pt>
                 <c:pt idx="1">
-                  <c:v>0.981</c:v>
+                  <c:v>0.98</c:v>
                 </c:pt>
                 <c:pt idx="2">
                   <c:v>1.0</c:v>
@@ -330,16 +330,16 @@
               <c:strCache>
                 <c:ptCount val="4"/>
                 <c:pt idx="0">
-                  <c:v>Funcional (52)</c:v>
+                  <c:v>Funcional (50)</c:v>
                 </c:pt>
                 <c:pt idx="1">
-                  <c:v>Estrutural (59)</c:v>
+                  <c:v>Estrutural (57)</c:v>
                 </c:pt>
                 <c:pt idx="2">
-                  <c:v>Correção (59)</c:v>
+                  <c:v>Correção (57)</c:v>
                 </c:pt>
                 <c:pt idx="3">
-                  <c:v>Mutação (64)</c:v>
+                  <c:v>Mutação (60)</c:v>
                 </c:pt>
               </c:strCache>
             </c:strRef>
@@ -351,10 +351,10 @@
                 <c:formatCode>General</c:formatCode>
                 <c:ptCount val="4"/>
                 <c:pt idx="2">
-                  <c:v>0.9359999999999999</c:v>
+                  <c:v>0.9420000000000001</c:v>
                 </c:pt>
                 <c:pt idx="3">
-                  <c:v>0.961</c:v>
+                  <c:v>0.958</c:v>
                 </c:pt>
               </c:numCache>
             </c:numRef>
@@ -835,13 +835,13 @@
           <a:lstStyle/>
           <a:p>
             <a:r>
-              <a:t>Objetivo (30 s): testar um sistema web de terceiros, o Hotel Management System em Flask, nas três funcionalidades com regra de negócio: reservar, cancelar e consultar disponibilidade.</a:t>
+              <a:t>Objetivo (30 s): testar um sistema web de terceiros, o Hotel Management System em Flask, em três requisitos da reserva de quartos: reservar (quartos, hóspedes, disponibilidade, custo), data de entrada e data de saída; os demais RFs foram documentados.</a:t>
             </a:r>
           </a:p>
           <a:p/>
           <a:p>
             <a:r>
-              <a:t>Funcional (40 s): só com o README e a interface, particionei 22 condições em 48 classes e apliquei valor limite (entrada hoje, uma noite, capacidade, estadias adjacentes). Foram 52 casos; no código original 30 falharam e revelaram 16 defeitos.</a:t>
+              <a:t>Funcional (40 s): só com o README e a interface, particionei 19 condições em 42 classes e apliquei valor limite (entrada hoje, uma noite, capacidade, estadias adjacentes). Foram 50 casos; no código original 28 falharam e revelaram 12 defeitos.</a:t>
             </a:r>
           </a:p>
           <a:p/>
@@ -853,13 +853,13 @@
           <a:p/>
           <a:p>
             <a:r>
-              <a:t>Correção (30 s): antes de mutar, corrigi os 19 defeitos no fork, um commit por grupo. O mesmo teste é xfail estrito no original e passa no corrigido: isso comprova cada correção.</a:t>
+              <a:t>Correção (30 s): antes de mutar, corrigi os defeitos no fork, um commit por grupo. O mesmo teste é xfail estrito no original e passa no corrigido: isso comprova cada correção.</a:t>
             </a:r>
           </a:p>
           <a:p/>
           <a:p>
             <a:r>
-              <a:t>Mutação (40 s): Cosmic Ray sobre todos os 204 mutantes das funções do recorte. Dos 13 vivos, 5 eram matáveis e ganharam casos; os 8 restantes são equivalentes e estão justificados no relatório.</a:t>
+              <a:t>Mutação (40 s): Cosmic Ray sobre todos os 189 mutantes das funções dos três requisitos. Dos 11 vivos, 3 eram matáveis e ganharam casos; os 8 restantes são equivalentes e estão justificados no relatório.</a:t>
             </a:r>
           </a:p>
           <a:p/>
@@ -935,13 +935,13 @@
           <a:lstStyle/>
           <a:p>
             <a:r>
-              <a:t>Números (30 s): a suíte final tem 64 casos, 100% de comandos e desvios nas funções do recorte e 96,1% de escore de mutação. Os 8 mutantes vivos são equivalentes, então 100% dos não equivalentes morreram. No gráfico, a cobertura sobe na etapa estrutural e o escore sobe na mutação.</a:t>
+              <a:t>Números (30 s): a suíte final tem 60 casos, 100% de comandos e desvios nas funções do recorte e 95,8% de escore de mutação. Os 8 mutantes vivos são equivalentes, então 100% dos não equivalentes morreram. No gráfico, a cobertura sobe na etapa estrutural e o escore sobe na mutação.</a:t>
             </a:r>
           </a:p>
           <a:p/>
           <a:p>
             <a:r>
-              <a:t>Defeito principal (40 s): a condição de conflito de datas é uma tautologia, sempre verdadeira. Depois da primeira reserva, o quarto nunca mais pode ser reservado. As imagens mostram a mesma reserva recusada no original e aceita no corrigido. Outros graves: cancelar reserva de outra pessoa e apagar dados com um link (GET).</a:t>
+              <a:t>Defeito principal (40 s): a condição de conflito de datas é uma tautologia, sempre verdadeira. Depois da primeira reserva, o quarto nunca mais pode ser reservado. As imagens mostram a mesma reserva recusada no original e aceita no corrigido. Outro exemplo: a entrada no dia de hoje era recusada, porque a data era comparada com a hora atual.</a:t>
             </a:r>
           </a:p>
           <a:p/>
@@ -959,7 +959,7 @@
           <a:p/>
           <a:p>
             <a:r>
-              <a:t>Lições (40 s): limites acham defeitos que valores típicos não acham; cobertura mede o que executou, não o que foi verificado (o original tinha 100% dos comandos com 33 testes falhando); a mutação avaliou a própria suíte e mostrou fragilidades mesmo com 100% dos desvios; e é preciso corrigir antes de mutar.</a:t>
+              <a:t>Lições (40 s): limites acham defeitos que valores típicos não acham; cobertura mede o que executou, não o que foi verificado (o original tinha 100% dos comandos com 31 testes falhando); a mutação avaliou a própria suíte e mostrou fragilidades mesmo com 100% dos desvios; e é preciso corrigir antes de mutar.</a:t>
             </a:r>
           </a:p>
         </p:txBody>
@@ -4215,7 +4215,7 @@
                 </a:solidFill>
                 <a:latin typeface="Segoe UI"/>
               </a:rPr>
-              <a:t>Hotel Management System (Flask + SQLite, 354 SLOC) · reservar, cancelar e consultar disponibilidade</a:t>
+              <a:t>Hotel Management System (Flask + SQLite) · REQ-01 Reservar quartos · REQ-02 Data de entrada · REQ-03 Data de saída</a:t>
             </a:r>
           </a:p>
         </p:txBody>
@@ -4402,7 +4402,7 @@
                 </a:solidFill>
                 <a:latin typeface="Segoe UI"/>
               </a:rPr>
-              <a:t>48 classes</a:t>
+              <a:t>42 classes</a:t>
             </a:r>
             <a:r>
               <a:rPr sz="1050" b="0">
@@ -4411,7 +4411,7 @@
                 </a:solidFill>
                 <a:latin typeface="Segoe UI"/>
               </a:rPr>
-              <a:t> (31 válidas, 17 inválidas)</a:t>
+              <a:t> (23 válidas, 19 inválidas)</a:t>
             </a:r>
           </a:p>
           <a:p>
@@ -4443,7 +4443,7 @@
                 </a:solidFill>
                 <a:latin typeface="Segoe UI"/>
               </a:rPr>
-              <a:t>52 casos</a:t>
+              <a:t>50 casos</a:t>
             </a:r>
             <a:r>
               <a:rPr sz="1050" b="0">
@@ -4468,7 +4468,7 @@
                 </a:solidFill>
                 <a:latin typeface="Segoe UI"/>
               </a:rPr>
-              <a:t>30 falham</a:t>
+              <a:t>28 falham</a:t>
             </a:r>
             <a:r>
               <a:rPr sz="1050" b="0">
@@ -4477,7 +4477,7 @@
                 </a:solidFill>
                 <a:latin typeface="Segoe UI"/>
               </a:rPr>
-              <a:t> → 16 defeitos</a:t>
+              <a:t> → 12 defeitos</a:t>
             </a:r>
           </a:p>
         </p:txBody>
@@ -4693,7 +4693,7 @@
                 </a:solidFill>
                 <a:latin typeface="Segoe UI"/>
               </a:rPr>
-              <a:t>98,1%</a:t>
+              <a:t>98,0%</a:t>
             </a:r>
             <a:r>
               <a:rPr sz="1050" b="0">
@@ -4834,7 +4834,7 @@
                 </a:solidFill>
                 <a:latin typeface="Segoe UI"/>
               </a:rPr>
-              <a:t>19 defeitos</a:t>
+              <a:t>15 defeitos</a:t>
             </a:r>
             <a:r>
               <a:rPr sz="1050" b="0">
@@ -4843,7 +4843,7 @@
                 </a:solidFill>
                 <a:latin typeface="Segoe UI"/>
               </a:rPr>
-              <a:t> corrigidos</a:t>
+              <a:t> corrigidos (+4 do cancelamento)</a:t>
             </a:r>
           </a:p>
           <a:p>
@@ -4875,7 +4875,7 @@
                 </a:solidFill>
                 <a:latin typeface="Segoe UI"/>
               </a:rPr>
-              <a:t>59/59</a:t>
+              <a:t>57/57</a:t>
             </a:r>
             <a:r>
               <a:rPr sz="1050" b="0">
@@ -4982,7 +4982,7 @@
                 </a:solidFill>
                 <a:latin typeface="Segoe UI"/>
               </a:rPr>
-              <a:t>Cosmic Ray · 204 mutantes</a:t>
+              <a:t>Cosmic Ray · 189 mutantes</a:t>
             </a:r>
           </a:p>
         </p:txBody>
@@ -5050,7 +5050,7 @@
                 </a:solidFill>
                 <a:latin typeface="Segoe UI"/>
               </a:rPr>
-              <a:t>93,6%</a:t>
+              <a:t>94,2%</a:t>
             </a:r>
             <a:r>
               <a:rPr sz="1050" b="0">
@@ -5059,7 +5059,7 @@
                 </a:solidFill>
                 <a:latin typeface="Segoe UI"/>
               </a:rPr>
-              <a:t> (191/204)</a:t>
+              <a:t> (178/189)</a:t>
             </a:r>
           </a:p>
           <a:p>
@@ -5075,7 +5075,7 @@
                 </a:solidFill>
                 <a:latin typeface="Segoe UI"/>
               </a:rPr>
-              <a:t>13 vivos: </a:t>
+              <a:t>11 vivos: </a:t>
             </a:r>
             <a:r>
               <a:rPr sz="1050" b="1">
@@ -5084,7 +5084,7 @@
                 </a:solidFill>
                 <a:latin typeface="Segoe UI"/>
               </a:rPr>
-              <a:t>5 matáveis</a:t>
+              <a:t>3 matáveis</a:t>
             </a:r>
             <a:r>
               <a:rPr sz="1050" b="0">
@@ -5109,7 +5109,7 @@
                 </a:solidFill>
                 <a:latin typeface="Segoe UI"/>
               </a:rPr>
-              <a:t>+5 casos</a:t>
+              <a:t>+3 casos</a:t>
             </a:r>
             <a:r>
               <a:rPr sz="1050" b="0">
@@ -5143,7 +5143,7 @@
                 </a:solidFill>
                 <a:latin typeface="Segoe UI"/>
               </a:rPr>
-              <a:t>96,1%</a:t>
+              <a:t>95,8%</a:t>
             </a:r>
             <a:r>
               <a:rPr sz="1050" b="0">
@@ -5858,7 +5858,7 @@
                 </a:solidFill>
                 <a:latin typeface="Segoe UI"/>
               </a:rPr>
-              <a:t>64 casos · 19 defeitos encontrados e corrigidos · 100% dos desvios · 96,1% de escore de mutação</a:t>
+              <a:t>60 casos · 15 defeitos nos 3 requisitos, todos corrigidos · 100% dos desvios · 95,8% de escore de mutação</a:t>
             </a:r>
           </a:p>
         </p:txBody>
@@ -5972,7 +5972,7 @@
                 </a:solidFill>
                 <a:latin typeface="Segoe UI"/>
               </a:rPr>
-              <a:t>64</a:t>
+              <a:t>60</a:t>
             </a:r>
           </a:p>
           <a:p>
@@ -6047,7 +6047,7 @@
                 </a:solidFill>
                 <a:latin typeface="Segoe UI"/>
               </a:rPr>
-              <a:t>19</a:t>
+              <a:t>15</a:t>
             </a:r>
           </a:p>
           <a:p>
@@ -6197,7 +6197,7 @@
                 </a:solidFill>
                 <a:latin typeface="Segoe UI"/>
               </a:rPr>
-              <a:t>96,1%</a:t>
+              <a:t>95,8%</a:t>
             </a:r>
           </a:p>
           <a:p>
@@ -6578,7 +6578,7 @@
                 </a:solidFill>
                 <a:latin typeface="Segoe UI"/>
               </a:rPr>
-              <a:t>Qualquer usuário</a:t>
+              <a:t>Entrada hoje</a:t>
             </a:r>
             <a:r>
               <a:rPr sz="950" b="0">
@@ -6587,25 +6587,7 @@
                 </a:solidFill>
                 <a:latin typeface="Segoe UI"/>
               </a:rPr>
-              <a:t> cancela reserva alheia; </a:t>
-            </a:r>
-            <a:r>
-              <a:rPr sz="950" b="1">
-                <a:solidFill>
-                  <a:srgbClr val="0B1F3A"/>
-                </a:solidFill>
-                <a:latin typeface="Segoe UI"/>
-              </a:rPr>
-              <a:t>GET</a:t>
-            </a:r>
-            <a:r>
-              <a:rPr sz="950" b="0">
-                <a:solidFill>
-                  <a:srgbClr val="0B1F3A"/>
-                </a:solidFill>
-                <a:latin typeface="Segoe UI"/>
-              </a:rPr>
-              <a:t> apaga</a:t>
+              <a:t> recusada (data comparada com a hora)</a:t>
             </a:r>
           </a:p>
           <a:p>
@@ -6873,7 +6855,7 @@
                 </a:solidFill>
                 <a:latin typeface="Segoe UI"/>
               </a:rPr>
-              <a:t>: a técnica funcional achou 16 dos 19 defeitos</a:t>
+              <a:t>: a técnica funcional achou 12 dos 15 defeitos</a:t>
             </a:r>
           </a:p>
           <a:p>
@@ -6907,7 +6889,7 @@
                 </a:solidFill>
                 <a:latin typeface="Segoe UI"/>
               </a:rPr>
-              <a:t>: 100% dos comandos no original com 33 testes falhando</a:t>
+              <a:t>: 100% dos comandos no original com 31 testes falhando</a:t>
             </a:r>
           </a:p>
           <a:p>
@@ -6941,7 +6923,7 @@
                 </a:solidFill>
                 <a:latin typeface="Segoe UI"/>
               </a:rPr>
-              <a:t>: com 100% dos desvios ainda havia 5 mutantes vivos</a:t>
+              <a:t>: com 100% dos desvios ainda havia 3 mutantes vivos</a:t>
             </a:r>
           </a:p>
           <a:p>

--- a/docs/apresentacao-2-slides.pptx
+++ b/docs/apresentacao-2-slides.pptx
@@ -164,16 +164,16 @@
               <c:strCache>
                 <c:ptCount val="4"/>
                 <c:pt idx="0">
-                  <c:v>Funcional (50)</c:v>
+                  <c:v>Funcional (15)</c:v>
                 </c:pt>
                 <c:pt idx="1">
-                  <c:v>Estrutural (57)</c:v>
+                  <c:v>Estrutural (19)</c:v>
                 </c:pt>
                 <c:pt idx="2">
-                  <c:v>Correção (57)</c:v>
+                  <c:v>Correção (19)</c:v>
                 </c:pt>
                 <c:pt idx="3">
-                  <c:v>Mutação (60)</c:v>
+                  <c:v>Mutação (25)</c:v>
                 </c:pt>
               </c:strCache>
             </c:strRef>
@@ -185,7 +185,7 @@
                 <c:formatCode>General</c:formatCode>
                 <c:ptCount val="4"/>
                 <c:pt idx="0">
-                  <c:v>0.9129999999999999</c:v>
+                  <c:v>0.9520000000000001</c:v>
                 </c:pt>
                 <c:pt idx="1">
                   <c:v>1.0</c:v>
@@ -247,16 +247,16 @@
               <c:strCache>
                 <c:ptCount val="4"/>
                 <c:pt idx="0">
-                  <c:v>Funcional (50)</c:v>
+                  <c:v>Funcional (15)</c:v>
                 </c:pt>
                 <c:pt idx="1">
-                  <c:v>Estrutural (57)</c:v>
+                  <c:v>Estrutural (19)</c:v>
                 </c:pt>
                 <c:pt idx="2">
-                  <c:v>Correção (57)</c:v>
+                  <c:v>Correção (19)</c:v>
                 </c:pt>
                 <c:pt idx="3">
-                  <c:v>Mutação (60)</c:v>
+                  <c:v>Mutação (25)</c:v>
                 </c:pt>
               </c:strCache>
             </c:strRef>
@@ -268,10 +268,10 @@
                 <c:formatCode>General</c:formatCode>
                 <c:ptCount val="4"/>
                 <c:pt idx="0">
-                  <c:v>0.84</c:v>
+                  <c:v>0.853</c:v>
                 </c:pt>
                 <c:pt idx="1">
-                  <c:v>0.98</c:v>
+                  <c:v>0.971</c:v>
                 </c:pt>
                 <c:pt idx="2">
                   <c:v>1.0</c:v>
@@ -330,16 +330,16 @@
               <c:strCache>
                 <c:ptCount val="4"/>
                 <c:pt idx="0">
-                  <c:v>Funcional (50)</c:v>
+                  <c:v>Funcional (15)</c:v>
                 </c:pt>
                 <c:pt idx="1">
-                  <c:v>Estrutural (57)</c:v>
+                  <c:v>Estrutural (19)</c:v>
                 </c:pt>
                 <c:pt idx="2">
-                  <c:v>Correção (57)</c:v>
+                  <c:v>Correção (19)</c:v>
                 </c:pt>
                 <c:pt idx="3">
-                  <c:v>Mutação (60)</c:v>
+                  <c:v>Mutação (25)</c:v>
                 </c:pt>
               </c:strCache>
             </c:strRef>
@@ -351,10 +351,10 @@
                 <c:formatCode>General</c:formatCode>
                 <c:ptCount val="4"/>
                 <c:pt idx="2">
-                  <c:v>0.9420000000000001</c:v>
+                  <c:v>0.9009999999999999</c:v>
                 </c:pt>
                 <c:pt idx="3">
-                  <c:v>0.958</c:v>
+                  <c:v>0.95</c:v>
                 </c:pt>
               </c:numCache>
             </c:numRef>
@@ -841,13 +841,13 @@
           <a:p/>
           <a:p>
             <a:r>
-              <a:t>Funcional (40 s): só com o README e a interface, particionei 19 condições em 42 classes e apliquei valor limite (entrada hoje, uma noite, capacidade, estadias adjacentes). Foram 50 casos; no código original 28 falharam e revelaram 12 defeitos.</a:t>
+              <a:t>Funcional (40 s): só com o README e o formulário de reserva, particionei 10 condições em 22 classes: um caso para cada classe inválida, com os limites embutidos (entrada hoje, uma noite, capacidade, estadias adjacentes). Foram 15 casos; no código original 9 falharam e revelaram 9 defeitos.</a:t>
             </a:r>
           </a:p>
           <a:p/>
           <a:p>
             <a:r>
-              <a:t>Estrutural (40 s): medi com coverage.py --branch e defini a meta de 100% dos desvios viáveis. Os ramos que faltavam levaram a 7 casos novos e, lendo o código, a 3 defeitos que a especificação não sugeria: estado global, remoção dentro do laço e um produto cartesiano.</a:t>
+              <a:t>Estrutural (40 s): medi com coverage.py --branch e defini a meta de 100% dos desvios viáveis. Os ramos que faltavam levaram a 4 casos novos e, lendo o laço triplo, a um defeito que a especificação não sugeria: um produto cartesiano entre reservas e vínculos, mascarado pela tautologia.</a:t>
             </a:r>
           </a:p>
           <a:p/>
@@ -859,7 +859,7 @@
           <a:p/>
           <a:p>
             <a:r>
-              <a:t>Mutação (40 s): Cosmic Ray sobre todos os 189 mutantes das funções dos três requisitos. Dos 11 vivos, 3 eram matáveis e ganharam casos; os 8 restantes são equivalentes e estão justificados no relatório.</a:t>
+              <a:t>Mutação (40 s): Cosmic Ray sobre todos os 141 mutantes das funções dos três requisitos. Dos 14 vivos, 7 eram matáveis e ganharam casos; os 7 restantes são equivalentes e estão justificados no relatório.</a:t>
             </a:r>
           </a:p>
           <a:p/>
@@ -935,7 +935,7 @@
           <a:lstStyle/>
           <a:p>
             <a:r>
-              <a:t>Números (30 s): a suíte final tem 60 casos, 100% de comandos e desvios nas funções do recorte e 95,8% de escore de mutação. Os 8 mutantes vivos são equivalentes, então 100% dos não equivalentes morreram. No gráfico, a cobertura sobe na etapa estrutural e o escore sobe na mutação.</a:t>
+              <a:t>Números (30 s): a suíte final tem 25 casos, 100% de comandos e desvios nas funções do recorte e 95,0% de escore de mutação. Os 7 mutantes vivos são equivalentes, então 100% dos não equivalentes morreram. No gráfico, a cobertura sobe na etapa estrutural e o escore sobe na mutação.</a:t>
             </a:r>
           </a:p>
           <a:p/>
@@ -959,7 +959,7 @@
           <a:p/>
           <a:p>
             <a:r>
-              <a:t>Lições (40 s): limites acham defeitos que valores típicos não acham; cobertura mede o que executou, não o que foi verificado (o original tinha 100% dos comandos com 31 testes falhando); a mutação avaliou a própria suíte e mostrou fragilidades mesmo com 100% dos desvios; e é preciso corrigir antes de mutar.</a:t>
+              <a:t>Lições (40 s): limites acham defeitos que valores típicos não acham; cobertura mede o que executou, não o que foi verificado (o original tinha 100% dos comandos com 10 testes falhando); a mutação avaliou a própria suíte e mostrou fragilidades mesmo com 100% dos desvios; e é preciso corrigir antes de mutar.</a:t>
             </a:r>
           </a:p>
         </p:txBody>
@@ -4402,7 +4402,7 @@
                 </a:solidFill>
                 <a:latin typeface="Segoe UI"/>
               </a:rPr>
-              <a:t>42 classes</a:t>
+              <a:t>22 classes</a:t>
             </a:r>
             <a:r>
               <a:rPr sz="1050" b="0">
@@ -4411,7 +4411,7 @@
                 </a:solidFill>
                 <a:latin typeface="Segoe UI"/>
               </a:rPr>
-              <a:t> (23 válidas, 19 inválidas)</a:t>
+              <a:t> (11 válidas, 11 inválidas)</a:t>
             </a:r>
           </a:p>
           <a:p>
@@ -4427,7 +4427,7 @@
                 </a:solidFill>
                 <a:latin typeface="Segoe UI"/>
               </a:rPr>
-              <a:t>Valor limite: abaixo / no limite / acima</a:t>
+              <a:t>1 caso por classe inválida, limites embutidos</a:t>
             </a:r>
           </a:p>
           <a:p>
@@ -4443,7 +4443,7 @@
                 </a:solidFill>
                 <a:latin typeface="Segoe UI"/>
               </a:rPr>
-              <a:t>50 casos</a:t>
+              <a:t>15 casos</a:t>
             </a:r>
             <a:r>
               <a:rPr sz="1050" b="0">
@@ -4468,7 +4468,7 @@
                 </a:solidFill>
                 <a:latin typeface="Segoe UI"/>
               </a:rPr>
-              <a:t>28 falham</a:t>
+              <a:t>9 falham</a:t>
             </a:r>
             <a:r>
               <a:rPr sz="1050" b="0">
@@ -4477,7 +4477,7 @@
                 </a:solidFill>
                 <a:latin typeface="Segoe UI"/>
               </a:rPr>
-              <a:t> → 12 defeitos</a:t>
+              <a:t> → 9 defeitos</a:t>
             </a:r>
           </a:p>
         </p:txBody>
@@ -4643,7 +4643,7 @@
                 </a:solidFill>
                 <a:latin typeface="Segoe UI"/>
               </a:rPr>
-              <a:t>+7 casos</a:t>
+              <a:t>+4 casos</a:t>
             </a:r>
             <a:r>
               <a:rPr sz="1050" b="0">
@@ -4668,7 +4668,7 @@
                 </a:solidFill>
                 <a:latin typeface="Segoe UI"/>
               </a:rPr>
-              <a:t>+3 defeitos</a:t>
+              <a:t>+1 defeito</a:t>
             </a:r>
             <a:r>
               <a:rPr sz="1050" b="0">
@@ -4677,7 +4677,7 @@
                 </a:solidFill>
                 <a:latin typeface="Segoe UI"/>
               </a:rPr>
-              <a:t> só visíveis no código</a:t>
+              <a:t> só visível no código</a:t>
             </a:r>
           </a:p>
           <a:p>
@@ -4693,7 +4693,7 @@
                 </a:solidFill>
                 <a:latin typeface="Segoe UI"/>
               </a:rPr>
-              <a:t>98,0%</a:t>
+              <a:t>97,1%</a:t>
             </a:r>
             <a:r>
               <a:rPr sz="1050" b="0">
@@ -4834,7 +4834,7 @@
                 </a:solidFill>
                 <a:latin typeface="Segoe UI"/>
               </a:rPr>
-              <a:t>15 defeitos</a:t>
+              <a:t>10 defeitos</a:t>
             </a:r>
             <a:r>
               <a:rPr sz="1050" b="0">
@@ -4843,7 +4843,7 @@
                 </a:solidFill>
                 <a:latin typeface="Segoe UI"/>
               </a:rPr>
-              <a:t> corrigidos (+4 do cancelamento)</a:t>
+              <a:t> corrigidos (+9 dos secundários)</a:t>
             </a:r>
           </a:p>
           <a:p>
@@ -4875,7 +4875,7 @@
                 </a:solidFill>
                 <a:latin typeface="Segoe UI"/>
               </a:rPr>
-              <a:t>57/57</a:t>
+              <a:t>19/19</a:t>
             </a:r>
             <a:r>
               <a:rPr sz="1050" b="0">
@@ -4982,7 +4982,7 @@
                 </a:solidFill>
                 <a:latin typeface="Segoe UI"/>
               </a:rPr>
-              <a:t>Cosmic Ray · 189 mutantes</a:t>
+              <a:t>Cosmic Ray · 141 mutantes</a:t>
             </a:r>
           </a:p>
         </p:txBody>
@@ -5050,7 +5050,7 @@
                 </a:solidFill>
                 <a:latin typeface="Segoe UI"/>
               </a:rPr>
-              <a:t>94,2%</a:t>
+              <a:t>90,1%</a:t>
             </a:r>
             <a:r>
               <a:rPr sz="1050" b="0">
@@ -5059,7 +5059,7 @@
                 </a:solidFill>
                 <a:latin typeface="Segoe UI"/>
               </a:rPr>
-              <a:t> (178/189)</a:t>
+              <a:t> (127/141)</a:t>
             </a:r>
           </a:p>
           <a:p>
@@ -5075,7 +5075,7 @@
                 </a:solidFill>
                 <a:latin typeface="Segoe UI"/>
               </a:rPr>
-              <a:t>11 vivos: </a:t>
+              <a:t>14 vivos: </a:t>
             </a:r>
             <a:r>
               <a:rPr sz="1050" b="1">
@@ -5084,7 +5084,7 @@
                 </a:solidFill>
                 <a:latin typeface="Segoe UI"/>
               </a:rPr>
-              <a:t>3 matáveis</a:t>
+              <a:t>7 matáveis</a:t>
             </a:r>
             <a:r>
               <a:rPr sz="1050" b="0">
@@ -5093,7 +5093,7 @@
                 </a:solidFill>
                 <a:latin typeface="Segoe UI"/>
               </a:rPr>
-              <a:t>, 8 equivalentes</a:t>
+              <a:t>, 7 equivalentes</a:t>
             </a:r>
           </a:p>
           <a:p>
@@ -5109,7 +5109,7 @@
                 </a:solidFill>
                 <a:latin typeface="Segoe UI"/>
               </a:rPr>
-              <a:t>+3 casos</a:t>
+              <a:t>+6 casos</a:t>
             </a:r>
             <a:r>
               <a:rPr sz="1050" b="0">
@@ -5143,7 +5143,7 @@
                 </a:solidFill>
                 <a:latin typeface="Segoe UI"/>
               </a:rPr>
-              <a:t>95,8%</a:t>
+              <a:t>95,0%</a:t>
             </a:r>
             <a:r>
               <a:rPr sz="1050" b="0">
@@ -5858,7 +5858,7 @@
                 </a:solidFill>
                 <a:latin typeface="Segoe UI"/>
               </a:rPr>
-              <a:t>60 casos · 15 defeitos nos 3 requisitos, todos corrigidos · 100% dos desvios · 95,8% de escore de mutação</a:t>
+              <a:t>25 casos · 10 defeitos nos 3 requisitos, todos corrigidos · 100% dos desvios · 95,0% de escore de mutação</a:t>
             </a:r>
           </a:p>
         </p:txBody>
@@ -5972,7 +5972,7 @@
                 </a:solidFill>
                 <a:latin typeface="Segoe UI"/>
               </a:rPr>
-              <a:t>60</a:t>
+              <a:t>25</a:t>
             </a:r>
           </a:p>
           <a:p>
@@ -6047,7 +6047,7 @@
                 </a:solidFill>
                 <a:latin typeface="Segoe UI"/>
               </a:rPr>
-              <a:t>15</a:t>
+              <a:t>10</a:t>
             </a:r>
           </a:p>
           <a:p>
@@ -6197,7 +6197,7 @@
                 </a:solidFill>
                 <a:latin typeface="Segoe UI"/>
               </a:rPr>
-              <a:t>95,8%</a:t>
+              <a:t>95,0%</a:t>
             </a:r>
           </a:p>
           <a:p>
@@ -6603,7 +6603,7 @@
                 </a:solidFill>
                 <a:latin typeface="Segoe UI"/>
               </a:rPr>
-              <a:t>• Filtro em </a:t>
+              <a:t>• </a:t>
             </a:r>
             <a:r>
               <a:rPr sz="950" b="1">
@@ -6612,7 +6612,7 @@
                 </a:solidFill>
                 <a:latin typeface="Segoe UI"/>
               </a:rPr>
-              <a:t>variável global</a:t>
+              <a:t>Quarto inexistente ou repetido</a:t>
             </a:r>
             <a:r>
               <a:rPr sz="950" b="0">
@@ -6621,7 +6621,7 @@
                 </a:solidFill>
                 <a:latin typeface="Segoe UI"/>
               </a:rPr>
-              <a:t> vaza entre sessões</a:t>
+              <a:t> aceito na reserva</a:t>
             </a:r>
           </a:p>
           <a:p>
@@ -6855,7 +6855,7 @@
                 </a:solidFill>
                 <a:latin typeface="Segoe UI"/>
               </a:rPr>
-              <a:t>: a técnica funcional achou 12 dos 15 defeitos</a:t>
+              <a:t>: 15 casos funcionais acharam 9 dos 10 defeitos</a:t>
             </a:r>
           </a:p>
           <a:p>
@@ -6889,7 +6889,7 @@
                 </a:solidFill>
                 <a:latin typeface="Segoe UI"/>
               </a:rPr>
-              <a:t>: 100% dos comandos no original com 31 testes falhando</a:t>
+              <a:t>: 100% dos comandos no original com 10 testes falhando</a:t>
             </a:r>
           </a:p>
           <a:p>
@@ -6923,7 +6923,7 @@
                 </a:solidFill>
                 <a:latin typeface="Segoe UI"/>
               </a:rPr>
-              <a:t>: com 100% dos desvios ainda havia 3 mutantes vivos</a:t>
+              <a:t>: com 100% dos desvios ainda havia 7 mutantes não equivalentes vivos</a:t>
             </a:r>
           </a:p>
           <a:p>

--- a/docs/apresentacao-2-slides.pptx
+++ b/docs/apresentacao-2-slides.pptx
@@ -167,13 +167,13 @@
                   <c:v>Funcional (15)</c:v>
                 </c:pt>
                 <c:pt idx="1">
-                  <c:v>Estrutural (19)</c:v>
+                  <c:v>Estrutural (15)</c:v>
                 </c:pt>
                 <c:pt idx="2">
-                  <c:v>Correção (19)</c:v>
+                  <c:v>Correção (15)</c:v>
                 </c:pt>
                 <c:pt idx="3">
-                  <c:v>Mutação (25)</c:v>
+                  <c:v>Mutação (15)</c:v>
                 </c:pt>
               </c:strCache>
             </c:strRef>
@@ -250,13 +250,13 @@
                   <c:v>Funcional (15)</c:v>
                 </c:pt>
                 <c:pt idx="1">
-                  <c:v>Estrutural (19)</c:v>
+                  <c:v>Estrutural (15)</c:v>
                 </c:pt>
                 <c:pt idx="2">
-                  <c:v>Correção (19)</c:v>
+                  <c:v>Correção (15)</c:v>
                 </c:pt>
                 <c:pt idx="3">
-                  <c:v>Mutação (25)</c:v>
+                  <c:v>Mutação (15)</c:v>
                 </c:pt>
               </c:strCache>
             </c:strRef>
@@ -333,13 +333,13 @@
                   <c:v>Funcional (15)</c:v>
                 </c:pt>
                 <c:pt idx="1">
-                  <c:v>Estrutural (19)</c:v>
+                  <c:v>Estrutural (15)</c:v>
                 </c:pt>
                 <c:pt idx="2">
-                  <c:v>Correção (19)</c:v>
+                  <c:v>Correção (15)</c:v>
                 </c:pt>
                 <c:pt idx="3">
-                  <c:v>Mutação (25)</c:v>
+                  <c:v>Mutação (15)</c:v>
                 </c:pt>
               </c:strCache>
             </c:strRef>
@@ -847,7 +847,7 @@
           <a:p/>
           <a:p>
             <a:r>
-              <a:t>Estrutural (40 s): medi com coverage.py --branch e defini a meta de 100% dos desvios viáveis. Os ramos que faltavam levaram a 4 casos novos e, lendo o laço triplo, a um defeito que a especificação não sugeria: um produto cartesiano entre reservas e vínculos, mascarado pela tautologia.</a:t>
+              <a:t>Estrutural (40 s): medi com coverage.py --branch e defini a meta de 100% dos desvios viáveis. Os ramos que faltavam foram cobertos sem criar casos: reaproveitei 5 funcionais para percorrer os grafos e ampliei 3 deles. Lendo o laço triplo, achei um defeito que a especificação não sugeria: um produto cartesiano entre reservas e vínculos, mascarado pela tautologia.</a:t>
             </a:r>
           </a:p>
           <a:p/>
@@ -859,7 +859,7 @@
           <a:p/>
           <a:p>
             <a:r>
-              <a:t>Mutação (40 s): Cosmic Ray sobre todos os 141 mutantes das funções dos três requisitos. Dos 14 vivos, 7 eram matáveis e ganharam casos; os 7 restantes são equivalentes e estão justificados no relatório.</a:t>
+              <a:t>Mutação (40 s): Cosmic Ray sobre todos os 141 mutantes das funções dos três requisitos. Dos 14 vivos, 7 eram matáveis e foram mortos ampliando 4 dos mesmos 15 casos; os 7 restantes são equivalentes e estão justificados no relatório.</a:t>
             </a:r>
           </a:p>
           <a:p/>
@@ -935,7 +935,7 @@
           <a:lstStyle/>
           <a:p>
             <a:r>
-              <a:t>Números (30 s): a suíte final tem 25 casos, 100% de comandos e desvios nas funções do recorte e 95,0% de escore de mutação. Os 7 mutantes vivos são equivalentes, então 100% dos não equivalentes morreram. No gráfico, a cobertura sobe na etapa estrutural e o escore sobe na mutação.</a:t>
+              <a:t>Números (30 s): os mesmos 15 casos atravessam as três etapas (ampliados quando faltou um cenário), com 100% de comandos e desvios nas funções do recorte e 95,0% de escore de mutação. Os 7 mutantes vivos são equivalentes, então 100% dos não equivalentes morreram. No gráfico, a cobertura sobe na etapa estrutural e o escore sobe na mutação.</a:t>
             </a:r>
           </a:p>
           <a:p/>
@@ -4643,7 +4643,7 @@
                 </a:solidFill>
                 <a:latin typeface="Segoe UI"/>
               </a:rPr>
-              <a:t>+4 casos</a:t>
+              <a:t>5 casos reaproveitados</a:t>
             </a:r>
             <a:r>
               <a:rPr sz="1050" b="0">
@@ -4652,7 +4652,7 @@
                 </a:solidFill>
                 <a:latin typeface="Segoe UI"/>
               </a:rPr>
-              <a:t> guiados pelas lacunas</a:t>
+              <a:t>; 3 ampliados nas lacunas</a:t>
             </a:r>
           </a:p>
           <a:p>
@@ -4875,7 +4875,7 @@
                 </a:solidFill>
                 <a:latin typeface="Segoe UI"/>
               </a:rPr>
-              <a:t>19/19</a:t>
+              <a:t>15/15</a:t>
             </a:r>
             <a:r>
               <a:rPr sz="1050" b="0">
@@ -4884,7 +4884,7 @@
                 </a:solidFill>
                 <a:latin typeface="Segoe UI"/>
               </a:rPr>
-              <a:t> passam, sem skip</a:t>
+              <a:t> casos passam, sem skip</a:t>
             </a:r>
           </a:p>
           <a:p>
@@ -5109,7 +5109,7 @@
                 </a:solidFill>
                 <a:latin typeface="Segoe UI"/>
               </a:rPr>
-              <a:t>+6 casos</a:t>
+              <a:t>4 casos ampliados</a:t>
             </a:r>
             <a:r>
               <a:rPr sz="1050" b="0">
@@ -5118,7 +5118,7 @@
                 </a:solidFill>
                 <a:latin typeface="Segoe UI"/>
               </a:rPr>
-              <a:t> para os matáveis</a:t>
+              <a:t>, nenhum novo</a:t>
             </a:r>
           </a:p>
           <a:p>
@@ -5858,7 +5858,7 @@
                 </a:solidFill>
                 <a:latin typeface="Segoe UI"/>
               </a:rPr>
-              <a:t>25 casos · 10 defeitos nos 3 requisitos, todos corrigidos · 100% dos desvios · 95,0% de escore de mutação</a:t>
+              <a:t>os mesmos 15 casos nas 3 etapas · 10 defeitos, todos corrigidos · 100% dos desvios · 95,0% de escore de mutação</a:t>
             </a:r>
           </a:p>
         </p:txBody>
@@ -5972,7 +5972,7 @@
                 </a:solidFill>
                 <a:latin typeface="Segoe UI"/>
               </a:rPr>
-              <a:t>25</a:t>
+              <a:t>15</a:t>
             </a:r>
           </a:p>
           <a:p>

--- a/docs/apresentacao-2-slides.pptx
+++ b/docs/apresentacao-2-slides.pptx
@@ -351,10 +351,10 @@
                 <c:formatCode>General</c:formatCode>
                 <c:ptCount val="4"/>
                 <c:pt idx="2">
-                  <c:v>0.9009999999999999</c:v>
+                  <c:v>0.9477611940298507</c:v>
                 </c:pt>
                 <c:pt idx="3">
-                  <c:v>0.95</c:v>
+                  <c:v>1.0</c:v>
                 </c:pt>
               </c:numCache>
             </c:numRef>
@@ -859,7 +859,7 @@
           <a:p/>
           <a:p>
             <a:r>
-              <a:t>Mutação (40 s): Cosmic Ray sobre todos os 141 mutantes das funções dos três requisitos. Dos 14 vivos, 7 eram matáveis e foram mortos ampliando 4 dos mesmos 15 casos; os 7 restantes são equivalentes e estão justificados no relatório.</a:t>
+              <a:t>Mutação (40 s): Cosmic Ray sobre todos os 141 mutantes das funções dos três requisitos. Dos 14 vivos, 7 eram matáveis e foram mortos ampliando 4 dos mesmos 15 casos; os 7 restantes são equivalentes e estão justificados no relatório. Pela fórmula da disciplina, que tira os equivalentes do denominador, o escore foi de 94,8% para 100,0% (sem descontar: 90,1% e 95,0%).</a:t>
             </a:r>
           </a:p>
           <a:p/>
@@ -935,7 +935,7 @@
           <a:lstStyle/>
           <a:p>
             <a:r>
-              <a:t>Números (30 s): os mesmos 15 casos atravessam as três etapas (ampliados quando faltou um cenário), com 100% de comandos e desvios nas funções do recorte e 95,0% de escore de mutação. Os 7 mutantes vivos são equivalentes, então 100% dos não equivalentes morreram. No gráfico, a cobertura sobe na etapa estrutural e o escore sobe na mutação.</a:t>
+              <a:t>Números (30 s): os mesmos 15 casos atravessam as três etapas (ampliados quando faltou um cenário), com 100% de comandos e desvios nas funções do recorte e 100,0% de escore de mutação: 134 mortos ÷ (141 gerados − 7 equivalentes). Os 7 mutantes vivos são equivalentes, por isso saem do denominador (sem descontar, o escore seria 95,0%). No gráfico, a cobertura sobe na etapa estrutural e o escore sobe na mutação.</a:t>
             </a:r>
           </a:p>
           <a:p/>
@@ -5041,25 +5041,7 @@
                 </a:solidFill>
                 <a:latin typeface="Segoe UI"/>
               </a:rPr>
-              <a:t>Inicial: </a:t>
-            </a:r>
-            <a:r>
-              <a:rPr sz="1050" b="1">
-                <a:solidFill>
-                  <a:srgbClr val="0B1F3A"/>
-                </a:solidFill>
-                <a:latin typeface="Segoe UI"/>
-              </a:rPr>
-              <a:t>90,1%</a:t>
-            </a:r>
-            <a:r>
-              <a:rPr sz="1050" b="0">
-                <a:solidFill>
-                  <a:srgbClr val="0B1F3A"/>
-                </a:solidFill>
-                <a:latin typeface="Segoe UI"/>
-              </a:rPr>
-              <a:t> (127/141)</a:t>
+              <a:t>Escore = mortos ÷ (gerados − 7 equivalentes)</a:t>
             </a:r>
           </a:p>
           <a:p>
@@ -5075,7 +5057,7 @@
                 </a:solidFill>
                 <a:latin typeface="Segoe UI"/>
               </a:rPr>
-              <a:t>14 vivos: </a:t>
+              <a:t>Inicial: </a:t>
             </a:r>
             <a:r>
               <a:rPr sz="1050" b="1">
@@ -5084,7 +5066,7 @@
                 </a:solidFill>
                 <a:latin typeface="Segoe UI"/>
               </a:rPr>
-              <a:t>7 matáveis</a:t>
+              <a:t>94,8%</a:t>
             </a:r>
             <a:r>
               <a:rPr sz="1050" b="0">
@@ -5093,7 +5075,7 @@
                 </a:solidFill>
                 <a:latin typeface="Segoe UI"/>
               </a:rPr>
-              <a:t>, 7 equivalentes</a:t>
+              <a:t> (127/134)</a:t>
             </a:r>
           </a:p>
           <a:p>
@@ -5103,22 +5085,40 @@
               </a:spcAft>
             </a:pPr>
             <a:r>
+              <a:rPr sz="1050" b="0">
+                <a:solidFill>
+                  <a:srgbClr val="0B1F3A"/>
+                </a:solidFill>
+                <a:latin typeface="Segoe UI"/>
+              </a:rPr>
+              <a:t>14 vivos: </a:t>
+            </a:r>
+            <a:r>
               <a:rPr sz="1050" b="1">
                 <a:solidFill>
                   <a:srgbClr val="0B1F3A"/>
                 </a:solidFill>
                 <a:latin typeface="Segoe UI"/>
               </a:rPr>
+              <a:t>7 matáveis</a:t>
+            </a:r>
+            <a:r>
+              <a:rPr sz="1050" b="0">
+                <a:solidFill>
+                  <a:srgbClr val="0B1F3A"/>
+                </a:solidFill>
+                <a:latin typeface="Segoe UI"/>
+              </a:rPr>
+              <a:t>; </a:t>
+            </a:r>
+            <a:r>
+              <a:rPr sz="1050" b="1">
+                <a:solidFill>
+                  <a:srgbClr val="0B1F3A"/>
+                </a:solidFill>
+                <a:latin typeface="Segoe UI"/>
+              </a:rPr>
               <a:t>4 casos ampliados</a:t>
-            </a:r>
-            <a:r>
-              <a:rPr sz="1050" b="0">
-                <a:solidFill>
-                  <a:srgbClr val="0B1F3A"/>
-                </a:solidFill>
-                <a:latin typeface="Segoe UI"/>
-              </a:rPr>
-              <a:t>, nenhum novo</a:t>
             </a:r>
           </a:p>
           <a:p>
@@ -5143,7 +5143,7 @@
                 </a:solidFill>
                 <a:latin typeface="Segoe UI"/>
               </a:rPr>
-              <a:t>95,0%</a:t>
+              <a:t>100,0%</a:t>
             </a:r>
             <a:r>
               <a:rPr sz="1050" b="0">
@@ -5152,7 +5152,7 @@
                 </a:solidFill>
                 <a:latin typeface="Segoe UI"/>
               </a:rPr>
-              <a:t> · 100% dos não equivalentes</a:t>
+              <a:t> (134/134)</a:t>
             </a:r>
           </a:p>
         </p:txBody>
@@ -5858,7 +5858,7 @@
                 </a:solidFill>
                 <a:latin typeface="Segoe UI"/>
               </a:rPr>
-              <a:t>os mesmos 15 casos nas 3 etapas · 10 defeitos, todos corrigidos · 100% dos desvios · 95,0% de escore de mutação</a:t>
+              <a:t>os mesmos 15 casos nas 3 etapas · 10 defeitos, todos corrigidos · 100% dos desvios · 100,0% de escore de mutação</a:t>
             </a:r>
           </a:p>
         </p:txBody>
@@ -6197,7 +6197,7 @@
                 </a:solidFill>
                 <a:latin typeface="Segoe UI"/>
               </a:rPr>
-              <a:t>95,0%</a:t>
+              <a:t>100,0%</a:t>
             </a:r>
           </a:p>
           <a:p>
@@ -6213,7 +6213,7 @@
                 </a:solidFill>
                 <a:latin typeface="Segoe UI"/>
               </a:rPr>
-              <a:t>escore de mutação</a:t>
+              <a:t>escore de mutação (134 ÷ 134)</a:t>
             </a:r>
           </a:p>
         </p:txBody>
